--- a/Week 7/L13_Support_Copilot_v3_discussion.pptx
+++ b/Week 7/L13_Support_Copilot_v3_discussion.pptx
@@ -23,6 +23,7 @@
     <p:sldId id="271" r:id="rId22"/>
     <p:sldId id="272" r:id="rId23"/>
     <p:sldId id="273" r:id="rId24"/>
+    <p:sldId id="274" r:id="rId25"/>
   </p:sldIdLst>
   <p:sldSz cx="12191695" cy="6858000" type="screen4x3"/>
   <p:notesSz cx="6858000" cy="9144000"/>
@@ -3735,7 +3736,7 @@
         <p:spPr>
           <a:xfrm>
             <a:off x="640080" y="758952"/>
-            <a:ext cx="7680960" cy="704088"/>
+            <a:ext cx="7680960" cy="1179576"/>
           </a:xfrm>
           <a:prstGeom prst="rect">
             <a:avLst/>
@@ -3750,55 +3751,20 @@
           <a:p>
             <a:pPr algn="l"/>
             <a:r>
-              <a:rPr sz="2450" b="1" i="0">
+              <a:rPr sz="2900" b="1" i="0">
                 <a:solidFill>
                   <a:srgbClr val="0F172A"/>
                 </a:solidFill>
                 <a:latin typeface="Helvetica Neue"/>
               </a:rPr>
-              <a:t>It is not a classifier. It is a fact-checker.</a:t>
-            </a:r>
-          </a:p>
-        </p:txBody>
-      </p:sp>
-      <p:sp>
-        <p:nvSpPr>
-          <p:cNvPr id="4" name="TextBox 3"/>
-          <p:cNvSpPr txBox="1"/>
-          <p:nvPr/>
-        </p:nvSpPr>
-        <p:spPr>
-          <a:xfrm>
-            <a:off x="640080" y="1417320"/>
-            <a:ext cx="10424160" cy="457200"/>
-          </a:xfrm>
-          <a:prstGeom prst="rect">
-            <a:avLst/>
-          </a:prstGeom>
-          <a:noFill/>
-        </p:spPr>
-        <p:txBody>
-          <a:bodyPr wrap="square" lIns="0" rIns="0" tIns="0" bIns="0">
-            <a:spAutoFit/>
-          </a:bodyPr>
-          <a:lstStyle/>
-          <a:p>
-            <a:pPr algn="l"/>
-            <a:r>
-              <a:rPr sz="1500" b="0" i="0">
-                <a:solidFill>
-                  <a:srgbClr val="475569"/>
-                </a:solidFill>
-                <a:latin typeface="Helvetica Neue"/>
-              </a:rPr>
-              <a:t>The model judges whether a sentence YOU wrote is true of the ticket.</a:t>
-            </a:r>
-          </a:p>
-        </p:txBody>
-      </p:sp>
-      <p:sp>
-        <p:nvSpPr>
-          <p:cNvPr id="5" name="Rounded Rectangle 4"/>
+              <a:t>Sort the inbox with no training data at all.</a:t>
+            </a:r>
+          </a:p>
+        </p:txBody>
+      </p:sp>
+      <p:sp>
+        <p:nvSpPr>
+          <p:cNvPr id="4" name="Rounded Rectangle 3"/>
           <p:cNvSpPr/>
           <p:nvPr/>
         </p:nvSpPr>
@@ -3841,7 +3807,7 @@
       </p:sp>
       <p:sp>
         <p:nvSpPr>
-          <p:cNvPr id="6" name="Rounded Rectangle 5"/>
+          <p:cNvPr id="5" name="Rounded Rectangle 4"/>
           <p:cNvSpPr/>
           <p:nvPr/>
         </p:nvSpPr>
@@ -3886,7 +3852,7 @@
       </p:sp>
       <p:sp>
         <p:nvSpPr>
-          <p:cNvPr id="7" name="TextBox 6"/>
+          <p:cNvPr id="6" name="TextBox 5"/>
           <p:cNvSpPr txBox="1"/>
           <p:nvPr/>
         </p:nvSpPr>
@@ -3921,7 +3887,7 @@
       </p:sp>
       <p:sp>
         <p:nvSpPr>
-          <p:cNvPr id="8" name="Rounded Rectangle 7"/>
+          <p:cNvPr id="7" name="Rounded Rectangle 6"/>
           <p:cNvSpPr/>
           <p:nvPr/>
         </p:nvSpPr>
@@ -3966,7 +3932,7 @@
       </p:sp>
       <p:sp>
         <p:nvSpPr>
-          <p:cNvPr id="9" name="TextBox 8"/>
+          <p:cNvPr id="8" name="TextBox 7"/>
           <p:cNvSpPr txBox="1"/>
           <p:nvPr/>
         </p:nvSpPr>
@@ -4001,7 +3967,7 @@
       </p:sp>
       <p:sp>
         <p:nvSpPr>
-          <p:cNvPr id="10" name="Rounded Rectangle 9"/>
+          <p:cNvPr id="9" name="Rounded Rectangle 8"/>
           <p:cNvSpPr/>
           <p:nvPr/>
         </p:nvSpPr>
@@ -4046,7 +4012,7 @@
       </p:sp>
       <p:sp>
         <p:nvSpPr>
-          <p:cNvPr id="11" name="TextBox 10"/>
+          <p:cNvPr id="10" name="TextBox 9"/>
           <p:cNvSpPr txBox="1"/>
           <p:nvPr/>
         </p:nvSpPr>
@@ -4081,7 +4047,7 @@
       </p:sp>
       <p:sp>
         <p:nvSpPr>
-          <p:cNvPr id="12" name="Rounded Rectangle 11"/>
+          <p:cNvPr id="11" name="Rounded Rectangle 10"/>
           <p:cNvSpPr/>
           <p:nvPr/>
         </p:nvSpPr>
@@ -4126,7 +4092,7 @@
       </p:sp>
       <p:sp>
         <p:nvSpPr>
-          <p:cNvPr id="13" name="TextBox 12"/>
+          <p:cNvPr id="12" name="TextBox 11"/>
           <p:cNvSpPr txBox="1"/>
           <p:nvPr/>
         </p:nvSpPr>
@@ -4161,7 +4127,7 @@
       </p:sp>
       <p:sp>
         <p:nvSpPr>
-          <p:cNvPr id="14" name="TextBox 13"/>
+          <p:cNvPr id="13" name="TextBox 12"/>
           <p:cNvSpPr txBox="1"/>
           <p:nvPr/>
         </p:nvSpPr>
@@ -4196,7 +4162,7 @@
       </p:sp>
       <p:pic>
         <p:nvPicPr>
-          <p:cNvPr id="15" name="Picture 14" descr="d_nli.png"/>
+          <p:cNvPr id="14" name="Picture 13" descr="d_zs.png"/>
           <p:cNvPicPr>
             <a:picLocks noChangeAspect="1"/>
           </p:cNvPicPr>
@@ -4210,8 +4176,8 @@
         </p:blipFill>
         <p:spPr>
           <a:xfrm>
-            <a:off x="518007" y="2596680"/>
-            <a:ext cx="11155680" cy="2350438"/>
+            <a:off x="1473370" y="1965960"/>
+            <a:ext cx="9244954" cy="4297679"/>
           </a:xfrm>
           <a:prstGeom prst="rect">
             <a:avLst/>
@@ -4220,14 +4186,14 @@
       </p:pic>
       <p:sp>
         <p:nvSpPr>
-          <p:cNvPr id="16" name="Rounded Rectangle 15"/>
+          <p:cNvPr id="15" name="Rounded Rectangle 14"/>
           <p:cNvSpPr/>
           <p:nvPr/>
         </p:nvSpPr>
         <p:spPr>
           <a:xfrm>
-            <a:off x="7306056" y="6345936"/>
-            <a:ext cx="4245559" cy="365760"/>
+            <a:off x="6505041" y="6345936"/>
+            <a:ext cx="5046573" cy="365760"/>
           </a:xfrm>
           <a:prstGeom prst="roundRect">
             <a:avLst>
@@ -4265,13 +4231,13 @@
       </p:sp>
       <p:sp>
         <p:nvSpPr>
-          <p:cNvPr id="17" name="Rounded Rectangle 16"/>
+          <p:cNvPr id="16" name="Rounded Rectangle 15"/>
           <p:cNvSpPr/>
           <p:nvPr/>
         </p:nvSpPr>
         <p:spPr>
           <a:xfrm>
-            <a:off x="8348472" y="6396228"/>
+            <a:off x="7547457" y="6396228"/>
             <a:ext cx="754380" cy="265176"/>
           </a:xfrm>
           <a:prstGeom prst="roundRect">
@@ -4310,14 +4276,49 @@
       </p:sp>
       <p:sp>
         <p:nvSpPr>
+          <p:cNvPr id="17" name="TextBox 16"/>
+          <p:cNvSpPr txBox="1"/>
+          <p:nvPr/>
+        </p:nvSpPr>
+        <p:spPr>
+          <a:xfrm>
+            <a:off x="6660489" y="6460236"/>
+            <a:ext cx="914400" cy="219456"/>
+          </a:xfrm>
+          <a:prstGeom prst="rect">
+            <a:avLst/>
+          </a:prstGeom>
+          <a:noFill/>
+        </p:spPr>
+        <p:txBody>
+          <a:bodyPr wrap="none" lIns="0" rIns="0" tIns="0" bIns="0">
+            <a:spAutoFit/>
+          </a:bodyPr>
+          <a:lstStyle/>
+          <a:p>
+            <a:pPr algn="l"/>
+            <a:r>
+              <a:rPr sz="950" b="1" i="0">
+                <a:solidFill>
+                  <a:srgbClr val="A7F3D0"/>
+                </a:solidFill>
+                <a:latin typeface="Helvetica Neue"/>
+              </a:rPr>
+              <a:t>▶ NOTEBOOK</a:t>
+            </a:r>
+          </a:p>
+        </p:txBody>
+      </p:sp>
+      <p:sp>
+        <p:nvSpPr>
           <p:cNvPr id="18" name="TextBox 17"/>
           <p:cNvSpPr txBox="1"/>
           <p:nvPr/>
         </p:nvSpPr>
         <p:spPr>
           <a:xfrm>
-            <a:off x="7461504" y="6460236"/>
-            <a:ext cx="914400" cy="219456"/>
+            <a:off x="7547457" y="6451092"/>
+            <a:ext cx="754380" cy="219456"/>
           </a:xfrm>
           <a:prstGeom prst="rect">
             <a:avLst/>
@@ -4330,120 +4331,50 @@
           </a:bodyPr>
           <a:lstStyle/>
           <a:p>
+            <a:pPr algn="ctr"/>
+            <a:r>
+              <a:rPr sz="1100" b="1" i="0">
+                <a:solidFill>
+                  <a:srgbClr val="FFFFFF"/>
+                </a:solidFill>
+                <a:latin typeface="Helvetica Neue"/>
+              </a:rPr>
+              <a:t>STEP 13</a:t>
+            </a:r>
+          </a:p>
+        </p:txBody>
+      </p:sp>
+      <p:sp>
+        <p:nvSpPr>
+          <p:cNvPr id="19" name="TextBox 18"/>
+          <p:cNvSpPr txBox="1"/>
+          <p:nvPr/>
+        </p:nvSpPr>
+        <p:spPr>
+          <a:xfrm>
+            <a:off x="8420709" y="6460236"/>
+            <a:ext cx="3030321" cy="219456"/>
+          </a:xfrm>
+          <a:prstGeom prst="rect">
+            <a:avLst/>
+          </a:prstGeom>
+          <a:noFill/>
+        </p:spPr>
+        <p:txBody>
+          <a:bodyPr wrap="none" lIns="0" rIns="0" tIns="0" bIns="0">
+            <a:spAutoFit/>
+          </a:bodyPr>
+          <a:lstStyle/>
+          <a:p>
             <a:pPr algn="l"/>
             <a:r>
-              <a:rPr sz="950" b="1" i="0">
-                <a:solidFill>
-                  <a:srgbClr val="A7F3D0"/>
-                </a:solidFill>
-                <a:latin typeface="Helvetica Neue"/>
-              </a:rPr>
-              <a:t>▶ NOTEBOOK</a:t>
-            </a:r>
-          </a:p>
-        </p:txBody>
-      </p:sp>
-      <p:sp>
-        <p:nvSpPr>
-          <p:cNvPr id="19" name="TextBox 18"/>
-          <p:cNvSpPr txBox="1"/>
-          <p:nvPr/>
-        </p:nvSpPr>
-        <p:spPr>
-          <a:xfrm>
-            <a:off x="8348472" y="6451092"/>
-            <a:ext cx="754380" cy="219456"/>
-          </a:xfrm>
-          <a:prstGeom prst="rect">
-            <a:avLst/>
-          </a:prstGeom>
-          <a:noFill/>
-        </p:spPr>
-        <p:txBody>
-          <a:bodyPr wrap="none" lIns="0" rIns="0" tIns="0" bIns="0">
-            <a:spAutoFit/>
-          </a:bodyPr>
-          <a:lstStyle/>
-          <a:p>
-            <a:pPr algn="ctr"/>
-            <a:r>
-              <a:rPr sz="1100" b="1" i="0">
+              <a:rPr sz="1000" b="1" i="0">
                 <a:solidFill>
                   <a:srgbClr val="FFFFFF"/>
                 </a:solidFill>
                 <a:latin typeface="Helvetica Neue"/>
               </a:rPr>
-              <a:t>STEP 17</a:t>
-            </a:r>
-          </a:p>
-        </p:txBody>
-      </p:sp>
-      <p:sp>
-        <p:nvSpPr>
-          <p:cNvPr id="20" name="TextBox 19"/>
-          <p:cNvSpPr txBox="1"/>
-          <p:nvPr/>
-        </p:nvSpPr>
-        <p:spPr>
-          <a:xfrm>
-            <a:off x="9221724" y="6460236"/>
-            <a:ext cx="2229307" cy="219456"/>
-          </a:xfrm>
-          <a:prstGeom prst="rect">
-            <a:avLst/>
-          </a:prstGeom>
-          <a:noFill/>
-        </p:spPr>
-        <p:txBody>
-          <a:bodyPr wrap="none" lIns="0" rIns="0" tIns="0" bIns="0">
-            <a:spAutoFit/>
-          </a:bodyPr>
-          <a:lstStyle/>
-          <a:p>
-            <a:pPr algn="l"/>
-            <a:r>
-              <a:rPr sz="1000" b="1" i="0">
-                <a:solidFill>
-                  <a:srgbClr val="FFFFFF"/>
-                </a:solidFill>
-                <a:latin typeface="Helvetica Neue"/>
-              </a:rPr>
-              <a:t>See the entailment scores</a:t>
-            </a:r>
-          </a:p>
-        </p:txBody>
-      </p:sp>
-      <p:sp>
-        <p:nvSpPr>
-          <p:cNvPr id="21" name="TextBox 20"/>
-          <p:cNvSpPr txBox="1"/>
-          <p:nvPr/>
-        </p:nvSpPr>
-        <p:spPr>
-          <a:xfrm>
-            <a:off x="640080" y="5532120"/>
-            <a:ext cx="10881360" cy="640080"/>
-          </a:xfrm>
-          <a:prstGeom prst="rect">
-            <a:avLst/>
-          </a:prstGeom>
-          <a:noFill/>
-        </p:spPr>
-        <p:txBody>
-          <a:bodyPr wrap="square" lIns="0" rIns="0" tIns="0" bIns="0">
-            <a:spAutoFit/>
-          </a:bodyPr>
-          <a:lstStyle/>
-          <a:p>
-            <a:pPr algn="ctr"/>
-            <a:r>
-              <a:rPr sz="1500" b="0" i="1">
-                <a:solidFill>
-                  <a:srgbClr val="475569"/>
-                </a:solidFill>
-                <a:latin typeface="Helvetica Neue"/>
-              </a:rPr>
-              <a:t>Every category becomes a sentence: "This example is {your description}." The model scores all eight and picks whichever it most believes.</a:t>
+              <a:t>Route the inbox with no training data</a:t>
             </a:r>
           </a:p>
         </p:txBody>
@@ -4510,7 +4441,7 @@
         <p:spPr>
           <a:xfrm>
             <a:off x="640080" y="758952"/>
-            <a:ext cx="7680960" cy="1179576"/>
+            <a:ext cx="7680960" cy="704088"/>
           </a:xfrm>
           <a:prstGeom prst="rect">
             <a:avLst/>
@@ -4525,20 +4456,55 @@
           <a:p>
             <a:pPr algn="l"/>
             <a:r>
-              <a:rPr sz="2900" b="1" i="0">
+              <a:rPr sz="2450" b="1" i="0">
                 <a:solidFill>
                   <a:srgbClr val="0F172A"/>
                 </a:solidFill>
                 <a:latin typeface="Helvetica Neue"/>
               </a:rPr>
-              <a:t>The descriptions you write ARE the program.</a:t>
-            </a:r>
-          </a:p>
-        </p:txBody>
-      </p:sp>
-      <p:sp>
-        <p:nvSpPr>
-          <p:cNvPr id="4" name="Rounded Rectangle 3"/>
+              <a:t>It is not a classifier. It is a fact-checker.</a:t>
+            </a:r>
+          </a:p>
+        </p:txBody>
+      </p:sp>
+      <p:sp>
+        <p:nvSpPr>
+          <p:cNvPr id="4" name="TextBox 3"/>
+          <p:cNvSpPr txBox="1"/>
+          <p:nvPr/>
+        </p:nvSpPr>
+        <p:spPr>
+          <a:xfrm>
+            <a:off x="640080" y="1417320"/>
+            <a:ext cx="10424160" cy="457200"/>
+          </a:xfrm>
+          <a:prstGeom prst="rect">
+            <a:avLst/>
+          </a:prstGeom>
+          <a:noFill/>
+        </p:spPr>
+        <p:txBody>
+          <a:bodyPr wrap="square" lIns="0" rIns="0" tIns="0" bIns="0">
+            <a:spAutoFit/>
+          </a:bodyPr>
+          <a:lstStyle/>
+          <a:p>
+            <a:pPr algn="l"/>
+            <a:r>
+              <a:rPr sz="1500" b="0" i="0">
+                <a:solidFill>
+                  <a:srgbClr val="475569"/>
+                </a:solidFill>
+                <a:latin typeface="Helvetica Neue"/>
+              </a:rPr>
+              <a:t>The model judges whether a sentence YOU wrote is true of the ticket.</a:t>
+            </a:r>
+          </a:p>
+        </p:txBody>
+      </p:sp>
+      <p:sp>
+        <p:nvSpPr>
+          <p:cNvPr id="5" name="Rounded Rectangle 4"/>
           <p:cNvSpPr/>
           <p:nvPr/>
         </p:nvSpPr>
@@ -4581,7 +4547,7 @@
       </p:sp>
       <p:sp>
         <p:nvSpPr>
-          <p:cNvPr id="5" name="Rounded Rectangle 4"/>
+          <p:cNvPr id="6" name="Rounded Rectangle 5"/>
           <p:cNvSpPr/>
           <p:nvPr/>
         </p:nvSpPr>
@@ -4626,7 +4592,7 @@
       </p:sp>
       <p:sp>
         <p:nvSpPr>
-          <p:cNvPr id="6" name="TextBox 5"/>
+          <p:cNvPr id="7" name="TextBox 6"/>
           <p:cNvSpPr txBox="1"/>
           <p:nvPr/>
         </p:nvSpPr>
@@ -4661,7 +4627,7 @@
       </p:sp>
       <p:sp>
         <p:nvSpPr>
-          <p:cNvPr id="7" name="Rounded Rectangle 6"/>
+          <p:cNvPr id="8" name="Rounded Rectangle 7"/>
           <p:cNvSpPr/>
           <p:nvPr/>
         </p:nvSpPr>
@@ -4706,7 +4672,7 @@
       </p:sp>
       <p:sp>
         <p:nvSpPr>
-          <p:cNvPr id="8" name="TextBox 7"/>
+          <p:cNvPr id="9" name="TextBox 8"/>
           <p:cNvSpPr txBox="1"/>
           <p:nvPr/>
         </p:nvSpPr>
@@ -4741,7 +4707,7 @@
       </p:sp>
       <p:sp>
         <p:nvSpPr>
-          <p:cNvPr id="9" name="Rounded Rectangle 8"/>
+          <p:cNvPr id="10" name="Rounded Rectangle 9"/>
           <p:cNvSpPr/>
           <p:nvPr/>
         </p:nvSpPr>
@@ -4786,7 +4752,7 @@
       </p:sp>
       <p:sp>
         <p:nvSpPr>
-          <p:cNvPr id="10" name="TextBox 9"/>
+          <p:cNvPr id="11" name="TextBox 10"/>
           <p:cNvSpPr txBox="1"/>
           <p:nvPr/>
         </p:nvSpPr>
@@ -4821,7 +4787,7 @@
       </p:sp>
       <p:sp>
         <p:nvSpPr>
-          <p:cNvPr id="11" name="Rounded Rectangle 10"/>
+          <p:cNvPr id="12" name="Rounded Rectangle 11"/>
           <p:cNvSpPr/>
           <p:nvPr/>
         </p:nvSpPr>
@@ -4866,7 +4832,7 @@
       </p:sp>
       <p:sp>
         <p:nvSpPr>
-          <p:cNvPr id="12" name="TextBox 11"/>
+          <p:cNvPr id="13" name="TextBox 12"/>
           <p:cNvSpPr txBox="1"/>
           <p:nvPr/>
         </p:nvSpPr>
@@ -4901,7 +4867,7 @@
       </p:sp>
       <p:sp>
         <p:nvSpPr>
-          <p:cNvPr id="13" name="TextBox 12"/>
+          <p:cNvPr id="14" name="TextBox 13"/>
           <p:cNvSpPr txBox="1"/>
           <p:nvPr/>
         </p:nvSpPr>
@@ -4936,7 +4902,7 @@
       </p:sp>
       <p:pic>
         <p:nvPicPr>
-          <p:cNvPr id="14" name="Picture 13" descr="d_wording.png"/>
+          <p:cNvPr id="15" name="Picture 14" descr="d_nli.png"/>
           <p:cNvPicPr>
             <a:picLocks noChangeAspect="1"/>
           </p:cNvPicPr>
@@ -4950,8 +4916,8 @@
         </p:blipFill>
         <p:spPr>
           <a:xfrm>
-            <a:off x="518007" y="2769342"/>
-            <a:ext cx="11155680" cy="2599474"/>
+            <a:off x="518007" y="2596680"/>
+            <a:ext cx="11155680" cy="2350438"/>
           </a:xfrm>
           <a:prstGeom prst="rect">
             <a:avLst/>
@@ -4960,14 +4926,14 @@
       </p:pic>
       <p:sp>
         <p:nvSpPr>
-          <p:cNvPr id="15" name="Rounded Rectangle 14"/>
+          <p:cNvPr id="16" name="Rounded Rectangle 15"/>
           <p:cNvSpPr/>
           <p:nvPr/>
         </p:nvSpPr>
         <p:spPr>
           <a:xfrm>
-            <a:off x="6638544" y="6345936"/>
-            <a:ext cx="4913071" cy="365760"/>
+            <a:off x="7306056" y="6345936"/>
+            <a:ext cx="4245559" cy="365760"/>
           </a:xfrm>
           <a:prstGeom prst="roundRect">
             <a:avLst>
@@ -5005,13 +4971,13 @@
       </p:sp>
       <p:sp>
         <p:nvSpPr>
-          <p:cNvPr id="16" name="Rounded Rectangle 15"/>
+          <p:cNvPr id="17" name="Rounded Rectangle 16"/>
           <p:cNvSpPr/>
           <p:nvPr/>
         </p:nvSpPr>
         <p:spPr>
           <a:xfrm>
-            <a:off x="7680960" y="6396228"/>
+            <a:off x="8348472" y="6396228"/>
             <a:ext cx="754380" cy="265176"/>
           </a:xfrm>
           <a:prstGeom prst="roundRect">
@@ -5050,13 +5016,13 @@
       </p:sp>
       <p:sp>
         <p:nvSpPr>
-          <p:cNvPr id="17" name="TextBox 16"/>
-          <p:cNvSpPr txBox="1"/>
-          <p:nvPr/>
-        </p:nvSpPr>
-        <p:spPr>
-          <a:xfrm>
-            <a:off x="6793992" y="6460236"/>
+          <p:cNvPr id="18" name="TextBox 17"/>
+          <p:cNvSpPr txBox="1"/>
+          <p:nvPr/>
+        </p:nvSpPr>
+        <p:spPr>
+          <a:xfrm>
+            <a:off x="7461504" y="6460236"/>
             <a:ext cx="914400" cy="219456"/>
           </a:xfrm>
           <a:prstGeom prst="rect">
@@ -5085,13 +5051,13 @@
       </p:sp>
       <p:sp>
         <p:nvSpPr>
-          <p:cNvPr id="18" name="TextBox 17"/>
-          <p:cNvSpPr txBox="1"/>
-          <p:nvPr/>
-        </p:nvSpPr>
-        <p:spPr>
-          <a:xfrm>
-            <a:off x="7680960" y="6451092"/>
+          <p:cNvPr id="19" name="TextBox 18"/>
+          <p:cNvSpPr txBox="1"/>
+          <p:nvPr/>
+        </p:nvSpPr>
+        <p:spPr>
+          <a:xfrm>
+            <a:off x="8348472" y="6451092"/>
             <a:ext cx="754380" cy="219456"/>
           </a:xfrm>
           <a:prstGeom prst="rect">
@@ -5113,21 +5079,21 @@
                 </a:solidFill>
                 <a:latin typeface="Helvetica Neue"/>
               </a:rPr>
-              <a:t>STEP 16</a:t>
-            </a:r>
-          </a:p>
-        </p:txBody>
-      </p:sp>
-      <p:sp>
-        <p:nvSpPr>
-          <p:cNvPr id="19" name="TextBox 18"/>
-          <p:cNvSpPr txBox="1"/>
-          <p:nvPr/>
-        </p:nvSpPr>
-        <p:spPr>
-          <a:xfrm>
-            <a:off x="8554212" y="6460236"/>
-            <a:ext cx="2896819" cy="219456"/>
+              <a:t>STEP 17</a:t>
+            </a:r>
+          </a:p>
+        </p:txBody>
+      </p:sp>
+      <p:sp>
+        <p:nvSpPr>
+          <p:cNvPr id="20" name="TextBox 19"/>
+          <p:cNvSpPr txBox="1"/>
+          <p:nvPr/>
+        </p:nvSpPr>
+        <p:spPr>
+          <a:xfrm>
+            <a:off x="9221724" y="6460236"/>
+            <a:ext cx="2229307" cy="219456"/>
           </a:xfrm>
           <a:prstGeom prst="rect">
             <a:avLst/>
@@ -5148,7 +5114,42 @@
                 </a:solidFill>
                 <a:latin typeface="Helvetica Neue"/>
               </a:rPr>
-              <a:t>YOUR KNOB: rewrite the descriptions</a:t>
+              <a:t>See the entailment scores</a:t>
+            </a:r>
+          </a:p>
+        </p:txBody>
+      </p:sp>
+      <p:sp>
+        <p:nvSpPr>
+          <p:cNvPr id="21" name="TextBox 20"/>
+          <p:cNvSpPr txBox="1"/>
+          <p:nvPr/>
+        </p:nvSpPr>
+        <p:spPr>
+          <a:xfrm>
+            <a:off x="640080" y="5532120"/>
+            <a:ext cx="10881360" cy="640080"/>
+          </a:xfrm>
+          <a:prstGeom prst="rect">
+            <a:avLst/>
+          </a:prstGeom>
+          <a:noFill/>
+        </p:spPr>
+        <p:txBody>
+          <a:bodyPr wrap="square" lIns="0" rIns="0" tIns="0" bIns="0">
+            <a:spAutoFit/>
+          </a:bodyPr>
+          <a:lstStyle/>
+          <a:p>
+            <a:pPr algn="ctr"/>
+            <a:r>
+              <a:rPr sz="1500" b="0" i="1">
+                <a:solidFill>
+                  <a:srgbClr val="475569"/>
+                </a:solidFill>
+                <a:latin typeface="Helvetica Neue"/>
+              </a:rPr>
+              <a:t>Every category becomes a sentence: "This example is {your description}." The model scores all eight and picks whichever it most believes.</a:t>
             </a:r>
           </a:p>
         </p:txBody>
@@ -5197,11 +5198,11 @@
             <a:r>
               <a:rPr sz="1250" b="1" i="0" spc="220">
                 <a:solidFill>
-                  <a:srgbClr val="059669"/>
-                </a:solidFill>
-                <a:latin typeface="Helvetica Neue"/>
-              </a:rPr>
-              <a:t>DECIDE</a:t>
+                  <a:srgbClr val="7C3AED"/>
+                </a:solidFill>
+                <a:latin typeface="Helvetica Neue"/>
+              </a:rPr>
+              <a:t>ROUTE</a:t>
             </a:r>
           </a:p>
         </p:txBody>
@@ -5215,7 +5216,7 @@
         <p:spPr>
           <a:xfrm>
             <a:off x="640080" y="758952"/>
-            <a:ext cx="7680960" cy="704088"/>
+            <a:ext cx="7680960" cy="1179576"/>
           </a:xfrm>
           <a:prstGeom prst="rect">
             <a:avLst/>
@@ -5230,55 +5231,20 @@
           <a:p>
             <a:pPr algn="l"/>
             <a:r>
-              <a:rPr sz="2650" b="1" i="0">
+              <a:rPr sz="2900" b="1" i="0">
                 <a:solidFill>
                   <a:srgbClr val="0F172A"/>
                 </a:solidFill>
                 <a:latin typeface="Helvetica Neue"/>
               </a:rPr>
-              <a:t>An average is a bad way to run a product.</a:t>
-            </a:r>
-          </a:p>
-        </p:txBody>
-      </p:sp>
-      <p:sp>
-        <p:nvSpPr>
-          <p:cNvPr id="4" name="TextBox 3"/>
-          <p:cNvSpPr txBox="1"/>
-          <p:nvPr/>
-        </p:nvSpPr>
-        <p:spPr>
-          <a:xfrm>
-            <a:off x="640080" y="1417320"/>
-            <a:ext cx="10424160" cy="457200"/>
-          </a:xfrm>
-          <a:prstGeom prst="rect">
-            <a:avLst/>
-          </a:prstGeom>
-          <a:noFill/>
-        </p:spPr>
-        <p:txBody>
-          <a:bodyPr wrap="square" lIns="0" rIns="0" tIns="0" bIns="0">
-            <a:spAutoFit/>
-          </a:bodyPr>
-          <a:lstStyle/>
-          <a:p>
-            <a:pPr algn="l"/>
-            <a:r>
-              <a:rPr sz="1500" b="0" i="0">
-                <a:solidFill>
-                  <a:srgbClr val="475569"/>
-                </a:solidFill>
-                <a:latin typeface="Helvetica Neue"/>
-              </a:rPr>
-              <a:t>Ask WHICH tickets it gets wrong. The weak buckets are the ones whose descriptions overlap.</a:t>
-            </a:r>
-          </a:p>
-        </p:txBody>
-      </p:sp>
-      <p:sp>
-        <p:nvSpPr>
-          <p:cNvPr id="5" name="Rounded Rectangle 4"/>
+              <a:t>The descriptions you write ARE the program.</a:t>
+            </a:r>
+          </a:p>
+        </p:txBody>
+      </p:sp>
+      <p:sp>
+        <p:nvSpPr>
+          <p:cNvPr id="4" name="Rounded Rectangle 3"/>
           <p:cNvSpPr/>
           <p:nvPr/>
         </p:nvSpPr>
@@ -5321,7 +5287,7 @@
       </p:sp>
       <p:sp>
         <p:nvSpPr>
-          <p:cNvPr id="6" name="Rounded Rectangle 5"/>
+          <p:cNvPr id="5" name="Rounded Rectangle 4"/>
           <p:cNvSpPr/>
           <p:nvPr/>
         </p:nvSpPr>
@@ -5366,7 +5332,7 @@
       </p:sp>
       <p:sp>
         <p:nvSpPr>
-          <p:cNvPr id="7" name="TextBox 6"/>
+          <p:cNvPr id="6" name="TextBox 5"/>
           <p:cNvSpPr txBox="1"/>
           <p:nvPr/>
         </p:nvSpPr>
@@ -5401,14 +5367,14 @@
       </p:sp>
       <p:sp>
         <p:nvSpPr>
-          <p:cNvPr id="8" name="Rounded Rectangle 7"/>
+          <p:cNvPr id="7" name="Rounded Rectangle 6"/>
           <p:cNvSpPr/>
           <p:nvPr/>
         </p:nvSpPr>
         <p:spPr>
           <a:xfrm>
-            <a:off x="9244584" y="475488"/>
-            <a:ext cx="256032" cy="256032"/>
+            <a:off x="9208008" y="438912"/>
+            <a:ext cx="329184" cy="329184"/>
           </a:xfrm>
           <a:prstGeom prst="roundRect">
             <a:avLst>
@@ -5446,14 +5412,14 @@
       </p:sp>
       <p:sp>
         <p:nvSpPr>
-          <p:cNvPr id="9" name="TextBox 8"/>
-          <p:cNvSpPr txBox="1"/>
-          <p:nvPr/>
-        </p:nvSpPr>
-        <p:spPr>
-          <a:xfrm>
-            <a:off x="9189719" y="475488"/>
-            <a:ext cx="365760" cy="256032"/>
+          <p:cNvPr id="8" name="TextBox 7"/>
+          <p:cNvSpPr txBox="1"/>
+          <p:nvPr/>
+        </p:nvSpPr>
+        <p:spPr>
+          <a:xfrm>
+            <a:off x="9153144" y="475488"/>
+            <a:ext cx="438912" cy="256032"/>
           </a:xfrm>
           <a:prstGeom prst="rect">
             <a:avLst/>
@@ -5468,7 +5434,7 @@
           <a:p>
             <a:pPr algn="ctr"/>
             <a:r>
-              <a:rPr sz="1050" b="1" i="0">
+              <a:rPr sz="1300" b="1" i="0">
                 <a:solidFill>
                   <a:srgbClr val="FFFFFF"/>
                 </a:solidFill>
@@ -5481,93 +5447,13 @@
       </p:sp>
       <p:sp>
         <p:nvSpPr>
-          <p:cNvPr id="10" name="Rounded Rectangle 9"/>
+          <p:cNvPr id="9" name="Rounded Rectangle 8"/>
           <p:cNvSpPr/>
           <p:nvPr/>
         </p:nvSpPr>
         <p:spPr>
           <a:xfrm>
-            <a:off x="9866376" y="438912"/>
-            <a:ext cx="329184" cy="329184"/>
-          </a:xfrm>
-          <a:prstGeom prst="roundRect">
-            <a:avLst>
-              <a:gd name="adj" fmla="val 32000"/>
-            </a:avLst>
-          </a:prstGeom>
-          <a:solidFill>
-            <a:srgbClr val="7C3AED"/>
-          </a:solidFill>
-          <a:ln>
-            <a:noFill/>
-          </a:ln>
-        </p:spPr>
-        <p:style>
-          <a:lnRef idx="1">
-            <a:schemeClr val="accent1"/>
-          </a:lnRef>
-          <a:fillRef idx="3">
-            <a:schemeClr val="accent1"/>
-          </a:fillRef>
-          <a:effectRef idx="2">
-            <a:schemeClr val="accent1"/>
-          </a:effectRef>
-          <a:fontRef idx="minor">
-            <a:schemeClr val="lt1"/>
-          </a:fontRef>
-        </p:style>
-        <p:txBody>
-          <a:bodyPr rtlCol="0" anchor="ctr"/>
-          <a:lstStyle/>
-          <a:p>
-            <a:pPr algn="ctr"/>
-          </a:p>
-        </p:txBody>
-      </p:sp>
-      <p:sp>
-        <p:nvSpPr>
-          <p:cNvPr id="11" name="TextBox 10"/>
-          <p:cNvSpPr txBox="1"/>
-          <p:nvPr/>
-        </p:nvSpPr>
-        <p:spPr>
-          <a:xfrm>
-            <a:off x="9811511" y="475488"/>
-            <a:ext cx="438912" cy="256032"/>
-          </a:xfrm>
-          <a:prstGeom prst="rect">
-            <a:avLst/>
-          </a:prstGeom>
-          <a:noFill/>
-        </p:spPr>
-        <p:txBody>
-          <a:bodyPr wrap="square" lIns="0" rIns="0" tIns="0" bIns="0">
-            <a:spAutoFit/>
-          </a:bodyPr>
-          <a:lstStyle/>
-          <a:p>
-            <a:pPr algn="ctr"/>
-            <a:r>
-              <a:rPr sz="1300" b="1" i="0">
-                <a:solidFill>
-                  <a:srgbClr val="FFFFFF"/>
-                </a:solidFill>
-                <a:latin typeface="Helvetica Neue"/>
-              </a:rPr>
-              <a:t>3</a:t>
-            </a:r>
-          </a:p>
-        </p:txBody>
-      </p:sp>
-      <p:sp>
-        <p:nvSpPr>
-          <p:cNvPr id="12" name="Rounded Rectangle 11"/>
-          <p:cNvSpPr/>
-          <p:nvPr/>
-        </p:nvSpPr>
-        <p:spPr>
-          <a:xfrm>
-            <a:off x="10561319" y="475488"/>
+            <a:off x="9902951" y="475488"/>
             <a:ext cx="256032" cy="256032"/>
           </a:xfrm>
           <a:prstGeom prst="roundRect">
@@ -5606,7 +5492,87 @@
       </p:sp>
       <p:sp>
         <p:nvSpPr>
-          <p:cNvPr id="13" name="TextBox 12"/>
+          <p:cNvPr id="10" name="TextBox 9"/>
+          <p:cNvSpPr txBox="1"/>
+          <p:nvPr/>
+        </p:nvSpPr>
+        <p:spPr>
+          <a:xfrm>
+            <a:off x="9848087" y="475488"/>
+            <a:ext cx="365760" cy="256032"/>
+          </a:xfrm>
+          <a:prstGeom prst="rect">
+            <a:avLst/>
+          </a:prstGeom>
+          <a:noFill/>
+        </p:spPr>
+        <p:txBody>
+          <a:bodyPr wrap="square" lIns="0" rIns="0" tIns="0" bIns="0">
+            <a:spAutoFit/>
+          </a:bodyPr>
+          <a:lstStyle/>
+          <a:p>
+            <a:pPr algn="ctr"/>
+            <a:r>
+              <a:rPr sz="1050" b="1" i="0">
+                <a:solidFill>
+                  <a:srgbClr val="AEB4BF"/>
+                </a:solidFill>
+                <a:latin typeface="Helvetica Neue"/>
+              </a:rPr>
+              <a:t>3</a:t>
+            </a:r>
+          </a:p>
+        </p:txBody>
+      </p:sp>
+      <p:sp>
+        <p:nvSpPr>
+          <p:cNvPr id="11" name="Rounded Rectangle 10"/>
+          <p:cNvSpPr/>
+          <p:nvPr/>
+        </p:nvSpPr>
+        <p:spPr>
+          <a:xfrm>
+            <a:off x="10561319" y="475488"/>
+            <a:ext cx="256032" cy="256032"/>
+          </a:xfrm>
+          <a:prstGeom prst="roundRect">
+            <a:avLst>
+              <a:gd name="adj" fmla="val 32000"/>
+            </a:avLst>
+          </a:prstGeom>
+          <a:solidFill>
+            <a:srgbClr val="E9EBF0"/>
+          </a:solidFill>
+          <a:ln>
+            <a:noFill/>
+          </a:ln>
+        </p:spPr>
+        <p:style>
+          <a:lnRef idx="1">
+            <a:schemeClr val="accent1"/>
+          </a:lnRef>
+          <a:fillRef idx="3">
+            <a:schemeClr val="accent1"/>
+          </a:fillRef>
+          <a:effectRef idx="2">
+            <a:schemeClr val="accent1"/>
+          </a:effectRef>
+          <a:fontRef idx="minor">
+            <a:schemeClr val="lt1"/>
+          </a:fontRef>
+        </p:style>
+        <p:txBody>
+          <a:bodyPr rtlCol="0" anchor="ctr"/>
+          <a:lstStyle/>
+          <a:p>
+            <a:pPr algn="ctr"/>
+          </a:p>
+        </p:txBody>
+      </p:sp>
+      <p:sp>
+        <p:nvSpPr>
+          <p:cNvPr id="12" name="TextBox 11"/>
           <p:cNvSpPr txBox="1"/>
           <p:nvPr/>
         </p:nvSpPr>
@@ -5641,7 +5607,7 @@
       </p:sp>
       <p:sp>
         <p:nvSpPr>
-          <p:cNvPr id="14" name="TextBox 13"/>
+          <p:cNvPr id="13" name="TextBox 12"/>
           <p:cNvSpPr txBox="1"/>
           <p:nvPr/>
         </p:nvSpPr>
@@ -5676,7 +5642,7 @@
       </p:sp>
       <p:pic>
         <p:nvPicPr>
-          <p:cNvPr id="15" name="Picture 14" descr="fig_recall.png"/>
+          <p:cNvPr id="14" name="Picture 13" descr="d_wording.png"/>
           <p:cNvPicPr>
             <a:picLocks noChangeAspect="1"/>
           </p:cNvPicPr>
@@ -5690,8 +5656,8 @@
         </p:blipFill>
         <p:spPr>
           <a:xfrm>
-            <a:off x="2205165" y="2057400"/>
-            <a:ext cx="7781363" cy="3977639"/>
+            <a:off x="518007" y="2769342"/>
+            <a:ext cx="11155680" cy="2599474"/>
           </a:xfrm>
           <a:prstGeom prst="rect">
             <a:avLst/>
@@ -5700,14 +5666,14 @@
       </p:pic>
       <p:sp>
         <p:nvSpPr>
-          <p:cNvPr id="16" name="Rounded Rectangle 15"/>
+          <p:cNvPr id="15" name="Rounded Rectangle 14"/>
           <p:cNvSpPr/>
           <p:nvPr/>
         </p:nvSpPr>
         <p:spPr>
           <a:xfrm>
-            <a:off x="7573060" y="6345936"/>
-            <a:ext cx="3978554" cy="365760"/>
+            <a:off x="6638544" y="6345936"/>
+            <a:ext cx="4913071" cy="365760"/>
           </a:xfrm>
           <a:prstGeom prst="roundRect">
             <a:avLst>
@@ -5745,13 +5711,13 @@
       </p:sp>
       <p:sp>
         <p:nvSpPr>
-          <p:cNvPr id="17" name="Rounded Rectangle 16"/>
+          <p:cNvPr id="16" name="Rounded Rectangle 15"/>
           <p:cNvSpPr/>
           <p:nvPr/>
         </p:nvSpPr>
         <p:spPr>
           <a:xfrm>
-            <a:off x="8615476" y="6396228"/>
+            <a:off x="7680960" y="6396228"/>
             <a:ext cx="754380" cy="265176"/>
           </a:xfrm>
           <a:prstGeom prst="roundRect">
@@ -5790,14 +5756,49 @@
       </p:sp>
       <p:sp>
         <p:nvSpPr>
+          <p:cNvPr id="17" name="TextBox 16"/>
+          <p:cNvSpPr txBox="1"/>
+          <p:nvPr/>
+        </p:nvSpPr>
+        <p:spPr>
+          <a:xfrm>
+            <a:off x="6793992" y="6460236"/>
+            <a:ext cx="914400" cy="219456"/>
+          </a:xfrm>
+          <a:prstGeom prst="rect">
+            <a:avLst/>
+          </a:prstGeom>
+          <a:noFill/>
+        </p:spPr>
+        <p:txBody>
+          <a:bodyPr wrap="none" lIns="0" rIns="0" tIns="0" bIns="0">
+            <a:spAutoFit/>
+          </a:bodyPr>
+          <a:lstStyle/>
+          <a:p>
+            <a:pPr algn="l"/>
+            <a:r>
+              <a:rPr sz="950" b="1" i="0">
+                <a:solidFill>
+                  <a:srgbClr val="A7F3D0"/>
+                </a:solidFill>
+                <a:latin typeface="Helvetica Neue"/>
+              </a:rPr>
+              <a:t>▶ NOTEBOOK</a:t>
+            </a:r>
+          </a:p>
+        </p:txBody>
+      </p:sp>
+      <p:sp>
+        <p:nvSpPr>
           <p:cNvPr id="18" name="TextBox 17"/>
           <p:cNvSpPr txBox="1"/>
           <p:nvPr/>
         </p:nvSpPr>
         <p:spPr>
           <a:xfrm>
-            <a:off x="7728508" y="6460236"/>
-            <a:ext cx="914400" cy="219456"/>
+            <a:off x="7680960" y="6451092"/>
+            <a:ext cx="754380" cy="219456"/>
           </a:xfrm>
           <a:prstGeom prst="rect">
             <a:avLst/>
@@ -5810,120 +5811,50 @@
           </a:bodyPr>
           <a:lstStyle/>
           <a:p>
+            <a:pPr algn="ctr"/>
+            <a:r>
+              <a:rPr sz="1100" b="1" i="0">
+                <a:solidFill>
+                  <a:srgbClr val="FFFFFF"/>
+                </a:solidFill>
+                <a:latin typeface="Helvetica Neue"/>
+              </a:rPr>
+              <a:t>STEP 16</a:t>
+            </a:r>
+          </a:p>
+        </p:txBody>
+      </p:sp>
+      <p:sp>
+        <p:nvSpPr>
+          <p:cNvPr id="19" name="TextBox 18"/>
+          <p:cNvSpPr txBox="1"/>
+          <p:nvPr/>
+        </p:nvSpPr>
+        <p:spPr>
+          <a:xfrm>
+            <a:off x="8554212" y="6460236"/>
+            <a:ext cx="2896819" cy="219456"/>
+          </a:xfrm>
+          <a:prstGeom prst="rect">
+            <a:avLst/>
+          </a:prstGeom>
+          <a:noFill/>
+        </p:spPr>
+        <p:txBody>
+          <a:bodyPr wrap="none" lIns="0" rIns="0" tIns="0" bIns="0">
+            <a:spAutoFit/>
+          </a:bodyPr>
+          <a:lstStyle/>
+          <a:p>
             <a:pPr algn="l"/>
             <a:r>
-              <a:rPr sz="950" b="1" i="0">
-                <a:solidFill>
-                  <a:srgbClr val="A7F3D0"/>
-                </a:solidFill>
-                <a:latin typeface="Helvetica Neue"/>
-              </a:rPr>
-              <a:t>▶ NOTEBOOK</a:t>
-            </a:r>
-          </a:p>
-        </p:txBody>
-      </p:sp>
-      <p:sp>
-        <p:nvSpPr>
-          <p:cNvPr id="19" name="TextBox 18"/>
-          <p:cNvSpPr txBox="1"/>
-          <p:nvPr/>
-        </p:nvSpPr>
-        <p:spPr>
-          <a:xfrm>
-            <a:off x="8615476" y="6451092"/>
-            <a:ext cx="754380" cy="219456"/>
-          </a:xfrm>
-          <a:prstGeom prst="rect">
-            <a:avLst/>
-          </a:prstGeom>
-          <a:noFill/>
-        </p:spPr>
-        <p:txBody>
-          <a:bodyPr wrap="none" lIns="0" rIns="0" tIns="0" bIns="0">
-            <a:spAutoFit/>
-          </a:bodyPr>
-          <a:lstStyle/>
-          <a:p>
-            <a:pPr algn="ctr"/>
-            <a:r>
-              <a:rPr sz="1100" b="1" i="0">
+              <a:rPr sz="1000" b="1" i="0">
                 <a:solidFill>
                   <a:srgbClr val="FFFFFF"/>
                 </a:solidFill>
                 <a:latin typeface="Helvetica Neue"/>
               </a:rPr>
-              <a:t>STEP 18</a:t>
-            </a:r>
-          </a:p>
-        </p:txBody>
-      </p:sp>
-      <p:sp>
-        <p:nvSpPr>
-          <p:cNvPr id="20" name="TextBox 19"/>
-          <p:cNvSpPr txBox="1"/>
-          <p:nvPr/>
-        </p:nvSpPr>
-        <p:spPr>
-          <a:xfrm>
-            <a:off x="9488728" y="6460236"/>
-            <a:ext cx="1962302" cy="219456"/>
-          </a:xfrm>
-          <a:prstGeom prst="rect">
-            <a:avLst/>
-          </a:prstGeom>
-          <a:noFill/>
-        </p:spPr>
-        <p:txBody>
-          <a:bodyPr wrap="none" lIns="0" rIns="0" tIns="0" bIns="0">
-            <a:spAutoFit/>
-          </a:bodyPr>
-          <a:lstStyle/>
-          <a:p>
-            <a:pPr algn="l"/>
-            <a:r>
-              <a:rPr sz="1000" b="1" i="0">
-                <a:solidFill>
-                  <a:srgbClr val="FFFFFF"/>
-                </a:solidFill>
-                <a:latin typeface="Helvetica Neue"/>
-              </a:rPr>
-              <a:t>Find the weak buckets</a:t>
-            </a:r>
-          </a:p>
-        </p:txBody>
-      </p:sp>
-      <p:sp>
-        <p:nvSpPr>
-          <p:cNvPr id="21" name="TextBox 20"/>
-          <p:cNvSpPr txBox="1"/>
-          <p:nvPr/>
-        </p:nvSpPr>
-        <p:spPr>
-          <a:xfrm>
-            <a:off x="640080" y="6080760"/>
-            <a:ext cx="10881360" cy="365760"/>
-          </a:xfrm>
-          <a:prstGeom prst="rect">
-            <a:avLst/>
-          </a:prstGeom>
-          <a:noFill/>
-        </p:spPr>
-        <p:txBody>
-          <a:bodyPr wrap="square" lIns="0" rIns="0" tIns="0" bIns="0">
-            <a:spAutoFit/>
-          </a:bodyPr>
-          <a:lstStyle/>
-          <a:p>
-            <a:pPr algn="ctr"/>
-            <a:r>
-              <a:rPr sz="1500" b="0" i="1">
-                <a:solidFill>
-                  <a:srgbClr val="475569"/>
-                </a:solidFill>
-                <a:latin typeface="Helvetica Neue"/>
-              </a:rPr>
-              <a:t>When a classifier underperforms, look at your taxonomy before you look at your model.</a:t>
+              <a:t>YOUR KNOB: rewrite the descriptions</a:t>
             </a:r>
           </a:p>
         </p:txBody>
@@ -6005,20 +5936,55 @@
           <a:p>
             <a:pPr algn="l"/>
             <a:r>
-              <a:rPr sz="2900" b="1" i="0">
+              <a:rPr sz="2650" b="1" i="0">
                 <a:solidFill>
                   <a:srgbClr val="0F172A"/>
                 </a:solidFill>
                 <a:latin typeface="Helvetica Neue"/>
               </a:rPr>
-              <a:t>Confident is not the same as correct.</a:t>
-            </a:r>
-          </a:p>
-        </p:txBody>
-      </p:sp>
-      <p:sp>
-        <p:nvSpPr>
-          <p:cNvPr id="4" name="Rounded Rectangle 3"/>
+              <a:t>An average is a bad way to run a product.</a:t>
+            </a:r>
+          </a:p>
+        </p:txBody>
+      </p:sp>
+      <p:sp>
+        <p:nvSpPr>
+          <p:cNvPr id="4" name="TextBox 3"/>
+          <p:cNvSpPr txBox="1"/>
+          <p:nvPr/>
+        </p:nvSpPr>
+        <p:spPr>
+          <a:xfrm>
+            <a:off x="640080" y="1417320"/>
+            <a:ext cx="10424160" cy="457200"/>
+          </a:xfrm>
+          <a:prstGeom prst="rect">
+            <a:avLst/>
+          </a:prstGeom>
+          <a:noFill/>
+        </p:spPr>
+        <p:txBody>
+          <a:bodyPr wrap="square" lIns="0" rIns="0" tIns="0" bIns="0">
+            <a:spAutoFit/>
+          </a:bodyPr>
+          <a:lstStyle/>
+          <a:p>
+            <a:pPr algn="l"/>
+            <a:r>
+              <a:rPr sz="1500" b="0" i="0">
+                <a:solidFill>
+                  <a:srgbClr val="475569"/>
+                </a:solidFill>
+                <a:latin typeface="Helvetica Neue"/>
+              </a:rPr>
+              <a:t>Ask WHICH tickets it gets wrong. The weak buckets are the ones whose descriptions overlap.</a:t>
+            </a:r>
+          </a:p>
+        </p:txBody>
+      </p:sp>
+      <p:sp>
+        <p:nvSpPr>
+          <p:cNvPr id="5" name="Rounded Rectangle 4"/>
           <p:cNvSpPr/>
           <p:nvPr/>
         </p:nvSpPr>
@@ -6061,7 +6027,7 @@
       </p:sp>
       <p:sp>
         <p:nvSpPr>
-          <p:cNvPr id="5" name="Rounded Rectangle 4"/>
+          <p:cNvPr id="6" name="Rounded Rectangle 5"/>
           <p:cNvSpPr/>
           <p:nvPr/>
         </p:nvSpPr>
@@ -6106,7 +6072,7 @@
       </p:sp>
       <p:sp>
         <p:nvSpPr>
-          <p:cNvPr id="6" name="TextBox 5"/>
+          <p:cNvPr id="7" name="TextBox 6"/>
           <p:cNvSpPr txBox="1"/>
           <p:nvPr/>
         </p:nvSpPr>
@@ -6141,7 +6107,7 @@
       </p:sp>
       <p:sp>
         <p:nvSpPr>
-          <p:cNvPr id="7" name="Rounded Rectangle 6"/>
+          <p:cNvPr id="8" name="Rounded Rectangle 7"/>
           <p:cNvSpPr/>
           <p:nvPr/>
         </p:nvSpPr>
@@ -6186,7 +6152,7 @@
       </p:sp>
       <p:sp>
         <p:nvSpPr>
-          <p:cNvPr id="8" name="TextBox 7"/>
+          <p:cNvPr id="9" name="TextBox 8"/>
           <p:cNvSpPr txBox="1"/>
           <p:nvPr/>
         </p:nvSpPr>
@@ -6221,7 +6187,7 @@
       </p:sp>
       <p:sp>
         <p:nvSpPr>
-          <p:cNvPr id="9" name="Rounded Rectangle 8"/>
+          <p:cNvPr id="10" name="Rounded Rectangle 9"/>
           <p:cNvSpPr/>
           <p:nvPr/>
         </p:nvSpPr>
@@ -6266,7 +6232,7 @@
       </p:sp>
       <p:sp>
         <p:nvSpPr>
-          <p:cNvPr id="10" name="TextBox 9"/>
+          <p:cNvPr id="11" name="TextBox 10"/>
           <p:cNvSpPr txBox="1"/>
           <p:nvPr/>
         </p:nvSpPr>
@@ -6301,7 +6267,7 @@
       </p:sp>
       <p:sp>
         <p:nvSpPr>
-          <p:cNvPr id="11" name="Rounded Rectangle 10"/>
+          <p:cNvPr id="12" name="Rounded Rectangle 11"/>
           <p:cNvSpPr/>
           <p:nvPr/>
         </p:nvSpPr>
@@ -6346,7 +6312,7 @@
       </p:sp>
       <p:sp>
         <p:nvSpPr>
-          <p:cNvPr id="12" name="TextBox 11"/>
+          <p:cNvPr id="13" name="TextBox 12"/>
           <p:cNvSpPr txBox="1"/>
           <p:nvPr/>
         </p:nvSpPr>
@@ -6381,7 +6347,7 @@
       </p:sp>
       <p:sp>
         <p:nvSpPr>
-          <p:cNvPr id="13" name="TextBox 12"/>
+          <p:cNvPr id="14" name="TextBox 13"/>
           <p:cNvSpPr txBox="1"/>
           <p:nvPr/>
         </p:nvSpPr>
@@ -6416,7 +6382,7 @@
       </p:sp>
       <p:pic>
         <p:nvPicPr>
-          <p:cNvPr id="14" name="Picture 13" descr="d_softmax.png"/>
+          <p:cNvPr id="15" name="Picture 14" descr="fig_recall.png"/>
           <p:cNvPicPr>
             <a:picLocks noChangeAspect="1"/>
           </p:cNvPicPr>
@@ -6430,8 +6396,8 @@
         </p:blipFill>
         <p:spPr>
           <a:xfrm>
-            <a:off x="518007" y="2197772"/>
-            <a:ext cx="11155680" cy="3834054"/>
+            <a:off x="2205165" y="2057400"/>
+            <a:ext cx="7781363" cy="3977639"/>
           </a:xfrm>
           <a:prstGeom prst="rect">
             <a:avLst/>
@@ -6440,14 +6406,14 @@
       </p:pic>
       <p:sp>
         <p:nvSpPr>
-          <p:cNvPr id="15" name="Rounded Rectangle 14"/>
+          <p:cNvPr id="16" name="Rounded Rectangle 15"/>
           <p:cNvSpPr/>
           <p:nvPr/>
         </p:nvSpPr>
         <p:spPr>
           <a:xfrm>
-            <a:off x="7172553" y="6345936"/>
-            <a:ext cx="4379061" cy="365760"/>
+            <a:off x="7573060" y="6345936"/>
+            <a:ext cx="3978554" cy="365760"/>
           </a:xfrm>
           <a:prstGeom prst="roundRect">
             <a:avLst>
@@ -6485,13 +6451,13 @@
       </p:sp>
       <p:sp>
         <p:nvSpPr>
-          <p:cNvPr id="16" name="Rounded Rectangle 15"/>
+          <p:cNvPr id="17" name="Rounded Rectangle 16"/>
           <p:cNvSpPr/>
           <p:nvPr/>
         </p:nvSpPr>
         <p:spPr>
           <a:xfrm>
-            <a:off x="8214969" y="6396228"/>
+            <a:off x="8615476" y="6396228"/>
             <a:ext cx="754380" cy="265176"/>
           </a:xfrm>
           <a:prstGeom prst="roundRect">
@@ -6530,13 +6496,13 @@
       </p:sp>
       <p:sp>
         <p:nvSpPr>
-          <p:cNvPr id="17" name="TextBox 16"/>
-          <p:cNvSpPr txBox="1"/>
-          <p:nvPr/>
-        </p:nvSpPr>
-        <p:spPr>
-          <a:xfrm>
-            <a:off x="7328001" y="6460236"/>
+          <p:cNvPr id="18" name="TextBox 17"/>
+          <p:cNvSpPr txBox="1"/>
+          <p:nvPr/>
+        </p:nvSpPr>
+        <p:spPr>
+          <a:xfrm>
+            <a:off x="7728508" y="6460236"/>
             <a:ext cx="914400" cy="219456"/>
           </a:xfrm>
           <a:prstGeom prst="rect">
@@ -6565,13 +6531,13 @@
       </p:sp>
       <p:sp>
         <p:nvSpPr>
-          <p:cNvPr id="18" name="TextBox 17"/>
-          <p:cNvSpPr txBox="1"/>
-          <p:nvPr/>
-        </p:nvSpPr>
-        <p:spPr>
-          <a:xfrm>
-            <a:off x="8214969" y="6451092"/>
+          <p:cNvPr id="19" name="TextBox 18"/>
+          <p:cNvSpPr txBox="1"/>
+          <p:nvPr/>
+        </p:nvSpPr>
+        <p:spPr>
+          <a:xfrm>
+            <a:off x="8615476" y="6451092"/>
             <a:ext cx="754380" cy="219456"/>
           </a:xfrm>
           <a:prstGeom prst="rect">
@@ -6593,21 +6559,21 @@
                 </a:solidFill>
                 <a:latin typeface="Helvetica Neue"/>
               </a:rPr>
-              <a:t>STEP 19</a:t>
-            </a:r>
-          </a:p>
-        </p:txBody>
-      </p:sp>
-      <p:sp>
-        <p:nvSpPr>
-          <p:cNvPr id="19" name="TextBox 18"/>
-          <p:cNvSpPr txBox="1"/>
-          <p:nvPr/>
-        </p:nvSpPr>
-        <p:spPr>
-          <a:xfrm>
-            <a:off x="9088221" y="6460236"/>
-            <a:ext cx="2362809" cy="219456"/>
+              <a:t>STEP 18</a:t>
+            </a:r>
+          </a:p>
+        </p:txBody>
+      </p:sp>
+      <p:sp>
+        <p:nvSpPr>
+          <p:cNvPr id="20" name="TextBox 19"/>
+          <p:cNvSpPr txBox="1"/>
+          <p:nvPr/>
+        </p:nvSpPr>
+        <p:spPr>
+          <a:xfrm>
+            <a:off x="9488728" y="6460236"/>
+            <a:ext cx="1962302" cy="219456"/>
           </a:xfrm>
           <a:prstGeom prst="rect">
             <a:avLst/>
@@ -6628,7 +6594,42 @@
                 </a:solidFill>
                 <a:latin typeface="Helvetica Neue"/>
               </a:rPr>
-              <a:t>Feed it an off-topic ticket</a:t>
+              <a:t>Find the weak buckets</a:t>
+            </a:r>
+          </a:p>
+        </p:txBody>
+      </p:sp>
+      <p:sp>
+        <p:nvSpPr>
+          <p:cNvPr id="21" name="TextBox 20"/>
+          <p:cNvSpPr txBox="1"/>
+          <p:nvPr/>
+        </p:nvSpPr>
+        <p:spPr>
+          <a:xfrm>
+            <a:off x="640080" y="6080760"/>
+            <a:ext cx="10881360" cy="365760"/>
+          </a:xfrm>
+          <a:prstGeom prst="rect">
+            <a:avLst/>
+          </a:prstGeom>
+          <a:noFill/>
+        </p:spPr>
+        <p:txBody>
+          <a:bodyPr wrap="square" lIns="0" rIns="0" tIns="0" bIns="0">
+            <a:spAutoFit/>
+          </a:bodyPr>
+          <a:lstStyle/>
+          <a:p>
+            <a:pPr algn="ctr"/>
+            <a:r>
+              <a:rPr sz="1500" b="0" i="1">
+                <a:solidFill>
+                  <a:srgbClr val="475569"/>
+                </a:solidFill>
+                <a:latin typeface="Helvetica Neue"/>
+              </a:rPr>
+              <a:t>When a classifier underperforms, look at your taxonomy before you look at your model.</a:t>
             </a:r>
           </a:p>
         </p:txBody>
@@ -6710,55 +6711,20 @@
           <a:p>
             <a:pPr algn="l"/>
             <a:r>
-              <a:rPr sz="2650" b="1" i="0">
+              <a:rPr sz="2900" b="1" i="0">
                 <a:solidFill>
                   <a:srgbClr val="0F172A"/>
                 </a:solidFill>
                 <a:latin typeface="Helvetica Neue"/>
               </a:rPr>
-              <a:t>What a mistake costs decides the setting.</a:t>
-            </a:r>
-          </a:p>
-        </p:txBody>
-      </p:sp>
-      <p:sp>
-        <p:nvSpPr>
-          <p:cNvPr id="4" name="TextBox 3"/>
-          <p:cNvSpPr txBox="1"/>
-          <p:nvPr/>
-        </p:nvSpPr>
-        <p:spPr>
-          <a:xfrm>
-            <a:off x="640080" y="1417320"/>
-            <a:ext cx="10424160" cy="457200"/>
-          </a:xfrm>
-          <a:prstGeom prst="rect">
-            <a:avLst/>
-          </a:prstGeom>
-          <a:noFill/>
-        </p:spPr>
-        <p:txBody>
-          <a:bodyPr wrap="square" lIns="0" rIns="0" tIns="0" bIns="0">
-            <a:spAutoFit/>
-          </a:bodyPr>
-          <a:lstStyle/>
-          <a:p>
-            <a:pPr algn="l"/>
-            <a:r>
-              <a:rPr sz="1500" b="0" i="0">
-                <a:solidFill>
-                  <a:srgbClr val="475569"/>
-                </a:solidFill>
-                <a:latin typeface="Helvetica Neue"/>
-              </a:rPr>
-              <a:t>Same copilot, same tickets, six companies. Ask your neighbour: for the hospital, high bar or low?</a:t>
-            </a:r>
-          </a:p>
-        </p:txBody>
-      </p:sp>
-      <p:sp>
-        <p:nvSpPr>
-          <p:cNvPr id="5" name="Rounded Rectangle 4"/>
+              <a:t>Confident is not the same as correct.</a:t>
+            </a:r>
+          </a:p>
+        </p:txBody>
+      </p:sp>
+      <p:sp>
+        <p:nvSpPr>
+          <p:cNvPr id="4" name="Rounded Rectangle 3"/>
           <p:cNvSpPr/>
           <p:nvPr/>
         </p:nvSpPr>
@@ -6801,7 +6767,7 @@
       </p:sp>
       <p:sp>
         <p:nvSpPr>
-          <p:cNvPr id="6" name="Rounded Rectangle 5"/>
+          <p:cNvPr id="5" name="Rounded Rectangle 4"/>
           <p:cNvSpPr/>
           <p:nvPr/>
         </p:nvSpPr>
@@ -6846,7 +6812,7 @@
       </p:sp>
       <p:sp>
         <p:nvSpPr>
-          <p:cNvPr id="7" name="TextBox 6"/>
+          <p:cNvPr id="6" name="TextBox 5"/>
           <p:cNvSpPr txBox="1"/>
           <p:nvPr/>
         </p:nvSpPr>
@@ -6881,7 +6847,7 @@
       </p:sp>
       <p:sp>
         <p:nvSpPr>
-          <p:cNvPr id="8" name="Rounded Rectangle 7"/>
+          <p:cNvPr id="7" name="Rounded Rectangle 6"/>
           <p:cNvSpPr/>
           <p:nvPr/>
         </p:nvSpPr>
@@ -6926,7 +6892,7 @@
       </p:sp>
       <p:sp>
         <p:nvSpPr>
-          <p:cNvPr id="9" name="TextBox 8"/>
+          <p:cNvPr id="8" name="TextBox 7"/>
           <p:cNvSpPr txBox="1"/>
           <p:nvPr/>
         </p:nvSpPr>
@@ -6961,14 +6927,14 @@
       </p:sp>
       <p:sp>
         <p:nvSpPr>
-          <p:cNvPr id="10" name="Rounded Rectangle 9"/>
+          <p:cNvPr id="9" name="Rounded Rectangle 8"/>
           <p:cNvSpPr/>
           <p:nvPr/>
         </p:nvSpPr>
         <p:spPr>
           <a:xfrm>
-            <a:off x="9902951" y="475488"/>
-            <a:ext cx="256032" cy="256032"/>
+            <a:off x="9866376" y="438912"/>
+            <a:ext cx="329184" cy="329184"/>
           </a:xfrm>
           <a:prstGeom prst="roundRect">
             <a:avLst>
@@ -7006,14 +6972,14 @@
       </p:sp>
       <p:sp>
         <p:nvSpPr>
-          <p:cNvPr id="11" name="TextBox 10"/>
-          <p:cNvSpPr txBox="1"/>
-          <p:nvPr/>
-        </p:nvSpPr>
-        <p:spPr>
-          <a:xfrm>
-            <a:off x="9848087" y="475488"/>
-            <a:ext cx="365760" cy="256032"/>
+          <p:cNvPr id="10" name="TextBox 9"/>
+          <p:cNvSpPr txBox="1"/>
+          <p:nvPr/>
+        </p:nvSpPr>
+        <p:spPr>
+          <a:xfrm>
+            <a:off x="9811511" y="475488"/>
+            <a:ext cx="438912" cy="256032"/>
           </a:xfrm>
           <a:prstGeom prst="rect">
             <a:avLst/>
@@ -7028,7 +6994,7 @@
           <a:p>
             <a:pPr algn="ctr"/>
             <a:r>
-              <a:rPr sz="1050" b="1" i="0">
+              <a:rPr sz="1300" b="1" i="0">
                 <a:solidFill>
                   <a:srgbClr val="FFFFFF"/>
                 </a:solidFill>
@@ -7041,14 +7007,14 @@
       </p:sp>
       <p:sp>
         <p:nvSpPr>
-          <p:cNvPr id="12" name="Rounded Rectangle 11"/>
+          <p:cNvPr id="11" name="Rounded Rectangle 10"/>
           <p:cNvSpPr/>
           <p:nvPr/>
         </p:nvSpPr>
         <p:spPr>
           <a:xfrm>
-            <a:off x="10524744" y="438912"/>
-            <a:ext cx="329184" cy="329184"/>
+            <a:off x="10561319" y="475488"/>
+            <a:ext cx="256032" cy="256032"/>
           </a:xfrm>
           <a:prstGeom prst="roundRect">
             <a:avLst>
@@ -7056,7 +7022,7 @@
             </a:avLst>
           </a:prstGeom>
           <a:solidFill>
-            <a:srgbClr val="059669"/>
+            <a:srgbClr val="E9EBF0"/>
           </a:solidFill>
           <a:ln>
             <a:noFill/>
@@ -7086,42 +7052,42 @@
       </p:sp>
       <p:sp>
         <p:nvSpPr>
+          <p:cNvPr id="12" name="TextBox 11"/>
+          <p:cNvSpPr txBox="1"/>
+          <p:nvPr/>
+        </p:nvSpPr>
+        <p:spPr>
+          <a:xfrm>
+            <a:off x="10506455" y="475488"/>
+            <a:ext cx="365760" cy="256032"/>
+          </a:xfrm>
+          <a:prstGeom prst="rect">
+            <a:avLst/>
+          </a:prstGeom>
+          <a:noFill/>
+        </p:spPr>
+        <p:txBody>
+          <a:bodyPr wrap="square" lIns="0" rIns="0" tIns="0" bIns="0">
+            <a:spAutoFit/>
+          </a:bodyPr>
+          <a:lstStyle/>
+          <a:p>
+            <a:pPr algn="ctr"/>
+            <a:r>
+              <a:rPr sz="1050" b="1" i="0">
+                <a:solidFill>
+                  <a:srgbClr val="AEB4BF"/>
+                </a:solidFill>
+                <a:latin typeface="Helvetica Neue"/>
+              </a:rPr>
+              <a:t>4</a:t>
+            </a:r>
+          </a:p>
+        </p:txBody>
+      </p:sp>
+      <p:sp>
+        <p:nvSpPr>
           <p:cNvPr id="13" name="TextBox 12"/>
-          <p:cNvSpPr txBox="1"/>
-          <p:nvPr/>
-        </p:nvSpPr>
-        <p:spPr>
-          <a:xfrm>
-            <a:off x="10469880" y="475488"/>
-            <a:ext cx="438912" cy="256032"/>
-          </a:xfrm>
-          <a:prstGeom prst="rect">
-            <a:avLst/>
-          </a:prstGeom>
-          <a:noFill/>
-        </p:spPr>
-        <p:txBody>
-          <a:bodyPr wrap="square" lIns="0" rIns="0" tIns="0" bIns="0">
-            <a:spAutoFit/>
-          </a:bodyPr>
-          <a:lstStyle/>
-          <a:p>
-            <a:pPr algn="ctr"/>
-            <a:r>
-              <a:rPr sz="1300" b="1" i="0">
-                <a:solidFill>
-                  <a:srgbClr val="FFFFFF"/>
-                </a:solidFill>
-                <a:latin typeface="Helvetica Neue"/>
-              </a:rPr>
-              <a:t>4</a:t>
-            </a:r>
-          </a:p>
-        </p:txBody>
-      </p:sp>
-      <p:sp>
-        <p:nvSpPr>
-          <p:cNvPr id="14" name="TextBox 13"/>
           <p:cNvSpPr txBox="1"/>
           <p:nvPr/>
         </p:nvSpPr>
@@ -7156,7 +7122,7 @@
       </p:sp>
       <p:pic>
         <p:nvPicPr>
-          <p:cNvPr id="15" name="Picture 14" descr="fig_game.png"/>
+          <p:cNvPr id="14" name="Picture 13" descr="d_softmax.png"/>
           <p:cNvPicPr>
             <a:picLocks noChangeAspect="1"/>
           </p:cNvPicPr>
@@ -7170,8 +7136,8 @@
         </p:blipFill>
         <p:spPr>
           <a:xfrm>
-            <a:off x="2207847" y="2011680"/>
-            <a:ext cx="7775999" cy="3931920"/>
+            <a:off x="518007" y="2197772"/>
+            <a:ext cx="11155680" cy="3834054"/>
           </a:xfrm>
           <a:prstGeom prst="rect">
             <a:avLst/>
@@ -7180,14 +7146,14 @@
       </p:pic>
       <p:sp>
         <p:nvSpPr>
-          <p:cNvPr id="16" name="Rounded Rectangle 15"/>
+          <p:cNvPr id="15" name="Rounded Rectangle 14"/>
           <p:cNvSpPr/>
           <p:nvPr/>
         </p:nvSpPr>
         <p:spPr>
           <a:xfrm>
-            <a:off x="7105802" y="6345936"/>
-            <a:ext cx="4445812" cy="365760"/>
+            <a:off x="7172553" y="6345936"/>
+            <a:ext cx="4379061" cy="365760"/>
           </a:xfrm>
           <a:prstGeom prst="roundRect">
             <a:avLst>
@@ -7225,13 +7191,13 @@
       </p:sp>
       <p:sp>
         <p:nvSpPr>
-          <p:cNvPr id="17" name="Rounded Rectangle 16"/>
+          <p:cNvPr id="16" name="Rounded Rectangle 15"/>
           <p:cNvSpPr/>
           <p:nvPr/>
         </p:nvSpPr>
         <p:spPr>
           <a:xfrm>
-            <a:off x="8148218" y="6396228"/>
+            <a:off x="8214969" y="6396228"/>
             <a:ext cx="754380" cy="265176"/>
           </a:xfrm>
           <a:prstGeom prst="roundRect">
@@ -7270,14 +7236,49 @@
       </p:sp>
       <p:sp>
         <p:nvSpPr>
+          <p:cNvPr id="17" name="TextBox 16"/>
+          <p:cNvSpPr txBox="1"/>
+          <p:nvPr/>
+        </p:nvSpPr>
+        <p:spPr>
+          <a:xfrm>
+            <a:off x="7328001" y="6460236"/>
+            <a:ext cx="914400" cy="219456"/>
+          </a:xfrm>
+          <a:prstGeom prst="rect">
+            <a:avLst/>
+          </a:prstGeom>
+          <a:noFill/>
+        </p:spPr>
+        <p:txBody>
+          <a:bodyPr wrap="none" lIns="0" rIns="0" tIns="0" bIns="0">
+            <a:spAutoFit/>
+          </a:bodyPr>
+          <a:lstStyle/>
+          <a:p>
+            <a:pPr algn="l"/>
+            <a:r>
+              <a:rPr sz="950" b="1" i="0">
+                <a:solidFill>
+                  <a:srgbClr val="A7F3D0"/>
+                </a:solidFill>
+                <a:latin typeface="Helvetica Neue"/>
+              </a:rPr>
+              <a:t>▶ NOTEBOOK</a:t>
+            </a:r>
+          </a:p>
+        </p:txBody>
+      </p:sp>
+      <p:sp>
+        <p:nvSpPr>
           <p:cNvPr id="18" name="TextBox 17"/>
           <p:cNvSpPr txBox="1"/>
           <p:nvPr/>
         </p:nvSpPr>
         <p:spPr>
           <a:xfrm>
-            <a:off x="7261250" y="6460236"/>
-            <a:ext cx="914400" cy="219456"/>
+            <a:off x="8214969" y="6451092"/>
+            <a:ext cx="754380" cy="219456"/>
           </a:xfrm>
           <a:prstGeom prst="rect">
             <a:avLst/>
@@ -7290,120 +7291,50 @@
           </a:bodyPr>
           <a:lstStyle/>
           <a:p>
+            <a:pPr algn="ctr"/>
+            <a:r>
+              <a:rPr sz="1100" b="1" i="0">
+                <a:solidFill>
+                  <a:srgbClr val="FFFFFF"/>
+                </a:solidFill>
+                <a:latin typeface="Helvetica Neue"/>
+              </a:rPr>
+              <a:t>STEP 19</a:t>
+            </a:r>
+          </a:p>
+        </p:txBody>
+      </p:sp>
+      <p:sp>
+        <p:nvSpPr>
+          <p:cNvPr id="19" name="TextBox 18"/>
+          <p:cNvSpPr txBox="1"/>
+          <p:nvPr/>
+        </p:nvSpPr>
+        <p:spPr>
+          <a:xfrm>
+            <a:off x="9088221" y="6460236"/>
+            <a:ext cx="2362809" cy="219456"/>
+          </a:xfrm>
+          <a:prstGeom prst="rect">
+            <a:avLst/>
+          </a:prstGeom>
+          <a:noFill/>
+        </p:spPr>
+        <p:txBody>
+          <a:bodyPr wrap="none" lIns="0" rIns="0" tIns="0" bIns="0">
+            <a:spAutoFit/>
+          </a:bodyPr>
+          <a:lstStyle/>
+          <a:p>
             <a:pPr algn="l"/>
             <a:r>
-              <a:rPr sz="950" b="1" i="0">
-                <a:solidFill>
-                  <a:srgbClr val="A7F3D0"/>
-                </a:solidFill>
-                <a:latin typeface="Helvetica Neue"/>
-              </a:rPr>
-              <a:t>▶ NOTEBOOK</a:t>
-            </a:r>
-          </a:p>
-        </p:txBody>
-      </p:sp>
-      <p:sp>
-        <p:nvSpPr>
-          <p:cNvPr id="19" name="TextBox 18"/>
-          <p:cNvSpPr txBox="1"/>
-          <p:nvPr/>
-        </p:nvSpPr>
-        <p:spPr>
-          <a:xfrm>
-            <a:off x="8148218" y="6451092"/>
-            <a:ext cx="754380" cy="219456"/>
-          </a:xfrm>
-          <a:prstGeom prst="rect">
-            <a:avLst/>
-          </a:prstGeom>
-          <a:noFill/>
-        </p:spPr>
-        <p:txBody>
-          <a:bodyPr wrap="none" lIns="0" rIns="0" tIns="0" bIns="0">
-            <a:spAutoFit/>
-          </a:bodyPr>
-          <a:lstStyle/>
-          <a:p>
-            <a:pPr algn="ctr"/>
-            <a:r>
-              <a:rPr sz="1100" b="1" i="0">
+              <a:rPr sz="1000" b="1" i="0">
                 <a:solidFill>
                   <a:srgbClr val="FFFFFF"/>
                 </a:solidFill>
                 <a:latin typeface="Helvetica Neue"/>
               </a:rPr>
-              <a:t>STEP 21</a:t>
-            </a:r>
-          </a:p>
-        </p:txBody>
-      </p:sp>
-      <p:sp>
-        <p:nvSpPr>
-          <p:cNvPr id="20" name="TextBox 19"/>
-          <p:cNvSpPr txBox="1"/>
-          <p:nvPr/>
-        </p:nvSpPr>
-        <p:spPr>
-          <a:xfrm>
-            <a:off x="9021470" y="6460236"/>
-            <a:ext cx="2429560" cy="219456"/>
-          </a:xfrm>
-          <a:prstGeom prst="rect">
-            <a:avLst/>
-          </a:prstGeom>
-          <a:noFill/>
-        </p:spPr>
-        <p:txBody>
-          <a:bodyPr wrap="none" lIns="0" rIns="0" tIns="0" bIns="0">
-            <a:spAutoFit/>
-          </a:bodyPr>
-          <a:lstStyle/>
-          <a:p>
-            <a:pPr algn="l"/>
-            <a:r>
-              <a:rPr sz="1000" b="1" i="0">
-                <a:solidFill>
-                  <a:srgbClr val="FFFFFF"/>
-                </a:solidFill>
-                <a:latin typeface="Helvetica Neue"/>
-              </a:rPr>
-              <a:t>YOUR KNOB: set the threshold</a:t>
-            </a:r>
-          </a:p>
-        </p:txBody>
-      </p:sp>
-      <p:sp>
-        <p:nvSpPr>
-          <p:cNvPr id="21" name="TextBox 20"/>
-          <p:cNvSpPr txBox="1"/>
-          <p:nvPr/>
-        </p:nvSpPr>
-        <p:spPr>
-          <a:xfrm>
-            <a:off x="640080" y="6016752"/>
-            <a:ext cx="10881360" cy="365760"/>
-          </a:xfrm>
-          <a:prstGeom prst="rect">
-            <a:avLst/>
-          </a:prstGeom>
-          <a:noFill/>
-        </p:spPr>
-        <p:txBody>
-          <a:bodyPr wrap="square" lIns="0" rIns="0" tIns="0" bIns="0">
-            <a:spAutoFit/>
-          </a:bodyPr>
-          <a:lstStyle/>
-          <a:p>
-            <a:pPr algn="ctr"/>
-            <a:r>
-              <a:rPr sz="1500" b="0" i="1">
-                <a:solidFill>
-                  <a:srgbClr val="475569"/>
-                </a:solidFill>
-                <a:latin typeface="Helvetica Neue"/>
-              </a:rPr>
-              <a:t>Accuracy is a property of the model. The right threshold is a property of the business.</a:t>
+              <a:t>Feed it an off-topic ticket</a:t>
             </a:r>
           </a:p>
         </p:txBody>
@@ -7452,11 +7383,11 @@
             <a:r>
               <a:rPr sz="1250" b="1" i="0" spc="220">
                 <a:solidFill>
-                  <a:srgbClr val="4F46E5"/>
-                </a:solidFill>
-                <a:latin typeface="Helvetica Neue"/>
-              </a:rPr>
-              <a:t>FULL CIRCLE</a:t>
+                  <a:srgbClr val="059669"/>
+                </a:solidFill>
+                <a:latin typeface="Helvetica Neue"/>
+              </a:rPr>
+              <a:t>DECIDE</a:t>
             </a:r>
           </a:p>
         </p:txBody>
@@ -7470,7 +7401,7 @@
         <p:spPr>
           <a:xfrm>
             <a:off x="640080" y="758952"/>
-            <a:ext cx="10972800" cy="704088"/>
+            <a:ext cx="7680960" cy="704088"/>
           </a:xfrm>
           <a:prstGeom prst="rect">
             <a:avLst/>
@@ -7485,13 +7416,13 @@
           <a:p>
             <a:pPr algn="l"/>
             <a:r>
-              <a:rPr sz="2900" b="1" i="0">
+              <a:rPr sz="2650" b="1" i="0">
                 <a:solidFill>
                   <a:srgbClr val="0F172A"/>
                 </a:solidFill>
                 <a:latin typeface="Helvetica Neue"/>
               </a:rPr>
-              <a:t>What we shipped today, for $0.</a:t>
+              <a:t>What a mistake costs decides the setting.</a:t>
             </a:r>
           </a:p>
         </p:txBody>
@@ -7526,14 +7457,377 @@
                 </a:solidFill>
                 <a:latin typeface="Helvetica Neue"/>
               </a:rPr>
-              <a:t>No training data. No training run. No GPU bill. One afternoon.</a:t>
-            </a:r>
-          </a:p>
-        </p:txBody>
-      </p:sp>
-      <p:sp>
-        <p:nvSpPr>
-          <p:cNvPr id="5" name="TextBox 4"/>
+              <a:t>Same copilot, same tickets, six companies. Ask your neighbour: for the hospital, high bar or low?</a:t>
+            </a:r>
+          </a:p>
+        </p:txBody>
+      </p:sp>
+      <p:sp>
+        <p:nvSpPr>
+          <p:cNvPr id="5" name="Rounded Rectangle 4"/>
+          <p:cNvSpPr/>
+          <p:nvPr/>
+        </p:nvSpPr>
+        <p:spPr>
+          <a:xfrm>
+            <a:off x="8705088" y="591616"/>
+            <a:ext cx="1975104" cy="23774"/>
+          </a:xfrm>
+          <a:prstGeom prst="roundRect">
+            <a:avLst/>
+          </a:prstGeom>
+          <a:solidFill>
+            <a:srgbClr val="E9EBF0"/>
+          </a:solidFill>
+          <a:ln>
+            <a:noFill/>
+          </a:ln>
+        </p:spPr>
+        <p:style>
+          <a:lnRef idx="1">
+            <a:schemeClr val="accent1"/>
+          </a:lnRef>
+          <a:fillRef idx="3">
+            <a:schemeClr val="accent1"/>
+          </a:fillRef>
+          <a:effectRef idx="2">
+            <a:schemeClr val="accent1"/>
+          </a:effectRef>
+          <a:fontRef idx="minor">
+            <a:schemeClr val="lt1"/>
+          </a:fontRef>
+        </p:style>
+        <p:txBody>
+          <a:bodyPr rtlCol="0" anchor="ctr"/>
+          <a:lstStyle/>
+          <a:p>
+            <a:pPr algn="ctr"/>
+          </a:p>
+        </p:txBody>
+      </p:sp>
+      <p:sp>
+        <p:nvSpPr>
+          <p:cNvPr id="6" name="Rounded Rectangle 5"/>
+          <p:cNvSpPr/>
+          <p:nvPr/>
+        </p:nvSpPr>
+        <p:spPr>
+          <a:xfrm>
+            <a:off x="8586215" y="475488"/>
+            <a:ext cx="256032" cy="256032"/>
+          </a:xfrm>
+          <a:prstGeom prst="roundRect">
+            <a:avLst>
+              <a:gd name="adj" fmla="val 32000"/>
+            </a:avLst>
+          </a:prstGeom>
+          <a:solidFill>
+            <a:srgbClr val="0EA5E9"/>
+          </a:solidFill>
+          <a:ln>
+            <a:noFill/>
+          </a:ln>
+        </p:spPr>
+        <p:style>
+          <a:lnRef idx="1">
+            <a:schemeClr val="accent1"/>
+          </a:lnRef>
+          <a:fillRef idx="3">
+            <a:schemeClr val="accent1"/>
+          </a:fillRef>
+          <a:effectRef idx="2">
+            <a:schemeClr val="accent1"/>
+          </a:effectRef>
+          <a:fontRef idx="minor">
+            <a:schemeClr val="lt1"/>
+          </a:fontRef>
+        </p:style>
+        <p:txBody>
+          <a:bodyPr rtlCol="0" anchor="ctr"/>
+          <a:lstStyle/>
+          <a:p>
+            <a:pPr algn="ctr"/>
+          </a:p>
+        </p:txBody>
+      </p:sp>
+      <p:sp>
+        <p:nvSpPr>
+          <p:cNvPr id="7" name="TextBox 6"/>
+          <p:cNvSpPr txBox="1"/>
+          <p:nvPr/>
+        </p:nvSpPr>
+        <p:spPr>
+          <a:xfrm>
+            <a:off x="8531351" y="475488"/>
+            <a:ext cx="365760" cy="256032"/>
+          </a:xfrm>
+          <a:prstGeom prst="rect">
+            <a:avLst/>
+          </a:prstGeom>
+          <a:noFill/>
+        </p:spPr>
+        <p:txBody>
+          <a:bodyPr wrap="square" lIns="0" rIns="0" tIns="0" bIns="0">
+            <a:spAutoFit/>
+          </a:bodyPr>
+          <a:lstStyle/>
+          <a:p>
+            <a:pPr algn="ctr"/>
+            <a:r>
+              <a:rPr sz="1050" b="1" i="0">
+                <a:solidFill>
+                  <a:srgbClr val="FFFFFF"/>
+                </a:solidFill>
+                <a:latin typeface="Helvetica Neue"/>
+              </a:rPr>
+              <a:t>1</a:t>
+            </a:r>
+          </a:p>
+        </p:txBody>
+      </p:sp>
+      <p:sp>
+        <p:nvSpPr>
+          <p:cNvPr id="8" name="Rounded Rectangle 7"/>
+          <p:cNvSpPr/>
+          <p:nvPr/>
+        </p:nvSpPr>
+        <p:spPr>
+          <a:xfrm>
+            <a:off x="9244584" y="475488"/>
+            <a:ext cx="256032" cy="256032"/>
+          </a:xfrm>
+          <a:prstGeom prst="roundRect">
+            <a:avLst>
+              <a:gd name="adj" fmla="val 32000"/>
+            </a:avLst>
+          </a:prstGeom>
+          <a:solidFill>
+            <a:srgbClr val="D97706"/>
+          </a:solidFill>
+          <a:ln>
+            <a:noFill/>
+          </a:ln>
+        </p:spPr>
+        <p:style>
+          <a:lnRef idx="1">
+            <a:schemeClr val="accent1"/>
+          </a:lnRef>
+          <a:fillRef idx="3">
+            <a:schemeClr val="accent1"/>
+          </a:fillRef>
+          <a:effectRef idx="2">
+            <a:schemeClr val="accent1"/>
+          </a:effectRef>
+          <a:fontRef idx="minor">
+            <a:schemeClr val="lt1"/>
+          </a:fontRef>
+        </p:style>
+        <p:txBody>
+          <a:bodyPr rtlCol="0" anchor="ctr"/>
+          <a:lstStyle/>
+          <a:p>
+            <a:pPr algn="ctr"/>
+          </a:p>
+        </p:txBody>
+      </p:sp>
+      <p:sp>
+        <p:nvSpPr>
+          <p:cNvPr id="9" name="TextBox 8"/>
+          <p:cNvSpPr txBox="1"/>
+          <p:nvPr/>
+        </p:nvSpPr>
+        <p:spPr>
+          <a:xfrm>
+            <a:off x="9189719" y="475488"/>
+            <a:ext cx="365760" cy="256032"/>
+          </a:xfrm>
+          <a:prstGeom prst="rect">
+            <a:avLst/>
+          </a:prstGeom>
+          <a:noFill/>
+        </p:spPr>
+        <p:txBody>
+          <a:bodyPr wrap="square" lIns="0" rIns="0" tIns="0" bIns="0">
+            <a:spAutoFit/>
+          </a:bodyPr>
+          <a:lstStyle/>
+          <a:p>
+            <a:pPr algn="ctr"/>
+            <a:r>
+              <a:rPr sz="1050" b="1" i="0">
+                <a:solidFill>
+                  <a:srgbClr val="FFFFFF"/>
+                </a:solidFill>
+                <a:latin typeface="Helvetica Neue"/>
+              </a:rPr>
+              <a:t>2</a:t>
+            </a:r>
+          </a:p>
+        </p:txBody>
+      </p:sp>
+      <p:sp>
+        <p:nvSpPr>
+          <p:cNvPr id="10" name="Rounded Rectangle 9"/>
+          <p:cNvSpPr/>
+          <p:nvPr/>
+        </p:nvSpPr>
+        <p:spPr>
+          <a:xfrm>
+            <a:off x="9902951" y="475488"/>
+            <a:ext cx="256032" cy="256032"/>
+          </a:xfrm>
+          <a:prstGeom prst="roundRect">
+            <a:avLst>
+              <a:gd name="adj" fmla="val 32000"/>
+            </a:avLst>
+          </a:prstGeom>
+          <a:solidFill>
+            <a:srgbClr val="7C3AED"/>
+          </a:solidFill>
+          <a:ln>
+            <a:noFill/>
+          </a:ln>
+        </p:spPr>
+        <p:style>
+          <a:lnRef idx="1">
+            <a:schemeClr val="accent1"/>
+          </a:lnRef>
+          <a:fillRef idx="3">
+            <a:schemeClr val="accent1"/>
+          </a:fillRef>
+          <a:effectRef idx="2">
+            <a:schemeClr val="accent1"/>
+          </a:effectRef>
+          <a:fontRef idx="minor">
+            <a:schemeClr val="lt1"/>
+          </a:fontRef>
+        </p:style>
+        <p:txBody>
+          <a:bodyPr rtlCol="0" anchor="ctr"/>
+          <a:lstStyle/>
+          <a:p>
+            <a:pPr algn="ctr"/>
+          </a:p>
+        </p:txBody>
+      </p:sp>
+      <p:sp>
+        <p:nvSpPr>
+          <p:cNvPr id="11" name="TextBox 10"/>
+          <p:cNvSpPr txBox="1"/>
+          <p:nvPr/>
+        </p:nvSpPr>
+        <p:spPr>
+          <a:xfrm>
+            <a:off x="9848087" y="475488"/>
+            <a:ext cx="365760" cy="256032"/>
+          </a:xfrm>
+          <a:prstGeom prst="rect">
+            <a:avLst/>
+          </a:prstGeom>
+          <a:noFill/>
+        </p:spPr>
+        <p:txBody>
+          <a:bodyPr wrap="square" lIns="0" rIns="0" tIns="0" bIns="0">
+            <a:spAutoFit/>
+          </a:bodyPr>
+          <a:lstStyle/>
+          <a:p>
+            <a:pPr algn="ctr"/>
+            <a:r>
+              <a:rPr sz="1050" b="1" i="0">
+                <a:solidFill>
+                  <a:srgbClr val="FFFFFF"/>
+                </a:solidFill>
+                <a:latin typeface="Helvetica Neue"/>
+              </a:rPr>
+              <a:t>3</a:t>
+            </a:r>
+          </a:p>
+        </p:txBody>
+      </p:sp>
+      <p:sp>
+        <p:nvSpPr>
+          <p:cNvPr id="12" name="Rounded Rectangle 11"/>
+          <p:cNvSpPr/>
+          <p:nvPr/>
+        </p:nvSpPr>
+        <p:spPr>
+          <a:xfrm>
+            <a:off x="10524744" y="438912"/>
+            <a:ext cx="329184" cy="329184"/>
+          </a:xfrm>
+          <a:prstGeom prst="roundRect">
+            <a:avLst>
+              <a:gd name="adj" fmla="val 32000"/>
+            </a:avLst>
+          </a:prstGeom>
+          <a:solidFill>
+            <a:srgbClr val="059669"/>
+          </a:solidFill>
+          <a:ln>
+            <a:noFill/>
+          </a:ln>
+        </p:spPr>
+        <p:style>
+          <a:lnRef idx="1">
+            <a:schemeClr val="accent1"/>
+          </a:lnRef>
+          <a:fillRef idx="3">
+            <a:schemeClr val="accent1"/>
+          </a:fillRef>
+          <a:effectRef idx="2">
+            <a:schemeClr val="accent1"/>
+          </a:effectRef>
+          <a:fontRef idx="minor">
+            <a:schemeClr val="lt1"/>
+          </a:fontRef>
+        </p:style>
+        <p:txBody>
+          <a:bodyPr rtlCol="0" anchor="ctr"/>
+          <a:lstStyle/>
+          <a:p>
+            <a:pPr algn="ctr"/>
+          </a:p>
+        </p:txBody>
+      </p:sp>
+      <p:sp>
+        <p:nvSpPr>
+          <p:cNvPr id="13" name="TextBox 12"/>
+          <p:cNvSpPr txBox="1"/>
+          <p:nvPr/>
+        </p:nvSpPr>
+        <p:spPr>
+          <a:xfrm>
+            <a:off x="10469880" y="475488"/>
+            <a:ext cx="438912" cy="256032"/>
+          </a:xfrm>
+          <a:prstGeom prst="rect">
+            <a:avLst/>
+          </a:prstGeom>
+          <a:noFill/>
+        </p:spPr>
+        <p:txBody>
+          <a:bodyPr wrap="square" lIns="0" rIns="0" tIns="0" bIns="0">
+            <a:spAutoFit/>
+          </a:bodyPr>
+          <a:lstStyle/>
+          <a:p>
+            <a:pPr algn="ctr"/>
+            <a:r>
+              <a:rPr sz="1300" b="1" i="0">
+                <a:solidFill>
+                  <a:srgbClr val="FFFFFF"/>
+                </a:solidFill>
+                <a:latin typeface="Helvetica Neue"/>
+              </a:rPr>
+              <a:t>4</a:t>
+            </a:r>
+          </a:p>
+        </p:txBody>
+      </p:sp>
+      <p:sp>
+        <p:nvSpPr>
+          <p:cNvPr id="14" name="TextBox 13"/>
           <p:cNvSpPr txBox="1"/>
           <p:nvPr/>
         </p:nvSpPr>
@@ -7568,7 +7862,7 @@
       </p:sp>
       <p:pic>
         <p:nvPicPr>
-          <p:cNvPr id="6" name="Picture 5" descr="d_shipped.png"/>
+          <p:cNvPr id="15" name="Picture 14" descr="fig_game.png"/>
           <p:cNvPicPr>
             <a:picLocks noChangeAspect="1"/>
           </p:cNvPicPr>
@@ -7582,8 +7876,8 @@
         </p:blipFill>
         <p:spPr>
           <a:xfrm>
-            <a:off x="518007" y="2943310"/>
-            <a:ext cx="11155680" cy="1885778"/>
+            <a:off x="2207847" y="2011680"/>
+            <a:ext cx="7775999" cy="3931920"/>
           </a:xfrm>
           <a:prstGeom prst="rect">
             <a:avLst/>
@@ -7592,14 +7886,209 @@
       </p:pic>
       <p:sp>
         <p:nvSpPr>
-          <p:cNvPr id="7" name="TextBox 6"/>
-          <p:cNvSpPr txBox="1"/>
-          <p:nvPr/>
-        </p:nvSpPr>
-        <p:spPr>
-          <a:xfrm>
-            <a:off x="640080" y="5760720"/>
-            <a:ext cx="10881360" cy="457200"/>
+          <p:cNvPr id="16" name="Rounded Rectangle 15"/>
+          <p:cNvSpPr/>
+          <p:nvPr/>
+        </p:nvSpPr>
+        <p:spPr>
+          <a:xfrm>
+            <a:off x="7105802" y="6345936"/>
+            <a:ext cx="4445812" cy="365760"/>
+          </a:xfrm>
+          <a:prstGeom prst="roundRect">
+            <a:avLst>
+              <a:gd name="adj" fmla="val 44000"/>
+            </a:avLst>
+          </a:prstGeom>
+          <a:solidFill>
+            <a:srgbClr val="059669"/>
+          </a:solidFill>
+          <a:ln>
+            <a:noFill/>
+          </a:ln>
+        </p:spPr>
+        <p:style>
+          <a:lnRef idx="1">
+            <a:schemeClr val="accent1"/>
+          </a:lnRef>
+          <a:fillRef idx="3">
+            <a:schemeClr val="accent1"/>
+          </a:fillRef>
+          <a:effectRef idx="2">
+            <a:schemeClr val="accent1"/>
+          </a:effectRef>
+          <a:fontRef idx="minor">
+            <a:schemeClr val="lt1"/>
+          </a:fontRef>
+        </p:style>
+        <p:txBody>
+          <a:bodyPr rtlCol="0" anchor="ctr"/>
+          <a:lstStyle/>
+          <a:p>
+            <a:pPr algn="ctr"/>
+          </a:p>
+        </p:txBody>
+      </p:sp>
+      <p:sp>
+        <p:nvSpPr>
+          <p:cNvPr id="17" name="Rounded Rectangle 16"/>
+          <p:cNvSpPr/>
+          <p:nvPr/>
+        </p:nvSpPr>
+        <p:spPr>
+          <a:xfrm>
+            <a:off x="8148218" y="6396228"/>
+            <a:ext cx="754380" cy="265176"/>
+          </a:xfrm>
+          <a:prstGeom prst="roundRect">
+            <a:avLst>
+              <a:gd name="adj" fmla="val 44000"/>
+            </a:avLst>
+          </a:prstGeom>
+          <a:solidFill>
+            <a:srgbClr val="064E3B"/>
+          </a:solidFill>
+          <a:ln>
+            <a:noFill/>
+          </a:ln>
+        </p:spPr>
+        <p:style>
+          <a:lnRef idx="1">
+            <a:schemeClr val="accent1"/>
+          </a:lnRef>
+          <a:fillRef idx="3">
+            <a:schemeClr val="accent1"/>
+          </a:fillRef>
+          <a:effectRef idx="2">
+            <a:schemeClr val="accent1"/>
+          </a:effectRef>
+          <a:fontRef idx="minor">
+            <a:schemeClr val="lt1"/>
+          </a:fontRef>
+        </p:style>
+        <p:txBody>
+          <a:bodyPr rtlCol="0" anchor="ctr"/>
+          <a:lstStyle/>
+          <a:p>
+            <a:pPr algn="ctr"/>
+          </a:p>
+        </p:txBody>
+      </p:sp>
+      <p:sp>
+        <p:nvSpPr>
+          <p:cNvPr id="18" name="TextBox 17"/>
+          <p:cNvSpPr txBox="1"/>
+          <p:nvPr/>
+        </p:nvSpPr>
+        <p:spPr>
+          <a:xfrm>
+            <a:off x="7261250" y="6460236"/>
+            <a:ext cx="914400" cy="219456"/>
+          </a:xfrm>
+          <a:prstGeom prst="rect">
+            <a:avLst/>
+          </a:prstGeom>
+          <a:noFill/>
+        </p:spPr>
+        <p:txBody>
+          <a:bodyPr wrap="none" lIns="0" rIns="0" tIns="0" bIns="0">
+            <a:spAutoFit/>
+          </a:bodyPr>
+          <a:lstStyle/>
+          <a:p>
+            <a:pPr algn="l"/>
+            <a:r>
+              <a:rPr sz="950" b="1" i="0">
+                <a:solidFill>
+                  <a:srgbClr val="A7F3D0"/>
+                </a:solidFill>
+                <a:latin typeface="Helvetica Neue"/>
+              </a:rPr>
+              <a:t>▶ NOTEBOOK</a:t>
+            </a:r>
+          </a:p>
+        </p:txBody>
+      </p:sp>
+      <p:sp>
+        <p:nvSpPr>
+          <p:cNvPr id="19" name="TextBox 18"/>
+          <p:cNvSpPr txBox="1"/>
+          <p:nvPr/>
+        </p:nvSpPr>
+        <p:spPr>
+          <a:xfrm>
+            <a:off x="8148218" y="6451092"/>
+            <a:ext cx="754380" cy="219456"/>
+          </a:xfrm>
+          <a:prstGeom prst="rect">
+            <a:avLst/>
+          </a:prstGeom>
+          <a:noFill/>
+        </p:spPr>
+        <p:txBody>
+          <a:bodyPr wrap="none" lIns="0" rIns="0" tIns="0" bIns="0">
+            <a:spAutoFit/>
+          </a:bodyPr>
+          <a:lstStyle/>
+          <a:p>
+            <a:pPr algn="ctr"/>
+            <a:r>
+              <a:rPr sz="1100" b="1" i="0">
+                <a:solidFill>
+                  <a:srgbClr val="FFFFFF"/>
+                </a:solidFill>
+                <a:latin typeface="Helvetica Neue"/>
+              </a:rPr>
+              <a:t>STEP 21</a:t>
+            </a:r>
+          </a:p>
+        </p:txBody>
+      </p:sp>
+      <p:sp>
+        <p:nvSpPr>
+          <p:cNvPr id="20" name="TextBox 19"/>
+          <p:cNvSpPr txBox="1"/>
+          <p:nvPr/>
+        </p:nvSpPr>
+        <p:spPr>
+          <a:xfrm>
+            <a:off x="9021470" y="6460236"/>
+            <a:ext cx="2429560" cy="219456"/>
+          </a:xfrm>
+          <a:prstGeom prst="rect">
+            <a:avLst/>
+          </a:prstGeom>
+          <a:noFill/>
+        </p:spPr>
+        <p:txBody>
+          <a:bodyPr wrap="none" lIns="0" rIns="0" tIns="0" bIns="0">
+            <a:spAutoFit/>
+          </a:bodyPr>
+          <a:lstStyle/>
+          <a:p>
+            <a:pPr algn="l"/>
+            <a:r>
+              <a:rPr sz="1000" b="1" i="0">
+                <a:solidFill>
+                  <a:srgbClr val="FFFFFF"/>
+                </a:solidFill>
+                <a:latin typeface="Helvetica Neue"/>
+              </a:rPr>
+              <a:t>YOUR KNOB: set the threshold</a:t>
+            </a:r>
+          </a:p>
+        </p:txBody>
+      </p:sp>
+      <p:sp>
+        <p:nvSpPr>
+          <p:cNvPr id="21" name="TextBox 20"/>
+          <p:cNvSpPr txBox="1"/>
+          <p:nvPr/>
+        </p:nvSpPr>
+        <p:spPr>
+          <a:xfrm>
+            <a:off x="640080" y="6016752"/>
+            <a:ext cx="10881360" cy="365760"/>
           </a:xfrm>
           <a:prstGeom prst="rect">
             <a:avLst/>
@@ -7614,13 +8103,13 @@
           <a:p>
             <a:pPr algn="ctr"/>
             <a:r>
-              <a:rPr sz="1600" b="0" i="1">
-                <a:solidFill>
-                  <a:srgbClr val="0F172A"/>
-                </a:solidFill>
-                <a:latin typeface="Helvetica Neue"/>
-              </a:rPr>
-              <a:t>Someone else already spent millions teaching a model to read English. Your job is to point it at your problem, cheaply, and know where it breaks.</a:t>
+              <a:rPr sz="1500" b="0" i="1">
+                <a:solidFill>
+                  <a:srgbClr val="475569"/>
+                </a:solidFill>
+                <a:latin typeface="Helvetica Neue"/>
+              </a:rPr>
+              <a:t>Accuracy is a property of the model. The right threshold is a property of the business.</a:t>
             </a:r>
           </a:p>
         </p:txBody>
@@ -7673,7 +8162,7 @@
                 </a:solidFill>
                 <a:latin typeface="Helvetica Neue"/>
               </a:rPr>
-              <a:t>BEFORE WE OPEN IT UP</a:t>
+              <a:t>FULL CIRCLE</a:t>
             </a:r>
           </a:p>
         </p:txBody>
@@ -7708,7 +8197,7 @@
                 </a:solidFill>
                 <a:latin typeface="Helvetica Neue"/>
               </a:rPr>
-              <a:t>What you actually saw tonight.</a:t>
+              <a:t>What we shipped today, for $0.</a:t>
             </a:r>
           </a:p>
         </p:txBody>
@@ -7743,7 +8232,7 @@
                 </a:solidFill>
                 <a:latin typeface="Helvetica Neue"/>
               </a:rPr>
-              <a:t>Hold both columns in your head. We are about to need them.</a:t>
+              <a:t>No training data. No training run. No GPU bill. One afternoon.</a:t>
             </a:r>
           </a:p>
         </p:txBody>
@@ -7785,7 +8274,7 @@
       </p:sp>
       <p:pic>
         <p:nvPicPr>
-          <p:cNvPr id="6" name="Picture 5" descr="d_saw.png"/>
+          <p:cNvPr id="6" name="Picture 5" descr="d_shipped.png"/>
           <p:cNvPicPr>
             <a:picLocks noChangeAspect="1"/>
           </p:cNvPicPr>
@@ -7799,14 +8288,49 @@
         </p:blipFill>
         <p:spPr>
           <a:xfrm>
-            <a:off x="518007" y="3252244"/>
-            <a:ext cx="11155680" cy="1862271"/>
+            <a:off x="518007" y="2943310"/>
+            <a:ext cx="11155680" cy="1885778"/>
           </a:xfrm>
           <a:prstGeom prst="rect">
             <a:avLst/>
           </a:prstGeom>
         </p:spPr>
       </p:pic>
+      <p:sp>
+        <p:nvSpPr>
+          <p:cNvPr id="7" name="TextBox 6"/>
+          <p:cNvSpPr txBox="1"/>
+          <p:nvPr/>
+        </p:nvSpPr>
+        <p:spPr>
+          <a:xfrm>
+            <a:off x="640080" y="5760720"/>
+            <a:ext cx="10881360" cy="457200"/>
+          </a:xfrm>
+          <a:prstGeom prst="rect">
+            <a:avLst/>
+          </a:prstGeom>
+          <a:noFill/>
+        </p:spPr>
+        <p:txBody>
+          <a:bodyPr wrap="square" lIns="0" rIns="0" tIns="0" bIns="0">
+            <a:spAutoFit/>
+          </a:bodyPr>
+          <a:lstStyle/>
+          <a:p>
+            <a:pPr algn="ctr"/>
+            <a:r>
+              <a:rPr sz="1600" b="0" i="1">
+                <a:solidFill>
+                  <a:srgbClr val="0F172A"/>
+                </a:solidFill>
+                <a:latin typeface="Helvetica Neue"/>
+              </a:rPr>
+              <a:t>Someone else already spent millions teaching a model to read English. Your job is to point it at your problem, cheaply, and know where it breaks.</a:t>
+            </a:r>
+          </a:p>
+        </p:txBody>
+      </p:sp>
     </p:spTree>
   </p:cSld>
   <p:clrMapOvr>
@@ -7851,11 +8375,11 @@
             <a:r>
               <a:rPr sz="1250" b="1" i="0" spc="220">
                 <a:solidFill>
-                  <a:srgbClr val="E11D48"/>
-                </a:solidFill>
-                <a:latin typeface="Helvetica Neue"/>
-              </a:rPr>
-              <a:t>DISCUSSION</a:t>
+                  <a:srgbClr val="4F46E5"/>
+                </a:solidFill>
+                <a:latin typeface="Helvetica Neue"/>
+              </a:rPr>
+              <a:t>BEFORE WE OPEN IT UP</a:t>
             </a:r>
           </a:p>
         </p:txBody>
@@ -7890,7 +8414,7 @@
                 </a:solidFill>
                 <a:latin typeface="Helvetica Neue"/>
               </a:rPr>
-              <a:t>Last week, a model did this on its own.</a:t>
+              <a:t>What you actually saw tonight.</a:t>
             </a:r>
           </a:p>
         </p:txBody>
@@ -7925,7 +8449,7 @@
                 </a:solidFill>
                 <a:latin typeface="Helvetica Neue"/>
               </a:rPr>
-              <a:t>Not a thought experiment. This happened between the 16th and the 21st of July, six days ago.</a:t>
+              <a:t>Hold both columns in your head. We are about to need them.</a:t>
             </a:r>
           </a:p>
         </p:txBody>
@@ -7967,7 +8491,7 @@
       </p:sp>
       <p:pic>
         <p:nvPicPr>
-          <p:cNvPr id="6" name="Picture 5" descr="d_incident.png"/>
+          <p:cNvPr id="6" name="Picture 5" descr="d_saw.png"/>
           <p:cNvPicPr>
             <a:picLocks noChangeAspect="1"/>
           </p:cNvPicPr>
@@ -7981,49 +8505,14 @@
         </p:blipFill>
         <p:spPr>
           <a:xfrm>
-            <a:off x="518007" y="2056061"/>
-            <a:ext cx="11155680" cy="3934597"/>
+            <a:off x="518007" y="3252244"/>
+            <a:ext cx="11155680" cy="1862271"/>
           </a:xfrm>
           <a:prstGeom prst="rect">
             <a:avLst/>
           </a:prstGeom>
         </p:spPr>
       </p:pic>
-      <p:sp>
-        <p:nvSpPr>
-          <p:cNvPr id="7" name="TextBox 6"/>
-          <p:cNvSpPr txBox="1"/>
-          <p:nvPr/>
-        </p:nvSpPr>
-        <p:spPr>
-          <a:xfrm>
-            <a:off x="640080" y="6108192"/>
-            <a:ext cx="10881360" cy="365760"/>
-          </a:xfrm>
-          <a:prstGeom prst="rect">
-            <a:avLst/>
-          </a:prstGeom>
-          <a:noFill/>
-        </p:spPr>
-        <p:txBody>
-          <a:bodyPr wrap="square" lIns="0" rIns="0" tIns="0" bIns="0">
-            <a:spAutoFit/>
-          </a:bodyPr>
-          <a:lstStyle/>
-          <a:p>
-            <a:pPr algn="ctr"/>
-            <a:r>
-              <a:rPr sz="1100" b="0" i="0">
-                <a:solidFill>
-                  <a:srgbClr val="BCC1CC"/>
-                </a:solidFill>
-                <a:latin typeface="Helvetica Neue"/>
-              </a:rPr>
-              <a:t>Sources: OpenAI incident report - Hugging Face disclosure - CNBC, Axios, The Hacker News, 21-22 July 2026</a:t>
-            </a:r>
-          </a:p>
-        </p:txBody>
-      </p:sp>
     </p:spTree>
   </p:cSld>
   <p:clrMapOvr>
@@ -8033,6 +8522,223 @@
 </file>
 
 <file path=ppt/slides/slide18.xml><?xml version="1.0" encoding="utf-8"?>
+<p:sld xmlns:a="http://schemas.openxmlformats.org/drawingml/2006/main" xmlns:p="http://schemas.openxmlformats.org/presentationml/2006/main" xmlns:r="http://schemas.openxmlformats.org/officeDocument/2006/relationships">
+  <p:cSld>
+    <p:spTree>
+      <p:nvGrpSpPr>
+        <p:cNvPr id="1" name=""/>
+        <p:cNvGrpSpPr/>
+        <p:nvPr/>
+      </p:nvGrpSpPr>
+      <p:grpSpPr/>
+      <p:sp>
+        <p:nvSpPr>
+          <p:cNvPr id="2" name="TextBox 1"/>
+          <p:cNvSpPr txBox="1"/>
+          <p:nvPr/>
+        </p:nvSpPr>
+        <p:spPr>
+          <a:xfrm>
+            <a:off x="640080" y="457200"/>
+            <a:ext cx="6766560" cy="274320"/>
+          </a:xfrm>
+          <a:prstGeom prst="rect">
+            <a:avLst/>
+          </a:prstGeom>
+          <a:noFill/>
+        </p:spPr>
+        <p:txBody>
+          <a:bodyPr wrap="square" lIns="0" rIns="0" tIns="0" bIns="0">
+            <a:spAutoFit/>
+          </a:bodyPr>
+          <a:lstStyle/>
+          <a:p>
+            <a:pPr algn="l"/>
+            <a:r>
+              <a:rPr sz="1250" b="1" i="0" spc="220">
+                <a:solidFill>
+                  <a:srgbClr val="E11D48"/>
+                </a:solidFill>
+                <a:latin typeface="Helvetica Neue"/>
+              </a:rPr>
+              <a:t>DISCUSSION</a:t>
+            </a:r>
+          </a:p>
+        </p:txBody>
+      </p:sp>
+      <p:sp>
+        <p:nvSpPr>
+          <p:cNvPr id="3" name="TextBox 2"/>
+          <p:cNvSpPr txBox="1"/>
+          <p:nvPr/>
+        </p:nvSpPr>
+        <p:spPr>
+          <a:xfrm>
+            <a:off x="640080" y="758952"/>
+            <a:ext cx="10972800" cy="704088"/>
+          </a:xfrm>
+          <a:prstGeom prst="rect">
+            <a:avLst/>
+          </a:prstGeom>
+          <a:noFill/>
+        </p:spPr>
+        <p:txBody>
+          <a:bodyPr wrap="square" lIns="0" rIns="0" tIns="0" bIns="0">
+            <a:spAutoFit/>
+          </a:bodyPr>
+          <a:lstStyle/>
+          <a:p>
+            <a:pPr algn="l"/>
+            <a:r>
+              <a:rPr sz="2900" b="1" i="0">
+                <a:solidFill>
+                  <a:srgbClr val="0F172A"/>
+                </a:solidFill>
+                <a:latin typeface="Helvetica Neue"/>
+              </a:rPr>
+              <a:t>Last week, a model did this on its own.</a:t>
+            </a:r>
+          </a:p>
+        </p:txBody>
+      </p:sp>
+      <p:sp>
+        <p:nvSpPr>
+          <p:cNvPr id="4" name="TextBox 3"/>
+          <p:cNvSpPr txBox="1"/>
+          <p:nvPr/>
+        </p:nvSpPr>
+        <p:spPr>
+          <a:xfrm>
+            <a:off x="640080" y="1417320"/>
+            <a:ext cx="10424160" cy="457200"/>
+          </a:xfrm>
+          <a:prstGeom prst="rect">
+            <a:avLst/>
+          </a:prstGeom>
+          <a:noFill/>
+        </p:spPr>
+        <p:txBody>
+          <a:bodyPr wrap="square" lIns="0" rIns="0" tIns="0" bIns="0">
+            <a:spAutoFit/>
+          </a:bodyPr>
+          <a:lstStyle/>
+          <a:p>
+            <a:pPr algn="l"/>
+            <a:r>
+              <a:rPr sz="1500" b="0" i="0">
+                <a:solidFill>
+                  <a:srgbClr val="475569"/>
+                </a:solidFill>
+                <a:latin typeface="Helvetica Neue"/>
+              </a:rPr>
+              <a:t>Not a thought experiment. This happened between the 16th and the 21st of July, six days ago.</a:t>
+            </a:r>
+          </a:p>
+        </p:txBody>
+      </p:sp>
+      <p:sp>
+        <p:nvSpPr>
+          <p:cNvPr id="5" name="TextBox 4"/>
+          <p:cNvSpPr txBox="1"/>
+          <p:nvPr/>
+        </p:nvSpPr>
+        <p:spPr>
+          <a:xfrm>
+            <a:off x="640080" y="6492240"/>
+            <a:ext cx="8229600" cy="274320"/>
+          </a:xfrm>
+          <a:prstGeom prst="rect">
+            <a:avLst/>
+          </a:prstGeom>
+          <a:noFill/>
+        </p:spPr>
+        <p:txBody>
+          <a:bodyPr wrap="square" lIns="0" rIns="0" tIns="0" bIns="0">
+            <a:spAutoFit/>
+          </a:bodyPr>
+          <a:lstStyle/>
+          <a:p>
+            <a:pPr algn="l"/>
+            <a:r>
+              <a:rPr sz="900" b="0" i="0">
+                <a:solidFill>
+                  <a:srgbClr val="BCC1CC"/>
+                </a:solidFill>
+                <a:latin typeface="Helvetica Neue"/>
+              </a:rPr>
+              <a:t>ISBA 2411 · Natural Language Processing &amp; AI · Summer 2026</a:t>
+            </a:r>
+          </a:p>
+        </p:txBody>
+      </p:sp>
+      <p:pic>
+        <p:nvPicPr>
+          <p:cNvPr id="6" name="Picture 5" descr="d_incident.png"/>
+          <p:cNvPicPr>
+            <a:picLocks noChangeAspect="1"/>
+          </p:cNvPicPr>
+          <p:nvPr/>
+        </p:nvPicPr>
+        <p:blipFill>
+          <a:blip r:embed="rId2"/>
+          <a:stretch>
+            <a:fillRect/>
+          </a:stretch>
+        </p:blipFill>
+        <p:spPr>
+          <a:xfrm>
+            <a:off x="518007" y="2056061"/>
+            <a:ext cx="11155680" cy="3934597"/>
+          </a:xfrm>
+          <a:prstGeom prst="rect">
+            <a:avLst/>
+          </a:prstGeom>
+        </p:spPr>
+      </p:pic>
+      <p:sp>
+        <p:nvSpPr>
+          <p:cNvPr id="7" name="TextBox 6"/>
+          <p:cNvSpPr txBox="1"/>
+          <p:nvPr/>
+        </p:nvSpPr>
+        <p:spPr>
+          <a:xfrm>
+            <a:off x="640080" y="6108192"/>
+            <a:ext cx="10881360" cy="365760"/>
+          </a:xfrm>
+          <a:prstGeom prst="rect">
+            <a:avLst/>
+          </a:prstGeom>
+          <a:noFill/>
+        </p:spPr>
+        <p:txBody>
+          <a:bodyPr wrap="square" lIns="0" rIns="0" tIns="0" bIns="0">
+            <a:spAutoFit/>
+          </a:bodyPr>
+          <a:lstStyle/>
+          <a:p>
+            <a:pPr algn="ctr"/>
+            <a:r>
+              <a:rPr sz="1100" b="0" i="0">
+                <a:solidFill>
+                  <a:srgbClr val="BCC1CC"/>
+                </a:solidFill>
+                <a:latin typeface="Helvetica Neue"/>
+              </a:rPr>
+              <a:t>Sources: OpenAI incident report - Hugging Face disclosure - CNBC, Axios, The Hacker News, 21-22 July 2026</a:t>
+            </a:r>
+          </a:p>
+        </p:txBody>
+      </p:sp>
+    </p:spTree>
+  </p:cSld>
+  <p:clrMapOvr>
+    <a:masterClrMapping/>
+  </p:clrMapOvr>
+</p:sld>
+</file>
+
+<file path=ppt/slides/slide19.xml><?xml version="1.0" encoding="utf-8"?>
 <p:sld xmlns:a="http://schemas.openxmlformats.org/drawingml/2006/main" xmlns:p="http://schemas.openxmlformats.org/presentationml/2006/main" xmlns:r="http://schemas.openxmlformats.org/officeDocument/2006/relationships">
   <p:cSld>
     <p:spTree>
@@ -12207,11 +12913,11 @@
             <a:r>
               <a:rPr sz="1250" b="1" i="0" spc="220">
                 <a:solidFill>
-                  <a:srgbClr val="7C3AED"/>
-                </a:solidFill>
-                <a:latin typeface="Helvetica Neue"/>
-              </a:rPr>
-              <a:t>ROUTE</a:t>
+                  <a:srgbClr val="0EA5E9"/>
+                </a:solidFill>
+                <a:latin typeface="Helvetica Neue"/>
+              </a:rPr>
+              <a:t>RETRIEVE</a:t>
             </a:r>
           </a:p>
         </p:txBody>
@@ -12225,7 +12931,7 @@
         <p:spPr>
           <a:xfrm>
             <a:off x="640080" y="758952"/>
-            <a:ext cx="7680960" cy="1179576"/>
+            <a:ext cx="7680960" cy="704088"/>
           </a:xfrm>
           <a:prstGeom prst="rect">
             <a:avLst/>
@@ -12246,7 +12952,7 @@
                 </a:solidFill>
                 <a:latin typeface="Helvetica Neue"/>
               </a:rPr>
-              <a:t>Sort the inbox with no training data at all.</a:t>
+              <a:t>How the meaning gets in there.</a:t>
             </a:r>
           </a:p>
         </p:txBody>
@@ -12302,8 +13008,8 @@
         </p:nvSpPr>
         <p:spPr>
           <a:xfrm>
-            <a:off x="8586215" y="475488"/>
-            <a:ext cx="256032" cy="256032"/>
+            <a:off x="8549640" y="438912"/>
+            <a:ext cx="329184" cy="329184"/>
           </a:xfrm>
           <a:prstGeom prst="roundRect">
             <a:avLst>
@@ -12347,8 +13053,8 @@
         </p:nvSpPr>
         <p:spPr>
           <a:xfrm>
-            <a:off x="8531351" y="475488"/>
-            <a:ext cx="365760" cy="256032"/>
+            <a:off x="8494776" y="475488"/>
+            <a:ext cx="438912" cy="256032"/>
           </a:xfrm>
           <a:prstGeom prst="rect">
             <a:avLst/>
@@ -12363,7 +13069,7 @@
           <a:p>
             <a:pPr algn="ctr"/>
             <a:r>
-              <a:rPr sz="1050" b="1" i="0">
+              <a:rPr sz="1300" b="1" i="0">
                 <a:solidFill>
                   <a:srgbClr val="FFFFFF"/>
                 </a:solidFill>
@@ -12382,87 +13088,7 @@
         </p:nvSpPr>
         <p:spPr>
           <a:xfrm>
-            <a:off x="9208008" y="438912"/>
-            <a:ext cx="329184" cy="329184"/>
-          </a:xfrm>
-          <a:prstGeom prst="roundRect">
-            <a:avLst>
-              <a:gd name="adj" fmla="val 32000"/>
-            </a:avLst>
-          </a:prstGeom>
-          <a:solidFill>
-            <a:srgbClr val="D97706"/>
-          </a:solidFill>
-          <a:ln>
-            <a:noFill/>
-          </a:ln>
-        </p:spPr>
-        <p:style>
-          <a:lnRef idx="1">
-            <a:schemeClr val="accent1"/>
-          </a:lnRef>
-          <a:fillRef idx="3">
-            <a:schemeClr val="accent1"/>
-          </a:fillRef>
-          <a:effectRef idx="2">
-            <a:schemeClr val="accent1"/>
-          </a:effectRef>
-          <a:fontRef idx="minor">
-            <a:schemeClr val="lt1"/>
-          </a:fontRef>
-        </p:style>
-        <p:txBody>
-          <a:bodyPr rtlCol="0" anchor="ctr"/>
-          <a:lstStyle/>
-          <a:p>
-            <a:pPr algn="ctr"/>
-          </a:p>
-        </p:txBody>
-      </p:sp>
-      <p:sp>
-        <p:nvSpPr>
-          <p:cNvPr id="8" name="TextBox 7"/>
-          <p:cNvSpPr txBox="1"/>
-          <p:nvPr/>
-        </p:nvSpPr>
-        <p:spPr>
-          <a:xfrm>
-            <a:off x="9153144" y="475488"/>
-            <a:ext cx="438912" cy="256032"/>
-          </a:xfrm>
-          <a:prstGeom prst="rect">
-            <a:avLst/>
-          </a:prstGeom>
-          <a:noFill/>
-        </p:spPr>
-        <p:txBody>
-          <a:bodyPr wrap="square" lIns="0" rIns="0" tIns="0" bIns="0">
-            <a:spAutoFit/>
-          </a:bodyPr>
-          <a:lstStyle/>
-          <a:p>
-            <a:pPr algn="ctr"/>
-            <a:r>
-              <a:rPr sz="1300" b="1" i="0">
-                <a:solidFill>
-                  <a:srgbClr val="FFFFFF"/>
-                </a:solidFill>
-                <a:latin typeface="Helvetica Neue"/>
-              </a:rPr>
-              <a:t>2</a:t>
-            </a:r>
-          </a:p>
-        </p:txBody>
-      </p:sp>
-      <p:sp>
-        <p:nvSpPr>
-          <p:cNvPr id="9" name="Rounded Rectangle 8"/>
-          <p:cNvSpPr/>
-          <p:nvPr/>
-        </p:nvSpPr>
-        <p:spPr>
-          <a:xfrm>
-            <a:off x="9902951" y="475488"/>
+            <a:off x="9244584" y="475488"/>
             <a:ext cx="256032" cy="256032"/>
           </a:xfrm>
           <a:prstGeom prst="roundRect">
@@ -12501,13 +13127,13 @@
       </p:sp>
       <p:sp>
         <p:nvSpPr>
-          <p:cNvPr id="10" name="TextBox 9"/>
-          <p:cNvSpPr txBox="1"/>
-          <p:nvPr/>
-        </p:nvSpPr>
-        <p:spPr>
-          <a:xfrm>
-            <a:off x="9848087" y="475488"/>
+          <p:cNvPr id="8" name="TextBox 7"/>
+          <p:cNvSpPr txBox="1"/>
+          <p:nvPr/>
+        </p:nvSpPr>
+        <p:spPr>
+          <a:xfrm>
+            <a:off x="9189719" y="475488"/>
             <a:ext cx="365760" cy="256032"/>
           </a:xfrm>
           <a:prstGeom prst="rect">
@@ -12529,20 +13155,20 @@
                 </a:solidFill>
                 <a:latin typeface="Helvetica Neue"/>
               </a:rPr>
-              <a:t>3</a:t>
-            </a:r>
-          </a:p>
-        </p:txBody>
-      </p:sp>
-      <p:sp>
-        <p:nvSpPr>
-          <p:cNvPr id="11" name="Rounded Rectangle 10"/>
+              <a:t>2</a:t>
+            </a:r>
+          </a:p>
+        </p:txBody>
+      </p:sp>
+      <p:sp>
+        <p:nvSpPr>
+          <p:cNvPr id="9" name="Rounded Rectangle 8"/>
           <p:cNvSpPr/>
           <p:nvPr/>
         </p:nvSpPr>
         <p:spPr>
           <a:xfrm>
-            <a:off x="10561319" y="475488"/>
+            <a:off x="9902951" y="475488"/>
             <a:ext cx="256032" cy="256032"/>
           </a:xfrm>
           <a:prstGeom prst="roundRect">
@@ -12581,6 +13207,86 @@
       </p:sp>
       <p:sp>
         <p:nvSpPr>
+          <p:cNvPr id="10" name="TextBox 9"/>
+          <p:cNvSpPr txBox="1"/>
+          <p:nvPr/>
+        </p:nvSpPr>
+        <p:spPr>
+          <a:xfrm>
+            <a:off x="9848087" y="475488"/>
+            <a:ext cx="365760" cy="256032"/>
+          </a:xfrm>
+          <a:prstGeom prst="rect">
+            <a:avLst/>
+          </a:prstGeom>
+          <a:noFill/>
+        </p:spPr>
+        <p:txBody>
+          <a:bodyPr wrap="square" lIns="0" rIns="0" tIns="0" bIns="0">
+            <a:spAutoFit/>
+          </a:bodyPr>
+          <a:lstStyle/>
+          <a:p>
+            <a:pPr algn="ctr"/>
+            <a:r>
+              <a:rPr sz="1050" b="1" i="0">
+                <a:solidFill>
+                  <a:srgbClr val="AEB4BF"/>
+                </a:solidFill>
+                <a:latin typeface="Helvetica Neue"/>
+              </a:rPr>
+              <a:t>3</a:t>
+            </a:r>
+          </a:p>
+        </p:txBody>
+      </p:sp>
+      <p:sp>
+        <p:nvSpPr>
+          <p:cNvPr id="11" name="Rounded Rectangle 10"/>
+          <p:cNvSpPr/>
+          <p:nvPr/>
+        </p:nvSpPr>
+        <p:spPr>
+          <a:xfrm>
+            <a:off x="10561319" y="475488"/>
+            <a:ext cx="256032" cy="256032"/>
+          </a:xfrm>
+          <a:prstGeom prst="roundRect">
+            <a:avLst>
+              <a:gd name="adj" fmla="val 32000"/>
+            </a:avLst>
+          </a:prstGeom>
+          <a:solidFill>
+            <a:srgbClr val="E9EBF0"/>
+          </a:solidFill>
+          <a:ln>
+            <a:noFill/>
+          </a:ln>
+        </p:spPr>
+        <p:style>
+          <a:lnRef idx="1">
+            <a:schemeClr val="accent1"/>
+          </a:lnRef>
+          <a:fillRef idx="3">
+            <a:schemeClr val="accent1"/>
+          </a:fillRef>
+          <a:effectRef idx="2">
+            <a:schemeClr val="accent1"/>
+          </a:effectRef>
+          <a:fontRef idx="minor">
+            <a:schemeClr val="lt1"/>
+          </a:fontRef>
+        </p:style>
+        <p:txBody>
+          <a:bodyPr rtlCol="0" anchor="ctr"/>
+          <a:lstStyle/>
+          <a:p>
+            <a:pPr algn="ctr"/>
+          </a:p>
+        </p:txBody>
+      </p:sp>
+      <p:sp>
+        <p:nvSpPr>
           <p:cNvPr id="12" name="TextBox 11"/>
           <p:cNvSpPr txBox="1"/>
           <p:nvPr/>
@@ -12651,7 +13357,7 @@
       </p:sp>
       <p:pic>
         <p:nvPicPr>
-          <p:cNvPr id="14" name="Picture 13" descr="d_zs.png"/>
+          <p:cNvPr id="14" name="Picture 13" descr="fig_blockflow.png"/>
           <p:cNvPicPr>
             <a:picLocks noChangeAspect="1"/>
           </p:cNvPicPr>
@@ -12665,8 +13371,8 @@
         </p:blipFill>
         <p:spPr>
           <a:xfrm>
-            <a:off x="1473370" y="1965960"/>
-            <a:ext cx="9244954" cy="4297679"/>
+            <a:off x="621096" y="1632204"/>
+            <a:ext cx="10949502" cy="4315968"/>
           </a:xfrm>
           <a:prstGeom prst="rect">
             <a:avLst/>
@@ -12675,14 +13381,49 @@
       </p:pic>
       <p:sp>
         <p:nvSpPr>
-          <p:cNvPr id="15" name="Rounded Rectangle 14"/>
+          <p:cNvPr id="15" name="TextBox 14"/>
+          <p:cNvSpPr txBox="1"/>
+          <p:nvPr/>
+        </p:nvSpPr>
+        <p:spPr>
+          <a:xfrm>
+            <a:off x="640080" y="6035040"/>
+            <a:ext cx="10881360" cy="320040"/>
+          </a:xfrm>
+          <a:prstGeom prst="rect">
+            <a:avLst/>
+          </a:prstGeom>
+          <a:noFill/>
+        </p:spPr>
+        <p:txBody>
+          <a:bodyPr wrap="square" lIns="0" rIns="0" tIns="0" bIns="0">
+            <a:spAutoFit/>
+          </a:bodyPr>
+          <a:lstStyle/>
+          <a:p>
+            <a:pPr algn="ctr"/>
+            <a:r>
+              <a:rPr sz="1500" b="0" i="1">
+                <a:solidFill>
+                  <a:srgbClr val="475569"/>
+                </a:solidFill>
+                <a:latin typeface="Helvetica Neue"/>
+              </a:rPr>
+              <a:t>You built this in Lecture 11. Tonight you only need the shape of it.</a:t>
+            </a:r>
+          </a:p>
+        </p:txBody>
+      </p:sp>
+      <p:sp>
+        <p:nvSpPr>
+          <p:cNvPr id="16" name="Rounded Rectangle 15"/>
           <p:cNvSpPr/>
           <p:nvPr/>
         </p:nvSpPr>
         <p:spPr>
           <a:xfrm>
-            <a:off x="6505041" y="6345936"/>
-            <a:ext cx="5046573" cy="365760"/>
+            <a:off x="7105802" y="6345936"/>
+            <a:ext cx="4445812" cy="365760"/>
           </a:xfrm>
           <a:prstGeom prst="roundRect">
             <a:avLst>
@@ -12720,14 +13461,14 @@
       </p:sp>
       <p:sp>
         <p:nvSpPr>
-          <p:cNvPr id="16" name="Rounded Rectangle 15"/>
+          <p:cNvPr id="17" name="Rounded Rectangle 16"/>
           <p:cNvSpPr/>
           <p:nvPr/>
         </p:nvSpPr>
         <p:spPr>
           <a:xfrm>
-            <a:off x="7547457" y="6396228"/>
-            <a:ext cx="754380" cy="265176"/>
+            <a:off x="8148218" y="6396228"/>
+            <a:ext cx="685800" cy="265176"/>
           </a:xfrm>
           <a:prstGeom prst="roundRect">
             <a:avLst>
@@ -12765,13 +13506,13 @@
       </p:sp>
       <p:sp>
         <p:nvSpPr>
-          <p:cNvPr id="17" name="TextBox 16"/>
-          <p:cNvSpPr txBox="1"/>
-          <p:nvPr/>
-        </p:nvSpPr>
-        <p:spPr>
-          <a:xfrm>
-            <a:off x="6660489" y="6460236"/>
+          <p:cNvPr id="18" name="TextBox 17"/>
+          <p:cNvSpPr txBox="1"/>
+          <p:nvPr/>
+        </p:nvSpPr>
+        <p:spPr>
+          <a:xfrm>
+            <a:off x="7261250" y="6460236"/>
             <a:ext cx="914400" cy="219456"/>
           </a:xfrm>
           <a:prstGeom prst="rect">
@@ -12800,14 +13541,14 @@
       </p:sp>
       <p:sp>
         <p:nvSpPr>
-          <p:cNvPr id="18" name="TextBox 17"/>
-          <p:cNvSpPr txBox="1"/>
-          <p:nvPr/>
-        </p:nvSpPr>
-        <p:spPr>
-          <a:xfrm>
-            <a:off x="7547457" y="6451092"/>
-            <a:ext cx="754380" cy="219456"/>
+          <p:cNvPr id="19" name="TextBox 18"/>
+          <p:cNvSpPr txBox="1"/>
+          <p:nvPr/>
+        </p:nvSpPr>
+        <p:spPr>
+          <a:xfrm>
+            <a:off x="8148218" y="6451092"/>
+            <a:ext cx="685800" cy="219456"/>
           </a:xfrm>
           <a:prstGeom prst="rect">
             <a:avLst/>
@@ -12828,21 +13569,21 @@
                 </a:solidFill>
                 <a:latin typeface="Helvetica Neue"/>
               </a:rPr>
-              <a:t>STEP 13</a:t>
-            </a:r>
-          </a:p>
-        </p:txBody>
-      </p:sp>
-      <p:sp>
-        <p:nvSpPr>
-          <p:cNvPr id="19" name="TextBox 18"/>
-          <p:cNvSpPr txBox="1"/>
-          <p:nvPr/>
-        </p:nvSpPr>
-        <p:spPr>
-          <a:xfrm>
-            <a:off x="8420709" y="6460236"/>
-            <a:ext cx="3030321" cy="219456"/>
+              <a:t>STEP 9</a:t>
+            </a:r>
+          </a:p>
+        </p:txBody>
+      </p:sp>
+      <p:sp>
+        <p:nvSpPr>
+          <p:cNvPr id="20" name="TextBox 19"/>
+          <p:cNvSpPr txBox="1"/>
+          <p:nvPr/>
+        </p:nvSpPr>
+        <p:spPr>
+          <a:xfrm>
+            <a:off x="8952890" y="6460236"/>
+            <a:ext cx="2498140" cy="219456"/>
           </a:xfrm>
           <a:prstGeom prst="rect">
             <a:avLst/>
@@ -12863,7 +13604,7 @@
                 </a:solidFill>
                 <a:latin typeface="Helvetica Neue"/>
               </a:rPr>
-              <a:t>Route the inbox with no training data</a:t>
+              <a:t>Watch attention change a word</a:t>
             </a:r>
           </a:p>
         </p:txBody>

--- a/Week 7/L13_Support_Copilot_v3_discussion.pptx
+++ b/Week 7/L13_Support_Copilot_v3_discussion.pptx
@@ -13371,8 +13371,8 @@
         </p:blipFill>
         <p:spPr>
           <a:xfrm>
-            <a:off x="621096" y="1632204"/>
-            <a:ext cx="10949502" cy="4315968"/>
+            <a:off x="607178" y="1632204"/>
+            <a:ext cx="10977337" cy="4315968"/>
           </a:xfrm>
           <a:prstGeom prst="rect">
             <a:avLst/>

--- a/Week 7/L13_Support_Copilot_v3_discussion.pptx
+++ b/Week 7/L13_Support_Copilot_v3_discussion.pptx
@@ -13388,28 +13388,38 @@
         <p:spPr>
           <a:xfrm>
             <a:off x="640080" y="6035040"/>
-            <a:ext cx="10881360" cy="320040"/>
-          </a:xfrm>
-          <a:prstGeom prst="rect">
-            <a:avLst/>
-          </a:prstGeom>
-          <a:noFill/>
-        </p:spPr>
-        <p:txBody>
-          <a:bodyPr wrap="square" lIns="0" rIns="0" tIns="0" bIns="0">
+            <a:ext cx="10881360" cy="310896"/>
+          </a:xfrm>
+          <a:prstGeom prst="rect">
+            <a:avLst/>
+          </a:prstGeom>
+          <a:noFill/>
+        </p:spPr>
+        <p:txBody>
+          <a:bodyPr wrap="square">
             <a:spAutoFit/>
           </a:bodyPr>
           <a:lstStyle/>
           <a:p>
             <a:pPr algn="ctr"/>
             <a:r>
-              <a:rPr sz="1500" b="0" i="1">
+              <a:rPr sz="1350" i="1">
                 <a:solidFill>
                   <a:srgbClr val="475569"/>
                 </a:solidFill>
                 <a:latin typeface="Helvetica Neue"/>
               </a:rPr>
-              <a:t>You built this in Lecture 11. Tonight you only need the shape of it.</a:t>
+              <a:t>You built this in Lecture 11.     Go deeper:  </a:t>
+            </a:r>
+            <a:r>
+              <a:rPr sz="1350" b="1" u="sng">
+                <a:solidFill>
+                  <a:srgbClr val="1D4ED8"/>
+                </a:solidFill>
+                <a:latin typeface="Helvetica Neue"/>
+                <a:hlinkClick r:id="rId3"/>
+              </a:rPr>
+              <a:t>3Blue1Brown, Attention in transformers (26 min)</a:t>
             </a:r>
           </a:p>
         </p:txBody>

--- a/Week 7/L13_Support_Copilot_v3_discussion.pptx
+++ b/Week 7/L13_Support_Copilot_v3_discussion.pptx
@@ -23,7 +23,6 @@
     <p:sldId id="271" r:id="rId22"/>
     <p:sldId id="272" r:id="rId23"/>
     <p:sldId id="273" r:id="rId24"/>
-    <p:sldId id="274" r:id="rId25"/>
   </p:sldIdLst>
   <p:sldSz cx="12191695" cy="6858000" type="screen4x3"/>
   <p:notesSz cx="6858000" cy="9144000"/>
@@ -3736,7 +3735,7 @@
         <p:spPr>
           <a:xfrm>
             <a:off x="640080" y="758952"/>
-            <a:ext cx="7680960" cy="1179576"/>
+            <a:ext cx="7680960" cy="704088"/>
           </a:xfrm>
           <a:prstGeom prst="rect">
             <a:avLst/>
@@ -3751,20 +3750,55 @@
           <a:p>
             <a:pPr algn="l"/>
             <a:r>
-              <a:rPr sz="2900" b="1" i="0">
+              <a:rPr sz="2450" b="1" i="0">
                 <a:solidFill>
                   <a:srgbClr val="0F172A"/>
                 </a:solidFill>
                 <a:latin typeface="Helvetica Neue"/>
               </a:rPr>
-              <a:t>Sort the inbox with no training data at all.</a:t>
-            </a:r>
-          </a:p>
-        </p:txBody>
-      </p:sp>
-      <p:sp>
-        <p:nvSpPr>
-          <p:cNvPr id="4" name="Rounded Rectangle 3"/>
+              <a:t>It is not a classifier. It is a fact-checker.</a:t>
+            </a:r>
+          </a:p>
+        </p:txBody>
+      </p:sp>
+      <p:sp>
+        <p:nvSpPr>
+          <p:cNvPr id="4" name="TextBox 3"/>
+          <p:cNvSpPr txBox="1"/>
+          <p:nvPr/>
+        </p:nvSpPr>
+        <p:spPr>
+          <a:xfrm>
+            <a:off x="640080" y="1417320"/>
+            <a:ext cx="10424160" cy="457200"/>
+          </a:xfrm>
+          <a:prstGeom prst="rect">
+            <a:avLst/>
+          </a:prstGeom>
+          <a:noFill/>
+        </p:spPr>
+        <p:txBody>
+          <a:bodyPr wrap="square" lIns="0" rIns="0" tIns="0" bIns="0">
+            <a:spAutoFit/>
+          </a:bodyPr>
+          <a:lstStyle/>
+          <a:p>
+            <a:pPr algn="l"/>
+            <a:r>
+              <a:rPr sz="1500" b="0" i="0">
+                <a:solidFill>
+                  <a:srgbClr val="475569"/>
+                </a:solidFill>
+                <a:latin typeface="Helvetica Neue"/>
+              </a:rPr>
+              <a:t>The model judges whether a sentence YOU wrote is true of the ticket.</a:t>
+            </a:r>
+          </a:p>
+        </p:txBody>
+      </p:sp>
+      <p:sp>
+        <p:nvSpPr>
+          <p:cNvPr id="5" name="Rounded Rectangle 4"/>
           <p:cNvSpPr/>
           <p:nvPr/>
         </p:nvSpPr>
@@ -3807,7 +3841,7 @@
       </p:sp>
       <p:sp>
         <p:nvSpPr>
-          <p:cNvPr id="5" name="Rounded Rectangle 4"/>
+          <p:cNvPr id="6" name="Rounded Rectangle 5"/>
           <p:cNvSpPr/>
           <p:nvPr/>
         </p:nvSpPr>
@@ -3852,7 +3886,7 @@
       </p:sp>
       <p:sp>
         <p:nvSpPr>
-          <p:cNvPr id="6" name="TextBox 5"/>
+          <p:cNvPr id="7" name="TextBox 6"/>
           <p:cNvSpPr txBox="1"/>
           <p:nvPr/>
         </p:nvSpPr>
@@ -3887,7 +3921,7 @@
       </p:sp>
       <p:sp>
         <p:nvSpPr>
-          <p:cNvPr id="7" name="Rounded Rectangle 6"/>
+          <p:cNvPr id="8" name="Rounded Rectangle 7"/>
           <p:cNvSpPr/>
           <p:nvPr/>
         </p:nvSpPr>
@@ -3932,7 +3966,7 @@
       </p:sp>
       <p:sp>
         <p:nvSpPr>
-          <p:cNvPr id="8" name="TextBox 7"/>
+          <p:cNvPr id="9" name="TextBox 8"/>
           <p:cNvSpPr txBox="1"/>
           <p:nvPr/>
         </p:nvSpPr>
@@ -3967,7 +4001,7 @@
       </p:sp>
       <p:sp>
         <p:nvSpPr>
-          <p:cNvPr id="9" name="Rounded Rectangle 8"/>
+          <p:cNvPr id="10" name="Rounded Rectangle 9"/>
           <p:cNvSpPr/>
           <p:nvPr/>
         </p:nvSpPr>
@@ -4012,7 +4046,7 @@
       </p:sp>
       <p:sp>
         <p:nvSpPr>
-          <p:cNvPr id="10" name="TextBox 9"/>
+          <p:cNvPr id="11" name="TextBox 10"/>
           <p:cNvSpPr txBox="1"/>
           <p:nvPr/>
         </p:nvSpPr>
@@ -4047,7 +4081,7 @@
       </p:sp>
       <p:sp>
         <p:nvSpPr>
-          <p:cNvPr id="11" name="Rounded Rectangle 10"/>
+          <p:cNvPr id="12" name="Rounded Rectangle 11"/>
           <p:cNvSpPr/>
           <p:nvPr/>
         </p:nvSpPr>
@@ -4092,7 +4126,7 @@
       </p:sp>
       <p:sp>
         <p:nvSpPr>
-          <p:cNvPr id="12" name="TextBox 11"/>
+          <p:cNvPr id="13" name="TextBox 12"/>
           <p:cNvSpPr txBox="1"/>
           <p:nvPr/>
         </p:nvSpPr>
@@ -4127,7 +4161,7 @@
       </p:sp>
       <p:sp>
         <p:nvSpPr>
-          <p:cNvPr id="13" name="TextBox 12"/>
+          <p:cNvPr id="14" name="TextBox 13"/>
           <p:cNvSpPr txBox="1"/>
           <p:nvPr/>
         </p:nvSpPr>
@@ -4162,7 +4196,7 @@
       </p:sp>
       <p:pic>
         <p:nvPicPr>
-          <p:cNvPr id="14" name="Picture 13" descr="d_zs.png"/>
+          <p:cNvPr id="15" name="Picture 14" descr="d_nli.png"/>
           <p:cNvPicPr>
             <a:picLocks noChangeAspect="1"/>
           </p:cNvPicPr>
@@ -4176,8 +4210,8 @@
         </p:blipFill>
         <p:spPr>
           <a:xfrm>
-            <a:off x="1473370" y="1965960"/>
-            <a:ext cx="9244954" cy="4297679"/>
+            <a:off x="518007" y="2596680"/>
+            <a:ext cx="11155680" cy="2350438"/>
           </a:xfrm>
           <a:prstGeom prst="rect">
             <a:avLst/>
@@ -4186,14 +4220,14 @@
       </p:pic>
       <p:sp>
         <p:nvSpPr>
-          <p:cNvPr id="15" name="Rounded Rectangle 14"/>
+          <p:cNvPr id="16" name="Rounded Rectangle 15"/>
           <p:cNvSpPr/>
           <p:nvPr/>
         </p:nvSpPr>
         <p:spPr>
           <a:xfrm>
-            <a:off x="6505041" y="6345936"/>
-            <a:ext cx="5046573" cy="365760"/>
+            <a:off x="7306056" y="6345936"/>
+            <a:ext cx="4245559" cy="365760"/>
           </a:xfrm>
           <a:prstGeom prst="roundRect">
             <a:avLst>
@@ -4231,13 +4265,13 @@
       </p:sp>
       <p:sp>
         <p:nvSpPr>
-          <p:cNvPr id="16" name="Rounded Rectangle 15"/>
+          <p:cNvPr id="17" name="Rounded Rectangle 16"/>
           <p:cNvSpPr/>
           <p:nvPr/>
         </p:nvSpPr>
         <p:spPr>
           <a:xfrm>
-            <a:off x="7547457" y="6396228"/>
+            <a:off x="8348472" y="6396228"/>
             <a:ext cx="754380" cy="265176"/>
           </a:xfrm>
           <a:prstGeom prst="roundRect">
@@ -4276,13 +4310,13 @@
       </p:sp>
       <p:sp>
         <p:nvSpPr>
-          <p:cNvPr id="17" name="TextBox 16"/>
-          <p:cNvSpPr txBox="1"/>
-          <p:nvPr/>
-        </p:nvSpPr>
-        <p:spPr>
-          <a:xfrm>
-            <a:off x="6660489" y="6460236"/>
+          <p:cNvPr id="18" name="TextBox 17"/>
+          <p:cNvSpPr txBox="1"/>
+          <p:nvPr/>
+        </p:nvSpPr>
+        <p:spPr>
+          <a:xfrm>
+            <a:off x="7461504" y="6460236"/>
             <a:ext cx="914400" cy="219456"/>
           </a:xfrm>
           <a:prstGeom prst="rect">
@@ -4311,13 +4345,13 @@
       </p:sp>
       <p:sp>
         <p:nvSpPr>
-          <p:cNvPr id="18" name="TextBox 17"/>
-          <p:cNvSpPr txBox="1"/>
-          <p:nvPr/>
-        </p:nvSpPr>
-        <p:spPr>
-          <a:xfrm>
-            <a:off x="7547457" y="6451092"/>
+          <p:cNvPr id="19" name="TextBox 18"/>
+          <p:cNvSpPr txBox="1"/>
+          <p:nvPr/>
+        </p:nvSpPr>
+        <p:spPr>
+          <a:xfrm>
+            <a:off x="8348472" y="6451092"/>
             <a:ext cx="754380" cy="219456"/>
           </a:xfrm>
           <a:prstGeom prst="rect">
@@ -4339,21 +4373,21 @@
                 </a:solidFill>
                 <a:latin typeface="Helvetica Neue"/>
               </a:rPr>
-              <a:t>STEP 13</a:t>
-            </a:r>
-          </a:p>
-        </p:txBody>
-      </p:sp>
-      <p:sp>
-        <p:nvSpPr>
-          <p:cNvPr id="19" name="TextBox 18"/>
-          <p:cNvSpPr txBox="1"/>
-          <p:nvPr/>
-        </p:nvSpPr>
-        <p:spPr>
-          <a:xfrm>
-            <a:off x="8420709" y="6460236"/>
-            <a:ext cx="3030321" cy="219456"/>
+              <a:t>STEP 17</a:t>
+            </a:r>
+          </a:p>
+        </p:txBody>
+      </p:sp>
+      <p:sp>
+        <p:nvSpPr>
+          <p:cNvPr id="20" name="TextBox 19"/>
+          <p:cNvSpPr txBox="1"/>
+          <p:nvPr/>
+        </p:nvSpPr>
+        <p:spPr>
+          <a:xfrm>
+            <a:off x="9221724" y="6460236"/>
+            <a:ext cx="2229307" cy="219456"/>
           </a:xfrm>
           <a:prstGeom prst="rect">
             <a:avLst/>
@@ -4374,7 +4408,42 @@
                 </a:solidFill>
                 <a:latin typeface="Helvetica Neue"/>
               </a:rPr>
-              <a:t>Route the inbox with no training data</a:t>
+              <a:t>See the entailment scores</a:t>
+            </a:r>
+          </a:p>
+        </p:txBody>
+      </p:sp>
+      <p:sp>
+        <p:nvSpPr>
+          <p:cNvPr id="21" name="TextBox 20"/>
+          <p:cNvSpPr txBox="1"/>
+          <p:nvPr/>
+        </p:nvSpPr>
+        <p:spPr>
+          <a:xfrm>
+            <a:off x="640080" y="5532120"/>
+            <a:ext cx="10881360" cy="640080"/>
+          </a:xfrm>
+          <a:prstGeom prst="rect">
+            <a:avLst/>
+          </a:prstGeom>
+          <a:noFill/>
+        </p:spPr>
+        <p:txBody>
+          <a:bodyPr wrap="square" lIns="0" rIns="0" tIns="0" bIns="0">
+            <a:spAutoFit/>
+          </a:bodyPr>
+          <a:lstStyle/>
+          <a:p>
+            <a:pPr algn="ctr"/>
+            <a:r>
+              <a:rPr sz="1500" b="0" i="1">
+                <a:solidFill>
+                  <a:srgbClr val="475569"/>
+                </a:solidFill>
+                <a:latin typeface="Helvetica Neue"/>
+              </a:rPr>
+              <a:t>Every category becomes a sentence: "This example is {your description}." The model scores all eight and picks whichever it most believes.</a:t>
             </a:r>
           </a:p>
         </p:txBody>
@@ -4441,7 +4510,7 @@
         <p:spPr>
           <a:xfrm>
             <a:off x="640080" y="758952"/>
-            <a:ext cx="7680960" cy="704088"/>
+            <a:ext cx="7680960" cy="1179576"/>
           </a:xfrm>
           <a:prstGeom prst="rect">
             <a:avLst/>
@@ -4456,55 +4525,20 @@
           <a:p>
             <a:pPr algn="l"/>
             <a:r>
-              <a:rPr sz="2450" b="1" i="0">
+              <a:rPr sz="2900" b="1" i="0">
                 <a:solidFill>
                   <a:srgbClr val="0F172A"/>
                 </a:solidFill>
                 <a:latin typeface="Helvetica Neue"/>
               </a:rPr>
-              <a:t>It is not a classifier. It is a fact-checker.</a:t>
-            </a:r>
-          </a:p>
-        </p:txBody>
-      </p:sp>
-      <p:sp>
-        <p:nvSpPr>
-          <p:cNvPr id="4" name="TextBox 3"/>
-          <p:cNvSpPr txBox="1"/>
-          <p:nvPr/>
-        </p:nvSpPr>
-        <p:spPr>
-          <a:xfrm>
-            <a:off x="640080" y="1417320"/>
-            <a:ext cx="10424160" cy="457200"/>
-          </a:xfrm>
-          <a:prstGeom prst="rect">
-            <a:avLst/>
-          </a:prstGeom>
-          <a:noFill/>
-        </p:spPr>
-        <p:txBody>
-          <a:bodyPr wrap="square" lIns="0" rIns="0" tIns="0" bIns="0">
-            <a:spAutoFit/>
-          </a:bodyPr>
-          <a:lstStyle/>
-          <a:p>
-            <a:pPr algn="l"/>
-            <a:r>
-              <a:rPr sz="1500" b="0" i="0">
-                <a:solidFill>
-                  <a:srgbClr val="475569"/>
-                </a:solidFill>
-                <a:latin typeface="Helvetica Neue"/>
-              </a:rPr>
-              <a:t>The model judges whether a sentence YOU wrote is true of the ticket.</a:t>
-            </a:r>
-          </a:p>
-        </p:txBody>
-      </p:sp>
-      <p:sp>
-        <p:nvSpPr>
-          <p:cNvPr id="5" name="Rounded Rectangle 4"/>
+              <a:t>The descriptions you write ARE the program.</a:t>
+            </a:r>
+          </a:p>
+        </p:txBody>
+      </p:sp>
+      <p:sp>
+        <p:nvSpPr>
+          <p:cNvPr id="4" name="Rounded Rectangle 3"/>
           <p:cNvSpPr/>
           <p:nvPr/>
         </p:nvSpPr>
@@ -4547,7 +4581,7 @@
       </p:sp>
       <p:sp>
         <p:nvSpPr>
-          <p:cNvPr id="6" name="Rounded Rectangle 5"/>
+          <p:cNvPr id="5" name="Rounded Rectangle 4"/>
           <p:cNvSpPr/>
           <p:nvPr/>
         </p:nvSpPr>
@@ -4592,7 +4626,7 @@
       </p:sp>
       <p:sp>
         <p:nvSpPr>
-          <p:cNvPr id="7" name="TextBox 6"/>
+          <p:cNvPr id="6" name="TextBox 5"/>
           <p:cNvSpPr txBox="1"/>
           <p:nvPr/>
         </p:nvSpPr>
@@ -4627,7 +4661,7 @@
       </p:sp>
       <p:sp>
         <p:nvSpPr>
-          <p:cNvPr id="8" name="Rounded Rectangle 7"/>
+          <p:cNvPr id="7" name="Rounded Rectangle 6"/>
           <p:cNvSpPr/>
           <p:nvPr/>
         </p:nvSpPr>
@@ -4672,7 +4706,7 @@
       </p:sp>
       <p:sp>
         <p:nvSpPr>
-          <p:cNvPr id="9" name="TextBox 8"/>
+          <p:cNvPr id="8" name="TextBox 7"/>
           <p:cNvSpPr txBox="1"/>
           <p:nvPr/>
         </p:nvSpPr>
@@ -4707,7 +4741,7 @@
       </p:sp>
       <p:sp>
         <p:nvSpPr>
-          <p:cNvPr id="10" name="Rounded Rectangle 9"/>
+          <p:cNvPr id="9" name="Rounded Rectangle 8"/>
           <p:cNvSpPr/>
           <p:nvPr/>
         </p:nvSpPr>
@@ -4752,7 +4786,7 @@
       </p:sp>
       <p:sp>
         <p:nvSpPr>
-          <p:cNvPr id="11" name="TextBox 10"/>
+          <p:cNvPr id="10" name="TextBox 9"/>
           <p:cNvSpPr txBox="1"/>
           <p:nvPr/>
         </p:nvSpPr>
@@ -4787,7 +4821,7 @@
       </p:sp>
       <p:sp>
         <p:nvSpPr>
-          <p:cNvPr id="12" name="Rounded Rectangle 11"/>
+          <p:cNvPr id="11" name="Rounded Rectangle 10"/>
           <p:cNvSpPr/>
           <p:nvPr/>
         </p:nvSpPr>
@@ -4832,7 +4866,7 @@
       </p:sp>
       <p:sp>
         <p:nvSpPr>
-          <p:cNvPr id="13" name="TextBox 12"/>
+          <p:cNvPr id="12" name="TextBox 11"/>
           <p:cNvSpPr txBox="1"/>
           <p:nvPr/>
         </p:nvSpPr>
@@ -4867,7 +4901,7 @@
       </p:sp>
       <p:sp>
         <p:nvSpPr>
-          <p:cNvPr id="14" name="TextBox 13"/>
+          <p:cNvPr id="13" name="TextBox 12"/>
           <p:cNvSpPr txBox="1"/>
           <p:nvPr/>
         </p:nvSpPr>
@@ -4902,7 +4936,7 @@
       </p:sp>
       <p:pic>
         <p:nvPicPr>
-          <p:cNvPr id="15" name="Picture 14" descr="d_nli.png"/>
+          <p:cNvPr id="14" name="Picture 13" descr="d_wording.png"/>
           <p:cNvPicPr>
             <a:picLocks noChangeAspect="1"/>
           </p:cNvPicPr>
@@ -4916,8 +4950,8 @@
         </p:blipFill>
         <p:spPr>
           <a:xfrm>
-            <a:off x="518007" y="2596680"/>
-            <a:ext cx="11155680" cy="2350438"/>
+            <a:off x="518007" y="2769342"/>
+            <a:ext cx="11155680" cy="2599474"/>
           </a:xfrm>
           <a:prstGeom prst="rect">
             <a:avLst/>
@@ -4926,14 +4960,14 @@
       </p:pic>
       <p:sp>
         <p:nvSpPr>
-          <p:cNvPr id="16" name="Rounded Rectangle 15"/>
+          <p:cNvPr id="15" name="Rounded Rectangle 14"/>
           <p:cNvSpPr/>
           <p:nvPr/>
         </p:nvSpPr>
         <p:spPr>
           <a:xfrm>
-            <a:off x="7306056" y="6345936"/>
-            <a:ext cx="4245559" cy="365760"/>
+            <a:off x="6638544" y="6345936"/>
+            <a:ext cx="4913071" cy="365760"/>
           </a:xfrm>
           <a:prstGeom prst="roundRect">
             <a:avLst>
@@ -4971,13 +5005,13 @@
       </p:sp>
       <p:sp>
         <p:nvSpPr>
-          <p:cNvPr id="17" name="Rounded Rectangle 16"/>
+          <p:cNvPr id="16" name="Rounded Rectangle 15"/>
           <p:cNvSpPr/>
           <p:nvPr/>
         </p:nvSpPr>
         <p:spPr>
           <a:xfrm>
-            <a:off x="8348472" y="6396228"/>
+            <a:off x="7680960" y="6396228"/>
             <a:ext cx="754380" cy="265176"/>
           </a:xfrm>
           <a:prstGeom prst="roundRect">
@@ -5016,14 +5050,49 @@
       </p:sp>
       <p:sp>
         <p:nvSpPr>
+          <p:cNvPr id="17" name="TextBox 16"/>
+          <p:cNvSpPr txBox="1"/>
+          <p:nvPr/>
+        </p:nvSpPr>
+        <p:spPr>
+          <a:xfrm>
+            <a:off x="6793992" y="6460236"/>
+            <a:ext cx="914400" cy="219456"/>
+          </a:xfrm>
+          <a:prstGeom prst="rect">
+            <a:avLst/>
+          </a:prstGeom>
+          <a:noFill/>
+        </p:spPr>
+        <p:txBody>
+          <a:bodyPr wrap="none" lIns="0" rIns="0" tIns="0" bIns="0">
+            <a:spAutoFit/>
+          </a:bodyPr>
+          <a:lstStyle/>
+          <a:p>
+            <a:pPr algn="l"/>
+            <a:r>
+              <a:rPr sz="950" b="1" i="0">
+                <a:solidFill>
+                  <a:srgbClr val="A7F3D0"/>
+                </a:solidFill>
+                <a:latin typeface="Helvetica Neue"/>
+              </a:rPr>
+              <a:t>▶ NOTEBOOK</a:t>
+            </a:r>
+          </a:p>
+        </p:txBody>
+      </p:sp>
+      <p:sp>
+        <p:nvSpPr>
           <p:cNvPr id="18" name="TextBox 17"/>
           <p:cNvSpPr txBox="1"/>
           <p:nvPr/>
         </p:nvSpPr>
         <p:spPr>
           <a:xfrm>
-            <a:off x="7461504" y="6460236"/>
-            <a:ext cx="914400" cy="219456"/>
+            <a:off x="7680960" y="6451092"/>
+            <a:ext cx="754380" cy="219456"/>
           </a:xfrm>
           <a:prstGeom prst="rect">
             <a:avLst/>
@@ -5036,120 +5105,50 @@
           </a:bodyPr>
           <a:lstStyle/>
           <a:p>
+            <a:pPr algn="ctr"/>
+            <a:r>
+              <a:rPr sz="1100" b="1" i="0">
+                <a:solidFill>
+                  <a:srgbClr val="FFFFFF"/>
+                </a:solidFill>
+                <a:latin typeface="Helvetica Neue"/>
+              </a:rPr>
+              <a:t>STEP 16</a:t>
+            </a:r>
+          </a:p>
+        </p:txBody>
+      </p:sp>
+      <p:sp>
+        <p:nvSpPr>
+          <p:cNvPr id="19" name="TextBox 18"/>
+          <p:cNvSpPr txBox="1"/>
+          <p:nvPr/>
+        </p:nvSpPr>
+        <p:spPr>
+          <a:xfrm>
+            <a:off x="8554212" y="6460236"/>
+            <a:ext cx="2896819" cy="219456"/>
+          </a:xfrm>
+          <a:prstGeom prst="rect">
+            <a:avLst/>
+          </a:prstGeom>
+          <a:noFill/>
+        </p:spPr>
+        <p:txBody>
+          <a:bodyPr wrap="none" lIns="0" rIns="0" tIns="0" bIns="0">
+            <a:spAutoFit/>
+          </a:bodyPr>
+          <a:lstStyle/>
+          <a:p>
             <a:pPr algn="l"/>
             <a:r>
-              <a:rPr sz="950" b="1" i="0">
-                <a:solidFill>
-                  <a:srgbClr val="A7F3D0"/>
-                </a:solidFill>
-                <a:latin typeface="Helvetica Neue"/>
-              </a:rPr>
-              <a:t>▶ NOTEBOOK</a:t>
-            </a:r>
-          </a:p>
-        </p:txBody>
-      </p:sp>
-      <p:sp>
-        <p:nvSpPr>
-          <p:cNvPr id="19" name="TextBox 18"/>
-          <p:cNvSpPr txBox="1"/>
-          <p:nvPr/>
-        </p:nvSpPr>
-        <p:spPr>
-          <a:xfrm>
-            <a:off x="8348472" y="6451092"/>
-            <a:ext cx="754380" cy="219456"/>
-          </a:xfrm>
-          <a:prstGeom prst="rect">
-            <a:avLst/>
-          </a:prstGeom>
-          <a:noFill/>
-        </p:spPr>
-        <p:txBody>
-          <a:bodyPr wrap="none" lIns="0" rIns="0" tIns="0" bIns="0">
-            <a:spAutoFit/>
-          </a:bodyPr>
-          <a:lstStyle/>
-          <a:p>
-            <a:pPr algn="ctr"/>
-            <a:r>
-              <a:rPr sz="1100" b="1" i="0">
+              <a:rPr sz="1000" b="1" i="0">
                 <a:solidFill>
                   <a:srgbClr val="FFFFFF"/>
                 </a:solidFill>
                 <a:latin typeface="Helvetica Neue"/>
               </a:rPr>
-              <a:t>STEP 17</a:t>
-            </a:r>
-          </a:p>
-        </p:txBody>
-      </p:sp>
-      <p:sp>
-        <p:nvSpPr>
-          <p:cNvPr id="20" name="TextBox 19"/>
-          <p:cNvSpPr txBox="1"/>
-          <p:nvPr/>
-        </p:nvSpPr>
-        <p:spPr>
-          <a:xfrm>
-            <a:off x="9221724" y="6460236"/>
-            <a:ext cx="2229307" cy="219456"/>
-          </a:xfrm>
-          <a:prstGeom prst="rect">
-            <a:avLst/>
-          </a:prstGeom>
-          <a:noFill/>
-        </p:spPr>
-        <p:txBody>
-          <a:bodyPr wrap="none" lIns="0" rIns="0" tIns="0" bIns="0">
-            <a:spAutoFit/>
-          </a:bodyPr>
-          <a:lstStyle/>
-          <a:p>
-            <a:pPr algn="l"/>
-            <a:r>
-              <a:rPr sz="1000" b="1" i="0">
-                <a:solidFill>
-                  <a:srgbClr val="FFFFFF"/>
-                </a:solidFill>
-                <a:latin typeface="Helvetica Neue"/>
-              </a:rPr>
-              <a:t>See the entailment scores</a:t>
-            </a:r>
-          </a:p>
-        </p:txBody>
-      </p:sp>
-      <p:sp>
-        <p:nvSpPr>
-          <p:cNvPr id="21" name="TextBox 20"/>
-          <p:cNvSpPr txBox="1"/>
-          <p:nvPr/>
-        </p:nvSpPr>
-        <p:spPr>
-          <a:xfrm>
-            <a:off x="640080" y="5532120"/>
-            <a:ext cx="10881360" cy="640080"/>
-          </a:xfrm>
-          <a:prstGeom prst="rect">
-            <a:avLst/>
-          </a:prstGeom>
-          <a:noFill/>
-        </p:spPr>
-        <p:txBody>
-          <a:bodyPr wrap="square" lIns="0" rIns="0" tIns="0" bIns="0">
-            <a:spAutoFit/>
-          </a:bodyPr>
-          <a:lstStyle/>
-          <a:p>
-            <a:pPr algn="ctr"/>
-            <a:r>
-              <a:rPr sz="1500" b="0" i="1">
-                <a:solidFill>
-                  <a:srgbClr val="475569"/>
-                </a:solidFill>
-                <a:latin typeface="Helvetica Neue"/>
-              </a:rPr>
-              <a:t>Every category becomes a sentence: "This example is {your description}." The model scores all eight and picks whichever it most believes.</a:t>
+              <a:t>YOUR KNOB: rewrite the descriptions</a:t>
             </a:r>
           </a:p>
         </p:txBody>
@@ -5198,11 +5197,11 @@
             <a:r>
               <a:rPr sz="1250" b="1" i="0" spc="220">
                 <a:solidFill>
-                  <a:srgbClr val="7C3AED"/>
-                </a:solidFill>
-                <a:latin typeface="Helvetica Neue"/>
-              </a:rPr>
-              <a:t>ROUTE</a:t>
+                  <a:srgbClr val="059669"/>
+                </a:solidFill>
+                <a:latin typeface="Helvetica Neue"/>
+              </a:rPr>
+              <a:t>DECIDE</a:t>
             </a:r>
           </a:p>
         </p:txBody>
@@ -5216,7 +5215,7 @@
         <p:spPr>
           <a:xfrm>
             <a:off x="640080" y="758952"/>
-            <a:ext cx="7680960" cy="1179576"/>
+            <a:ext cx="7680960" cy="704088"/>
           </a:xfrm>
           <a:prstGeom prst="rect">
             <a:avLst/>
@@ -5231,20 +5230,55 @@
           <a:p>
             <a:pPr algn="l"/>
             <a:r>
-              <a:rPr sz="2900" b="1" i="0">
+              <a:rPr sz="2650" b="1" i="0">
                 <a:solidFill>
                   <a:srgbClr val="0F172A"/>
                 </a:solidFill>
                 <a:latin typeface="Helvetica Neue"/>
               </a:rPr>
-              <a:t>The descriptions you write ARE the program.</a:t>
-            </a:r>
-          </a:p>
-        </p:txBody>
-      </p:sp>
-      <p:sp>
-        <p:nvSpPr>
-          <p:cNvPr id="4" name="Rounded Rectangle 3"/>
+              <a:t>An average is a bad way to run a product.</a:t>
+            </a:r>
+          </a:p>
+        </p:txBody>
+      </p:sp>
+      <p:sp>
+        <p:nvSpPr>
+          <p:cNvPr id="4" name="TextBox 3"/>
+          <p:cNvSpPr txBox="1"/>
+          <p:nvPr/>
+        </p:nvSpPr>
+        <p:spPr>
+          <a:xfrm>
+            <a:off x="640080" y="1417320"/>
+            <a:ext cx="10424160" cy="457200"/>
+          </a:xfrm>
+          <a:prstGeom prst="rect">
+            <a:avLst/>
+          </a:prstGeom>
+          <a:noFill/>
+        </p:spPr>
+        <p:txBody>
+          <a:bodyPr wrap="square" lIns="0" rIns="0" tIns="0" bIns="0">
+            <a:spAutoFit/>
+          </a:bodyPr>
+          <a:lstStyle/>
+          <a:p>
+            <a:pPr algn="l"/>
+            <a:r>
+              <a:rPr sz="1500" b="0" i="0">
+                <a:solidFill>
+                  <a:srgbClr val="475569"/>
+                </a:solidFill>
+                <a:latin typeface="Helvetica Neue"/>
+              </a:rPr>
+              <a:t>Ask WHICH tickets it gets wrong. The weak buckets are the ones whose descriptions overlap.</a:t>
+            </a:r>
+          </a:p>
+        </p:txBody>
+      </p:sp>
+      <p:sp>
+        <p:nvSpPr>
+          <p:cNvPr id="5" name="Rounded Rectangle 4"/>
           <p:cNvSpPr/>
           <p:nvPr/>
         </p:nvSpPr>
@@ -5287,7 +5321,7 @@
       </p:sp>
       <p:sp>
         <p:nvSpPr>
-          <p:cNvPr id="5" name="Rounded Rectangle 4"/>
+          <p:cNvPr id="6" name="Rounded Rectangle 5"/>
           <p:cNvSpPr/>
           <p:nvPr/>
         </p:nvSpPr>
@@ -5332,7 +5366,7 @@
       </p:sp>
       <p:sp>
         <p:nvSpPr>
-          <p:cNvPr id="6" name="TextBox 5"/>
+          <p:cNvPr id="7" name="TextBox 6"/>
           <p:cNvSpPr txBox="1"/>
           <p:nvPr/>
         </p:nvSpPr>
@@ -5367,14 +5401,14 @@
       </p:sp>
       <p:sp>
         <p:nvSpPr>
-          <p:cNvPr id="7" name="Rounded Rectangle 6"/>
+          <p:cNvPr id="8" name="Rounded Rectangle 7"/>
           <p:cNvSpPr/>
           <p:nvPr/>
         </p:nvSpPr>
         <p:spPr>
           <a:xfrm>
-            <a:off x="9208008" y="438912"/>
-            <a:ext cx="329184" cy="329184"/>
+            <a:off x="9244584" y="475488"/>
+            <a:ext cx="256032" cy="256032"/>
           </a:xfrm>
           <a:prstGeom prst="roundRect">
             <a:avLst>
@@ -5412,13 +5446,93 @@
       </p:sp>
       <p:sp>
         <p:nvSpPr>
-          <p:cNvPr id="8" name="TextBox 7"/>
-          <p:cNvSpPr txBox="1"/>
-          <p:nvPr/>
-        </p:nvSpPr>
-        <p:spPr>
-          <a:xfrm>
-            <a:off x="9153144" y="475488"/>
+          <p:cNvPr id="9" name="TextBox 8"/>
+          <p:cNvSpPr txBox="1"/>
+          <p:nvPr/>
+        </p:nvSpPr>
+        <p:spPr>
+          <a:xfrm>
+            <a:off x="9189719" y="475488"/>
+            <a:ext cx="365760" cy="256032"/>
+          </a:xfrm>
+          <a:prstGeom prst="rect">
+            <a:avLst/>
+          </a:prstGeom>
+          <a:noFill/>
+        </p:spPr>
+        <p:txBody>
+          <a:bodyPr wrap="square" lIns="0" rIns="0" tIns="0" bIns="0">
+            <a:spAutoFit/>
+          </a:bodyPr>
+          <a:lstStyle/>
+          <a:p>
+            <a:pPr algn="ctr"/>
+            <a:r>
+              <a:rPr sz="1050" b="1" i="0">
+                <a:solidFill>
+                  <a:srgbClr val="FFFFFF"/>
+                </a:solidFill>
+                <a:latin typeface="Helvetica Neue"/>
+              </a:rPr>
+              <a:t>2</a:t>
+            </a:r>
+          </a:p>
+        </p:txBody>
+      </p:sp>
+      <p:sp>
+        <p:nvSpPr>
+          <p:cNvPr id="10" name="Rounded Rectangle 9"/>
+          <p:cNvSpPr/>
+          <p:nvPr/>
+        </p:nvSpPr>
+        <p:spPr>
+          <a:xfrm>
+            <a:off x="9866376" y="438912"/>
+            <a:ext cx="329184" cy="329184"/>
+          </a:xfrm>
+          <a:prstGeom prst="roundRect">
+            <a:avLst>
+              <a:gd name="adj" fmla="val 32000"/>
+            </a:avLst>
+          </a:prstGeom>
+          <a:solidFill>
+            <a:srgbClr val="7C3AED"/>
+          </a:solidFill>
+          <a:ln>
+            <a:noFill/>
+          </a:ln>
+        </p:spPr>
+        <p:style>
+          <a:lnRef idx="1">
+            <a:schemeClr val="accent1"/>
+          </a:lnRef>
+          <a:fillRef idx="3">
+            <a:schemeClr val="accent1"/>
+          </a:fillRef>
+          <a:effectRef idx="2">
+            <a:schemeClr val="accent1"/>
+          </a:effectRef>
+          <a:fontRef idx="minor">
+            <a:schemeClr val="lt1"/>
+          </a:fontRef>
+        </p:style>
+        <p:txBody>
+          <a:bodyPr rtlCol="0" anchor="ctr"/>
+          <a:lstStyle/>
+          <a:p>
+            <a:pPr algn="ctr"/>
+          </a:p>
+        </p:txBody>
+      </p:sp>
+      <p:sp>
+        <p:nvSpPr>
+          <p:cNvPr id="11" name="TextBox 10"/>
+          <p:cNvSpPr txBox="1"/>
+          <p:nvPr/>
+        </p:nvSpPr>
+        <p:spPr>
+          <a:xfrm>
+            <a:off x="9811511" y="475488"/>
             <a:ext cx="438912" cy="256032"/>
           </a:xfrm>
           <a:prstGeom prst="rect">
@@ -5440,20 +5554,20 @@
                 </a:solidFill>
                 <a:latin typeface="Helvetica Neue"/>
               </a:rPr>
-              <a:t>2</a:t>
-            </a:r>
-          </a:p>
-        </p:txBody>
-      </p:sp>
-      <p:sp>
-        <p:nvSpPr>
-          <p:cNvPr id="9" name="Rounded Rectangle 8"/>
+              <a:t>3</a:t>
+            </a:r>
+          </a:p>
+        </p:txBody>
+      </p:sp>
+      <p:sp>
+        <p:nvSpPr>
+          <p:cNvPr id="12" name="Rounded Rectangle 11"/>
           <p:cNvSpPr/>
           <p:nvPr/>
         </p:nvSpPr>
         <p:spPr>
           <a:xfrm>
-            <a:off x="9902951" y="475488"/>
+            <a:off x="10561319" y="475488"/>
             <a:ext cx="256032" cy="256032"/>
           </a:xfrm>
           <a:prstGeom prst="roundRect">
@@ -5492,87 +5606,7 @@
       </p:sp>
       <p:sp>
         <p:nvSpPr>
-          <p:cNvPr id="10" name="TextBox 9"/>
-          <p:cNvSpPr txBox="1"/>
-          <p:nvPr/>
-        </p:nvSpPr>
-        <p:spPr>
-          <a:xfrm>
-            <a:off x="9848087" y="475488"/>
-            <a:ext cx="365760" cy="256032"/>
-          </a:xfrm>
-          <a:prstGeom prst="rect">
-            <a:avLst/>
-          </a:prstGeom>
-          <a:noFill/>
-        </p:spPr>
-        <p:txBody>
-          <a:bodyPr wrap="square" lIns="0" rIns="0" tIns="0" bIns="0">
-            <a:spAutoFit/>
-          </a:bodyPr>
-          <a:lstStyle/>
-          <a:p>
-            <a:pPr algn="ctr"/>
-            <a:r>
-              <a:rPr sz="1050" b="1" i="0">
-                <a:solidFill>
-                  <a:srgbClr val="AEB4BF"/>
-                </a:solidFill>
-                <a:latin typeface="Helvetica Neue"/>
-              </a:rPr>
-              <a:t>3</a:t>
-            </a:r>
-          </a:p>
-        </p:txBody>
-      </p:sp>
-      <p:sp>
-        <p:nvSpPr>
-          <p:cNvPr id="11" name="Rounded Rectangle 10"/>
-          <p:cNvSpPr/>
-          <p:nvPr/>
-        </p:nvSpPr>
-        <p:spPr>
-          <a:xfrm>
-            <a:off x="10561319" y="475488"/>
-            <a:ext cx="256032" cy="256032"/>
-          </a:xfrm>
-          <a:prstGeom prst="roundRect">
-            <a:avLst>
-              <a:gd name="adj" fmla="val 32000"/>
-            </a:avLst>
-          </a:prstGeom>
-          <a:solidFill>
-            <a:srgbClr val="E9EBF0"/>
-          </a:solidFill>
-          <a:ln>
-            <a:noFill/>
-          </a:ln>
-        </p:spPr>
-        <p:style>
-          <a:lnRef idx="1">
-            <a:schemeClr val="accent1"/>
-          </a:lnRef>
-          <a:fillRef idx="3">
-            <a:schemeClr val="accent1"/>
-          </a:fillRef>
-          <a:effectRef idx="2">
-            <a:schemeClr val="accent1"/>
-          </a:effectRef>
-          <a:fontRef idx="minor">
-            <a:schemeClr val="lt1"/>
-          </a:fontRef>
-        </p:style>
-        <p:txBody>
-          <a:bodyPr rtlCol="0" anchor="ctr"/>
-          <a:lstStyle/>
-          <a:p>
-            <a:pPr algn="ctr"/>
-          </a:p>
-        </p:txBody>
-      </p:sp>
-      <p:sp>
-        <p:nvSpPr>
-          <p:cNvPr id="12" name="TextBox 11"/>
+          <p:cNvPr id="13" name="TextBox 12"/>
           <p:cNvSpPr txBox="1"/>
           <p:nvPr/>
         </p:nvSpPr>
@@ -5607,7 +5641,7 @@
       </p:sp>
       <p:sp>
         <p:nvSpPr>
-          <p:cNvPr id="13" name="TextBox 12"/>
+          <p:cNvPr id="14" name="TextBox 13"/>
           <p:cNvSpPr txBox="1"/>
           <p:nvPr/>
         </p:nvSpPr>
@@ -5642,7 +5676,7 @@
       </p:sp>
       <p:pic>
         <p:nvPicPr>
-          <p:cNvPr id="14" name="Picture 13" descr="d_wording.png"/>
+          <p:cNvPr id="15" name="Picture 14" descr="fig_recall.png"/>
           <p:cNvPicPr>
             <a:picLocks noChangeAspect="1"/>
           </p:cNvPicPr>
@@ -5656,8 +5690,8 @@
         </p:blipFill>
         <p:spPr>
           <a:xfrm>
-            <a:off x="518007" y="2769342"/>
-            <a:ext cx="11155680" cy="2599474"/>
+            <a:off x="2205165" y="2057400"/>
+            <a:ext cx="7781363" cy="3977639"/>
           </a:xfrm>
           <a:prstGeom prst="rect">
             <a:avLst/>
@@ -5666,14 +5700,14 @@
       </p:pic>
       <p:sp>
         <p:nvSpPr>
-          <p:cNvPr id="15" name="Rounded Rectangle 14"/>
+          <p:cNvPr id="16" name="Rounded Rectangle 15"/>
           <p:cNvSpPr/>
           <p:nvPr/>
         </p:nvSpPr>
         <p:spPr>
           <a:xfrm>
-            <a:off x="6638544" y="6345936"/>
-            <a:ext cx="4913071" cy="365760"/>
+            <a:off x="7573060" y="6345936"/>
+            <a:ext cx="3978554" cy="365760"/>
           </a:xfrm>
           <a:prstGeom prst="roundRect">
             <a:avLst>
@@ -5711,13 +5745,13 @@
       </p:sp>
       <p:sp>
         <p:nvSpPr>
-          <p:cNvPr id="16" name="Rounded Rectangle 15"/>
+          <p:cNvPr id="17" name="Rounded Rectangle 16"/>
           <p:cNvSpPr/>
           <p:nvPr/>
         </p:nvSpPr>
         <p:spPr>
           <a:xfrm>
-            <a:off x="7680960" y="6396228"/>
+            <a:off x="8615476" y="6396228"/>
             <a:ext cx="754380" cy="265176"/>
           </a:xfrm>
           <a:prstGeom prst="roundRect">
@@ -5756,13 +5790,13 @@
       </p:sp>
       <p:sp>
         <p:nvSpPr>
-          <p:cNvPr id="17" name="TextBox 16"/>
-          <p:cNvSpPr txBox="1"/>
-          <p:nvPr/>
-        </p:nvSpPr>
-        <p:spPr>
-          <a:xfrm>
-            <a:off x="6793992" y="6460236"/>
+          <p:cNvPr id="18" name="TextBox 17"/>
+          <p:cNvSpPr txBox="1"/>
+          <p:nvPr/>
+        </p:nvSpPr>
+        <p:spPr>
+          <a:xfrm>
+            <a:off x="7728508" y="6460236"/>
             <a:ext cx="914400" cy="219456"/>
           </a:xfrm>
           <a:prstGeom prst="rect">
@@ -5791,13 +5825,13 @@
       </p:sp>
       <p:sp>
         <p:nvSpPr>
-          <p:cNvPr id="18" name="TextBox 17"/>
-          <p:cNvSpPr txBox="1"/>
-          <p:nvPr/>
-        </p:nvSpPr>
-        <p:spPr>
-          <a:xfrm>
-            <a:off x="7680960" y="6451092"/>
+          <p:cNvPr id="19" name="TextBox 18"/>
+          <p:cNvSpPr txBox="1"/>
+          <p:nvPr/>
+        </p:nvSpPr>
+        <p:spPr>
+          <a:xfrm>
+            <a:off x="8615476" y="6451092"/>
             <a:ext cx="754380" cy="219456"/>
           </a:xfrm>
           <a:prstGeom prst="rect">
@@ -5819,21 +5853,21 @@
                 </a:solidFill>
                 <a:latin typeface="Helvetica Neue"/>
               </a:rPr>
-              <a:t>STEP 16</a:t>
-            </a:r>
-          </a:p>
-        </p:txBody>
-      </p:sp>
-      <p:sp>
-        <p:nvSpPr>
-          <p:cNvPr id="19" name="TextBox 18"/>
-          <p:cNvSpPr txBox="1"/>
-          <p:nvPr/>
-        </p:nvSpPr>
-        <p:spPr>
-          <a:xfrm>
-            <a:off x="8554212" y="6460236"/>
-            <a:ext cx="2896819" cy="219456"/>
+              <a:t>STEP 18</a:t>
+            </a:r>
+          </a:p>
+        </p:txBody>
+      </p:sp>
+      <p:sp>
+        <p:nvSpPr>
+          <p:cNvPr id="20" name="TextBox 19"/>
+          <p:cNvSpPr txBox="1"/>
+          <p:nvPr/>
+        </p:nvSpPr>
+        <p:spPr>
+          <a:xfrm>
+            <a:off x="9488728" y="6460236"/>
+            <a:ext cx="1962302" cy="219456"/>
           </a:xfrm>
           <a:prstGeom prst="rect">
             <a:avLst/>
@@ -5854,7 +5888,42 @@
                 </a:solidFill>
                 <a:latin typeface="Helvetica Neue"/>
               </a:rPr>
-              <a:t>YOUR KNOB: rewrite the descriptions</a:t>
+              <a:t>Find the weak buckets</a:t>
+            </a:r>
+          </a:p>
+        </p:txBody>
+      </p:sp>
+      <p:sp>
+        <p:nvSpPr>
+          <p:cNvPr id="21" name="TextBox 20"/>
+          <p:cNvSpPr txBox="1"/>
+          <p:nvPr/>
+        </p:nvSpPr>
+        <p:spPr>
+          <a:xfrm>
+            <a:off x="640080" y="6080760"/>
+            <a:ext cx="10881360" cy="365760"/>
+          </a:xfrm>
+          <a:prstGeom prst="rect">
+            <a:avLst/>
+          </a:prstGeom>
+          <a:noFill/>
+        </p:spPr>
+        <p:txBody>
+          <a:bodyPr wrap="square" lIns="0" rIns="0" tIns="0" bIns="0">
+            <a:spAutoFit/>
+          </a:bodyPr>
+          <a:lstStyle/>
+          <a:p>
+            <a:pPr algn="ctr"/>
+            <a:r>
+              <a:rPr sz="1500" b="0" i="1">
+                <a:solidFill>
+                  <a:srgbClr val="475569"/>
+                </a:solidFill>
+                <a:latin typeface="Helvetica Neue"/>
+              </a:rPr>
+              <a:t>When a classifier underperforms, look at your taxonomy before you look at your model.</a:t>
             </a:r>
           </a:p>
         </p:txBody>
@@ -5936,55 +6005,20 @@
           <a:p>
             <a:pPr algn="l"/>
             <a:r>
-              <a:rPr sz="2650" b="1" i="0">
+              <a:rPr sz="2900" b="1" i="0">
                 <a:solidFill>
                   <a:srgbClr val="0F172A"/>
                 </a:solidFill>
                 <a:latin typeface="Helvetica Neue"/>
               </a:rPr>
-              <a:t>An average is a bad way to run a product.</a:t>
-            </a:r>
-          </a:p>
-        </p:txBody>
-      </p:sp>
-      <p:sp>
-        <p:nvSpPr>
-          <p:cNvPr id="4" name="TextBox 3"/>
-          <p:cNvSpPr txBox="1"/>
-          <p:nvPr/>
-        </p:nvSpPr>
-        <p:spPr>
-          <a:xfrm>
-            <a:off x="640080" y="1417320"/>
-            <a:ext cx="10424160" cy="457200"/>
-          </a:xfrm>
-          <a:prstGeom prst="rect">
-            <a:avLst/>
-          </a:prstGeom>
-          <a:noFill/>
-        </p:spPr>
-        <p:txBody>
-          <a:bodyPr wrap="square" lIns="0" rIns="0" tIns="0" bIns="0">
-            <a:spAutoFit/>
-          </a:bodyPr>
-          <a:lstStyle/>
-          <a:p>
-            <a:pPr algn="l"/>
-            <a:r>
-              <a:rPr sz="1500" b="0" i="0">
-                <a:solidFill>
-                  <a:srgbClr val="475569"/>
-                </a:solidFill>
-                <a:latin typeface="Helvetica Neue"/>
-              </a:rPr>
-              <a:t>Ask WHICH tickets it gets wrong. The weak buckets are the ones whose descriptions overlap.</a:t>
-            </a:r>
-          </a:p>
-        </p:txBody>
-      </p:sp>
-      <p:sp>
-        <p:nvSpPr>
-          <p:cNvPr id="5" name="Rounded Rectangle 4"/>
+              <a:t>Confident is not the same as correct.</a:t>
+            </a:r>
+          </a:p>
+        </p:txBody>
+      </p:sp>
+      <p:sp>
+        <p:nvSpPr>
+          <p:cNvPr id="4" name="Rounded Rectangle 3"/>
           <p:cNvSpPr/>
           <p:nvPr/>
         </p:nvSpPr>
@@ -6027,7 +6061,7 @@
       </p:sp>
       <p:sp>
         <p:nvSpPr>
-          <p:cNvPr id="6" name="Rounded Rectangle 5"/>
+          <p:cNvPr id="5" name="Rounded Rectangle 4"/>
           <p:cNvSpPr/>
           <p:nvPr/>
         </p:nvSpPr>
@@ -6072,7 +6106,7 @@
       </p:sp>
       <p:sp>
         <p:nvSpPr>
-          <p:cNvPr id="7" name="TextBox 6"/>
+          <p:cNvPr id="6" name="TextBox 5"/>
           <p:cNvSpPr txBox="1"/>
           <p:nvPr/>
         </p:nvSpPr>
@@ -6107,7 +6141,7 @@
       </p:sp>
       <p:sp>
         <p:nvSpPr>
-          <p:cNvPr id="8" name="Rounded Rectangle 7"/>
+          <p:cNvPr id="7" name="Rounded Rectangle 6"/>
           <p:cNvSpPr/>
           <p:nvPr/>
         </p:nvSpPr>
@@ -6152,7 +6186,7 @@
       </p:sp>
       <p:sp>
         <p:nvSpPr>
-          <p:cNvPr id="9" name="TextBox 8"/>
+          <p:cNvPr id="8" name="TextBox 7"/>
           <p:cNvSpPr txBox="1"/>
           <p:nvPr/>
         </p:nvSpPr>
@@ -6187,7 +6221,7 @@
       </p:sp>
       <p:sp>
         <p:nvSpPr>
-          <p:cNvPr id="10" name="Rounded Rectangle 9"/>
+          <p:cNvPr id="9" name="Rounded Rectangle 8"/>
           <p:cNvSpPr/>
           <p:nvPr/>
         </p:nvSpPr>
@@ -6232,7 +6266,7 @@
       </p:sp>
       <p:sp>
         <p:nvSpPr>
-          <p:cNvPr id="11" name="TextBox 10"/>
+          <p:cNvPr id="10" name="TextBox 9"/>
           <p:cNvSpPr txBox="1"/>
           <p:nvPr/>
         </p:nvSpPr>
@@ -6267,7 +6301,7 @@
       </p:sp>
       <p:sp>
         <p:nvSpPr>
-          <p:cNvPr id="12" name="Rounded Rectangle 11"/>
+          <p:cNvPr id="11" name="Rounded Rectangle 10"/>
           <p:cNvSpPr/>
           <p:nvPr/>
         </p:nvSpPr>
@@ -6312,7 +6346,7 @@
       </p:sp>
       <p:sp>
         <p:nvSpPr>
-          <p:cNvPr id="13" name="TextBox 12"/>
+          <p:cNvPr id="12" name="TextBox 11"/>
           <p:cNvSpPr txBox="1"/>
           <p:nvPr/>
         </p:nvSpPr>
@@ -6347,7 +6381,7 @@
       </p:sp>
       <p:sp>
         <p:nvSpPr>
-          <p:cNvPr id="14" name="TextBox 13"/>
+          <p:cNvPr id="13" name="TextBox 12"/>
           <p:cNvSpPr txBox="1"/>
           <p:nvPr/>
         </p:nvSpPr>
@@ -6382,7 +6416,7 @@
       </p:sp>
       <p:pic>
         <p:nvPicPr>
-          <p:cNvPr id="15" name="Picture 14" descr="fig_recall.png"/>
+          <p:cNvPr id="14" name="Picture 13" descr="d_softmax.png"/>
           <p:cNvPicPr>
             <a:picLocks noChangeAspect="1"/>
           </p:cNvPicPr>
@@ -6396,8 +6430,8 @@
         </p:blipFill>
         <p:spPr>
           <a:xfrm>
-            <a:off x="2205165" y="2057400"/>
-            <a:ext cx="7781363" cy="3977639"/>
+            <a:off x="518007" y="2197772"/>
+            <a:ext cx="11155680" cy="3834054"/>
           </a:xfrm>
           <a:prstGeom prst="rect">
             <a:avLst/>
@@ -6406,14 +6440,14 @@
       </p:pic>
       <p:sp>
         <p:nvSpPr>
-          <p:cNvPr id="16" name="Rounded Rectangle 15"/>
+          <p:cNvPr id="15" name="Rounded Rectangle 14"/>
           <p:cNvSpPr/>
           <p:nvPr/>
         </p:nvSpPr>
         <p:spPr>
           <a:xfrm>
-            <a:off x="7573060" y="6345936"/>
-            <a:ext cx="3978554" cy="365760"/>
+            <a:off x="7172553" y="6345936"/>
+            <a:ext cx="4379061" cy="365760"/>
           </a:xfrm>
           <a:prstGeom prst="roundRect">
             <a:avLst>
@@ -6451,13 +6485,13 @@
       </p:sp>
       <p:sp>
         <p:nvSpPr>
-          <p:cNvPr id="17" name="Rounded Rectangle 16"/>
+          <p:cNvPr id="16" name="Rounded Rectangle 15"/>
           <p:cNvSpPr/>
           <p:nvPr/>
         </p:nvSpPr>
         <p:spPr>
           <a:xfrm>
-            <a:off x="8615476" y="6396228"/>
+            <a:off x="8214969" y="6396228"/>
             <a:ext cx="754380" cy="265176"/>
           </a:xfrm>
           <a:prstGeom prst="roundRect">
@@ -6496,14 +6530,49 @@
       </p:sp>
       <p:sp>
         <p:nvSpPr>
+          <p:cNvPr id="17" name="TextBox 16"/>
+          <p:cNvSpPr txBox="1"/>
+          <p:nvPr/>
+        </p:nvSpPr>
+        <p:spPr>
+          <a:xfrm>
+            <a:off x="7328001" y="6460236"/>
+            <a:ext cx="914400" cy="219456"/>
+          </a:xfrm>
+          <a:prstGeom prst="rect">
+            <a:avLst/>
+          </a:prstGeom>
+          <a:noFill/>
+        </p:spPr>
+        <p:txBody>
+          <a:bodyPr wrap="none" lIns="0" rIns="0" tIns="0" bIns="0">
+            <a:spAutoFit/>
+          </a:bodyPr>
+          <a:lstStyle/>
+          <a:p>
+            <a:pPr algn="l"/>
+            <a:r>
+              <a:rPr sz="950" b="1" i="0">
+                <a:solidFill>
+                  <a:srgbClr val="A7F3D0"/>
+                </a:solidFill>
+                <a:latin typeface="Helvetica Neue"/>
+              </a:rPr>
+              <a:t>▶ NOTEBOOK</a:t>
+            </a:r>
+          </a:p>
+        </p:txBody>
+      </p:sp>
+      <p:sp>
+        <p:nvSpPr>
           <p:cNvPr id="18" name="TextBox 17"/>
           <p:cNvSpPr txBox="1"/>
           <p:nvPr/>
         </p:nvSpPr>
         <p:spPr>
           <a:xfrm>
-            <a:off x="7728508" y="6460236"/>
-            <a:ext cx="914400" cy="219456"/>
+            <a:off x="8214969" y="6451092"/>
+            <a:ext cx="754380" cy="219456"/>
           </a:xfrm>
           <a:prstGeom prst="rect">
             <a:avLst/>
@@ -6516,120 +6585,50 @@
           </a:bodyPr>
           <a:lstStyle/>
           <a:p>
+            <a:pPr algn="ctr"/>
+            <a:r>
+              <a:rPr sz="1100" b="1" i="0">
+                <a:solidFill>
+                  <a:srgbClr val="FFFFFF"/>
+                </a:solidFill>
+                <a:latin typeface="Helvetica Neue"/>
+              </a:rPr>
+              <a:t>STEP 19</a:t>
+            </a:r>
+          </a:p>
+        </p:txBody>
+      </p:sp>
+      <p:sp>
+        <p:nvSpPr>
+          <p:cNvPr id="19" name="TextBox 18"/>
+          <p:cNvSpPr txBox="1"/>
+          <p:nvPr/>
+        </p:nvSpPr>
+        <p:spPr>
+          <a:xfrm>
+            <a:off x="9088221" y="6460236"/>
+            <a:ext cx="2362809" cy="219456"/>
+          </a:xfrm>
+          <a:prstGeom prst="rect">
+            <a:avLst/>
+          </a:prstGeom>
+          <a:noFill/>
+        </p:spPr>
+        <p:txBody>
+          <a:bodyPr wrap="none" lIns="0" rIns="0" tIns="0" bIns="0">
+            <a:spAutoFit/>
+          </a:bodyPr>
+          <a:lstStyle/>
+          <a:p>
             <a:pPr algn="l"/>
             <a:r>
-              <a:rPr sz="950" b="1" i="0">
-                <a:solidFill>
-                  <a:srgbClr val="A7F3D0"/>
-                </a:solidFill>
-                <a:latin typeface="Helvetica Neue"/>
-              </a:rPr>
-              <a:t>▶ NOTEBOOK</a:t>
-            </a:r>
-          </a:p>
-        </p:txBody>
-      </p:sp>
-      <p:sp>
-        <p:nvSpPr>
-          <p:cNvPr id="19" name="TextBox 18"/>
-          <p:cNvSpPr txBox="1"/>
-          <p:nvPr/>
-        </p:nvSpPr>
-        <p:spPr>
-          <a:xfrm>
-            <a:off x="8615476" y="6451092"/>
-            <a:ext cx="754380" cy="219456"/>
-          </a:xfrm>
-          <a:prstGeom prst="rect">
-            <a:avLst/>
-          </a:prstGeom>
-          <a:noFill/>
-        </p:spPr>
-        <p:txBody>
-          <a:bodyPr wrap="none" lIns="0" rIns="0" tIns="0" bIns="0">
-            <a:spAutoFit/>
-          </a:bodyPr>
-          <a:lstStyle/>
-          <a:p>
-            <a:pPr algn="ctr"/>
-            <a:r>
-              <a:rPr sz="1100" b="1" i="0">
+              <a:rPr sz="1000" b="1" i="0">
                 <a:solidFill>
                   <a:srgbClr val="FFFFFF"/>
                 </a:solidFill>
                 <a:latin typeface="Helvetica Neue"/>
               </a:rPr>
-              <a:t>STEP 18</a:t>
-            </a:r>
-          </a:p>
-        </p:txBody>
-      </p:sp>
-      <p:sp>
-        <p:nvSpPr>
-          <p:cNvPr id="20" name="TextBox 19"/>
-          <p:cNvSpPr txBox="1"/>
-          <p:nvPr/>
-        </p:nvSpPr>
-        <p:spPr>
-          <a:xfrm>
-            <a:off x="9488728" y="6460236"/>
-            <a:ext cx="1962302" cy="219456"/>
-          </a:xfrm>
-          <a:prstGeom prst="rect">
-            <a:avLst/>
-          </a:prstGeom>
-          <a:noFill/>
-        </p:spPr>
-        <p:txBody>
-          <a:bodyPr wrap="none" lIns="0" rIns="0" tIns="0" bIns="0">
-            <a:spAutoFit/>
-          </a:bodyPr>
-          <a:lstStyle/>
-          <a:p>
-            <a:pPr algn="l"/>
-            <a:r>
-              <a:rPr sz="1000" b="1" i="0">
-                <a:solidFill>
-                  <a:srgbClr val="FFFFFF"/>
-                </a:solidFill>
-                <a:latin typeface="Helvetica Neue"/>
-              </a:rPr>
-              <a:t>Find the weak buckets</a:t>
-            </a:r>
-          </a:p>
-        </p:txBody>
-      </p:sp>
-      <p:sp>
-        <p:nvSpPr>
-          <p:cNvPr id="21" name="TextBox 20"/>
-          <p:cNvSpPr txBox="1"/>
-          <p:nvPr/>
-        </p:nvSpPr>
-        <p:spPr>
-          <a:xfrm>
-            <a:off x="640080" y="6080760"/>
-            <a:ext cx="10881360" cy="365760"/>
-          </a:xfrm>
-          <a:prstGeom prst="rect">
-            <a:avLst/>
-          </a:prstGeom>
-          <a:noFill/>
-        </p:spPr>
-        <p:txBody>
-          <a:bodyPr wrap="square" lIns="0" rIns="0" tIns="0" bIns="0">
-            <a:spAutoFit/>
-          </a:bodyPr>
-          <a:lstStyle/>
-          <a:p>
-            <a:pPr algn="ctr"/>
-            <a:r>
-              <a:rPr sz="1500" b="0" i="1">
-                <a:solidFill>
-                  <a:srgbClr val="475569"/>
-                </a:solidFill>
-                <a:latin typeface="Helvetica Neue"/>
-              </a:rPr>
-              <a:t>When a classifier underperforms, look at your taxonomy before you look at your model.</a:t>
+              <a:t>Feed it an off-topic ticket</a:t>
             </a:r>
           </a:p>
         </p:txBody>
@@ -6711,20 +6710,55 @@
           <a:p>
             <a:pPr algn="l"/>
             <a:r>
-              <a:rPr sz="2900" b="1" i="0">
+              <a:rPr sz="2650" b="1" i="0">
                 <a:solidFill>
                   <a:srgbClr val="0F172A"/>
                 </a:solidFill>
                 <a:latin typeface="Helvetica Neue"/>
               </a:rPr>
-              <a:t>Confident is not the same as correct.</a:t>
-            </a:r>
-          </a:p>
-        </p:txBody>
-      </p:sp>
-      <p:sp>
-        <p:nvSpPr>
-          <p:cNvPr id="4" name="Rounded Rectangle 3"/>
+              <a:t>What a mistake costs decides the setting.</a:t>
+            </a:r>
+          </a:p>
+        </p:txBody>
+      </p:sp>
+      <p:sp>
+        <p:nvSpPr>
+          <p:cNvPr id="4" name="TextBox 3"/>
+          <p:cNvSpPr txBox="1"/>
+          <p:nvPr/>
+        </p:nvSpPr>
+        <p:spPr>
+          <a:xfrm>
+            <a:off x="640080" y="1417320"/>
+            <a:ext cx="10424160" cy="457200"/>
+          </a:xfrm>
+          <a:prstGeom prst="rect">
+            <a:avLst/>
+          </a:prstGeom>
+          <a:noFill/>
+        </p:spPr>
+        <p:txBody>
+          <a:bodyPr wrap="square" lIns="0" rIns="0" tIns="0" bIns="0">
+            <a:spAutoFit/>
+          </a:bodyPr>
+          <a:lstStyle/>
+          <a:p>
+            <a:pPr algn="l"/>
+            <a:r>
+              <a:rPr sz="1500" b="0" i="0">
+                <a:solidFill>
+                  <a:srgbClr val="475569"/>
+                </a:solidFill>
+                <a:latin typeface="Helvetica Neue"/>
+              </a:rPr>
+              <a:t>Same copilot, same tickets, six companies. Ask your neighbour: for the hospital, high bar or low?</a:t>
+            </a:r>
+          </a:p>
+        </p:txBody>
+      </p:sp>
+      <p:sp>
+        <p:nvSpPr>
+          <p:cNvPr id="5" name="Rounded Rectangle 4"/>
           <p:cNvSpPr/>
           <p:nvPr/>
         </p:nvSpPr>
@@ -6767,7 +6801,7 @@
       </p:sp>
       <p:sp>
         <p:nvSpPr>
-          <p:cNvPr id="5" name="Rounded Rectangle 4"/>
+          <p:cNvPr id="6" name="Rounded Rectangle 5"/>
           <p:cNvSpPr/>
           <p:nvPr/>
         </p:nvSpPr>
@@ -6812,7 +6846,7 @@
       </p:sp>
       <p:sp>
         <p:nvSpPr>
-          <p:cNvPr id="6" name="TextBox 5"/>
+          <p:cNvPr id="7" name="TextBox 6"/>
           <p:cNvSpPr txBox="1"/>
           <p:nvPr/>
         </p:nvSpPr>
@@ -6847,7 +6881,7 @@
       </p:sp>
       <p:sp>
         <p:nvSpPr>
-          <p:cNvPr id="7" name="Rounded Rectangle 6"/>
+          <p:cNvPr id="8" name="Rounded Rectangle 7"/>
           <p:cNvSpPr/>
           <p:nvPr/>
         </p:nvSpPr>
@@ -6892,7 +6926,7 @@
       </p:sp>
       <p:sp>
         <p:nvSpPr>
-          <p:cNvPr id="8" name="TextBox 7"/>
+          <p:cNvPr id="9" name="TextBox 8"/>
           <p:cNvSpPr txBox="1"/>
           <p:nvPr/>
         </p:nvSpPr>
@@ -6927,14 +6961,14 @@
       </p:sp>
       <p:sp>
         <p:nvSpPr>
-          <p:cNvPr id="9" name="Rounded Rectangle 8"/>
+          <p:cNvPr id="10" name="Rounded Rectangle 9"/>
           <p:cNvSpPr/>
           <p:nvPr/>
         </p:nvSpPr>
         <p:spPr>
           <a:xfrm>
-            <a:off x="9866376" y="438912"/>
-            <a:ext cx="329184" cy="329184"/>
+            <a:off x="9902951" y="475488"/>
+            <a:ext cx="256032" cy="256032"/>
           </a:xfrm>
           <a:prstGeom prst="roundRect">
             <a:avLst>
@@ -6972,14 +7006,14 @@
       </p:sp>
       <p:sp>
         <p:nvSpPr>
-          <p:cNvPr id="10" name="TextBox 9"/>
-          <p:cNvSpPr txBox="1"/>
-          <p:nvPr/>
-        </p:nvSpPr>
-        <p:spPr>
-          <a:xfrm>
-            <a:off x="9811511" y="475488"/>
-            <a:ext cx="438912" cy="256032"/>
+          <p:cNvPr id="11" name="TextBox 10"/>
+          <p:cNvSpPr txBox="1"/>
+          <p:nvPr/>
+        </p:nvSpPr>
+        <p:spPr>
+          <a:xfrm>
+            <a:off x="9848087" y="475488"/>
+            <a:ext cx="365760" cy="256032"/>
           </a:xfrm>
           <a:prstGeom prst="rect">
             <a:avLst/>
@@ -6994,7 +7028,7 @@
           <a:p>
             <a:pPr algn="ctr"/>
             <a:r>
-              <a:rPr sz="1300" b="1" i="0">
+              <a:rPr sz="1050" b="1" i="0">
                 <a:solidFill>
                   <a:srgbClr val="FFFFFF"/>
                 </a:solidFill>
@@ -7007,14 +7041,14 @@
       </p:sp>
       <p:sp>
         <p:nvSpPr>
-          <p:cNvPr id="11" name="Rounded Rectangle 10"/>
+          <p:cNvPr id="12" name="Rounded Rectangle 11"/>
           <p:cNvSpPr/>
           <p:nvPr/>
         </p:nvSpPr>
         <p:spPr>
           <a:xfrm>
-            <a:off x="10561319" y="475488"/>
-            <a:ext cx="256032" cy="256032"/>
+            <a:off x="10524744" y="438912"/>
+            <a:ext cx="329184" cy="329184"/>
           </a:xfrm>
           <a:prstGeom prst="roundRect">
             <a:avLst>
@@ -7022,7 +7056,7 @@
             </a:avLst>
           </a:prstGeom>
           <a:solidFill>
-            <a:srgbClr val="E9EBF0"/>
+            <a:srgbClr val="059669"/>
           </a:solidFill>
           <a:ln>
             <a:noFill/>
@@ -7052,14 +7086,14 @@
       </p:sp>
       <p:sp>
         <p:nvSpPr>
-          <p:cNvPr id="12" name="TextBox 11"/>
-          <p:cNvSpPr txBox="1"/>
-          <p:nvPr/>
-        </p:nvSpPr>
-        <p:spPr>
-          <a:xfrm>
-            <a:off x="10506455" y="475488"/>
-            <a:ext cx="365760" cy="256032"/>
+          <p:cNvPr id="13" name="TextBox 12"/>
+          <p:cNvSpPr txBox="1"/>
+          <p:nvPr/>
+        </p:nvSpPr>
+        <p:spPr>
+          <a:xfrm>
+            <a:off x="10469880" y="475488"/>
+            <a:ext cx="438912" cy="256032"/>
           </a:xfrm>
           <a:prstGeom prst="rect">
             <a:avLst/>
@@ -7074,9 +7108,9 @@
           <a:p>
             <a:pPr algn="ctr"/>
             <a:r>
-              <a:rPr sz="1050" b="1" i="0">
-                <a:solidFill>
-                  <a:srgbClr val="AEB4BF"/>
+              <a:rPr sz="1300" b="1" i="0">
+                <a:solidFill>
+                  <a:srgbClr val="FFFFFF"/>
                 </a:solidFill>
                 <a:latin typeface="Helvetica Neue"/>
               </a:rPr>
@@ -7087,7 +7121,7 @@
       </p:sp>
       <p:sp>
         <p:nvSpPr>
-          <p:cNvPr id="13" name="TextBox 12"/>
+          <p:cNvPr id="14" name="TextBox 13"/>
           <p:cNvSpPr txBox="1"/>
           <p:nvPr/>
         </p:nvSpPr>
@@ -7122,7 +7156,7 @@
       </p:sp>
       <p:pic>
         <p:nvPicPr>
-          <p:cNvPr id="14" name="Picture 13" descr="d_softmax.png"/>
+          <p:cNvPr id="15" name="Picture 14" descr="fig_game.png"/>
           <p:cNvPicPr>
             <a:picLocks noChangeAspect="1"/>
           </p:cNvPicPr>
@@ -7136,8 +7170,8 @@
         </p:blipFill>
         <p:spPr>
           <a:xfrm>
-            <a:off x="518007" y="2197772"/>
-            <a:ext cx="11155680" cy="3834054"/>
+            <a:off x="2207847" y="2011680"/>
+            <a:ext cx="7775999" cy="3931920"/>
           </a:xfrm>
           <a:prstGeom prst="rect">
             <a:avLst/>
@@ -7146,14 +7180,14 @@
       </p:pic>
       <p:sp>
         <p:nvSpPr>
-          <p:cNvPr id="15" name="Rounded Rectangle 14"/>
+          <p:cNvPr id="16" name="Rounded Rectangle 15"/>
           <p:cNvSpPr/>
           <p:nvPr/>
         </p:nvSpPr>
         <p:spPr>
           <a:xfrm>
-            <a:off x="7172553" y="6345936"/>
-            <a:ext cx="4379061" cy="365760"/>
+            <a:off x="7105802" y="6345936"/>
+            <a:ext cx="4445812" cy="365760"/>
           </a:xfrm>
           <a:prstGeom prst="roundRect">
             <a:avLst>
@@ -7191,13 +7225,13 @@
       </p:sp>
       <p:sp>
         <p:nvSpPr>
-          <p:cNvPr id="16" name="Rounded Rectangle 15"/>
+          <p:cNvPr id="17" name="Rounded Rectangle 16"/>
           <p:cNvSpPr/>
           <p:nvPr/>
         </p:nvSpPr>
         <p:spPr>
           <a:xfrm>
-            <a:off x="8214969" y="6396228"/>
+            <a:off x="8148218" y="6396228"/>
             <a:ext cx="754380" cy="265176"/>
           </a:xfrm>
           <a:prstGeom prst="roundRect">
@@ -7236,13 +7270,13 @@
       </p:sp>
       <p:sp>
         <p:nvSpPr>
-          <p:cNvPr id="17" name="TextBox 16"/>
-          <p:cNvSpPr txBox="1"/>
-          <p:nvPr/>
-        </p:nvSpPr>
-        <p:spPr>
-          <a:xfrm>
-            <a:off x="7328001" y="6460236"/>
+          <p:cNvPr id="18" name="TextBox 17"/>
+          <p:cNvSpPr txBox="1"/>
+          <p:nvPr/>
+        </p:nvSpPr>
+        <p:spPr>
+          <a:xfrm>
+            <a:off x="7261250" y="6460236"/>
             <a:ext cx="914400" cy="219456"/>
           </a:xfrm>
           <a:prstGeom prst="rect">
@@ -7271,13 +7305,13 @@
       </p:sp>
       <p:sp>
         <p:nvSpPr>
-          <p:cNvPr id="18" name="TextBox 17"/>
-          <p:cNvSpPr txBox="1"/>
-          <p:nvPr/>
-        </p:nvSpPr>
-        <p:spPr>
-          <a:xfrm>
-            <a:off x="8214969" y="6451092"/>
+          <p:cNvPr id="19" name="TextBox 18"/>
+          <p:cNvSpPr txBox="1"/>
+          <p:nvPr/>
+        </p:nvSpPr>
+        <p:spPr>
+          <a:xfrm>
+            <a:off x="8148218" y="6451092"/>
             <a:ext cx="754380" cy="219456"/>
           </a:xfrm>
           <a:prstGeom prst="rect">
@@ -7299,21 +7333,21 @@
                 </a:solidFill>
                 <a:latin typeface="Helvetica Neue"/>
               </a:rPr>
-              <a:t>STEP 19</a:t>
-            </a:r>
-          </a:p>
-        </p:txBody>
-      </p:sp>
-      <p:sp>
-        <p:nvSpPr>
-          <p:cNvPr id="19" name="TextBox 18"/>
-          <p:cNvSpPr txBox="1"/>
-          <p:nvPr/>
-        </p:nvSpPr>
-        <p:spPr>
-          <a:xfrm>
-            <a:off x="9088221" y="6460236"/>
-            <a:ext cx="2362809" cy="219456"/>
+              <a:t>STEP 21</a:t>
+            </a:r>
+          </a:p>
+        </p:txBody>
+      </p:sp>
+      <p:sp>
+        <p:nvSpPr>
+          <p:cNvPr id="20" name="TextBox 19"/>
+          <p:cNvSpPr txBox="1"/>
+          <p:nvPr/>
+        </p:nvSpPr>
+        <p:spPr>
+          <a:xfrm>
+            <a:off x="9021470" y="6460236"/>
+            <a:ext cx="2429560" cy="219456"/>
           </a:xfrm>
           <a:prstGeom prst="rect">
             <a:avLst/>
@@ -7334,7 +7368,42 @@
                 </a:solidFill>
                 <a:latin typeface="Helvetica Neue"/>
               </a:rPr>
-              <a:t>Feed it an off-topic ticket</a:t>
+              <a:t>YOUR KNOB: set the threshold</a:t>
+            </a:r>
+          </a:p>
+        </p:txBody>
+      </p:sp>
+      <p:sp>
+        <p:nvSpPr>
+          <p:cNvPr id="21" name="TextBox 20"/>
+          <p:cNvSpPr txBox="1"/>
+          <p:nvPr/>
+        </p:nvSpPr>
+        <p:spPr>
+          <a:xfrm>
+            <a:off x="640080" y="6016752"/>
+            <a:ext cx="10881360" cy="365760"/>
+          </a:xfrm>
+          <a:prstGeom prst="rect">
+            <a:avLst/>
+          </a:prstGeom>
+          <a:noFill/>
+        </p:spPr>
+        <p:txBody>
+          <a:bodyPr wrap="square" lIns="0" rIns="0" tIns="0" bIns="0">
+            <a:spAutoFit/>
+          </a:bodyPr>
+          <a:lstStyle/>
+          <a:p>
+            <a:pPr algn="ctr"/>
+            <a:r>
+              <a:rPr sz="1500" b="0" i="1">
+                <a:solidFill>
+                  <a:srgbClr val="475569"/>
+                </a:solidFill>
+                <a:latin typeface="Helvetica Neue"/>
+              </a:rPr>
+              <a:t>Accuracy is a property of the model. The right threshold is a property of the business.</a:t>
             </a:r>
           </a:p>
         </p:txBody>
@@ -7383,11 +7452,11 @@
             <a:r>
               <a:rPr sz="1250" b="1" i="0" spc="220">
                 <a:solidFill>
-                  <a:srgbClr val="059669"/>
-                </a:solidFill>
-                <a:latin typeface="Helvetica Neue"/>
-              </a:rPr>
-              <a:t>DECIDE</a:t>
+                  <a:srgbClr val="4F46E5"/>
+                </a:solidFill>
+                <a:latin typeface="Helvetica Neue"/>
+              </a:rPr>
+              <a:t>FULL CIRCLE</a:t>
             </a:r>
           </a:p>
         </p:txBody>
@@ -7401,7 +7470,7 @@
         <p:spPr>
           <a:xfrm>
             <a:off x="640080" y="758952"/>
-            <a:ext cx="7680960" cy="704088"/>
+            <a:ext cx="10972800" cy="704088"/>
           </a:xfrm>
           <a:prstGeom prst="rect">
             <a:avLst/>
@@ -7416,13 +7485,13 @@
           <a:p>
             <a:pPr algn="l"/>
             <a:r>
-              <a:rPr sz="2650" b="1" i="0">
+              <a:rPr sz="2900" b="1" i="0">
                 <a:solidFill>
                   <a:srgbClr val="0F172A"/>
                 </a:solidFill>
                 <a:latin typeface="Helvetica Neue"/>
               </a:rPr>
-              <a:t>What a mistake costs decides the setting.</a:t>
+              <a:t>What we shipped today, for $0.</a:t>
             </a:r>
           </a:p>
         </p:txBody>
@@ -7457,377 +7526,14 @@
                 </a:solidFill>
                 <a:latin typeface="Helvetica Neue"/>
               </a:rPr>
-              <a:t>Same copilot, same tickets, six companies. Ask your neighbour: for the hospital, high bar or low?</a:t>
-            </a:r>
-          </a:p>
-        </p:txBody>
-      </p:sp>
-      <p:sp>
-        <p:nvSpPr>
-          <p:cNvPr id="5" name="Rounded Rectangle 4"/>
-          <p:cNvSpPr/>
-          <p:nvPr/>
-        </p:nvSpPr>
-        <p:spPr>
-          <a:xfrm>
-            <a:off x="8705088" y="591616"/>
-            <a:ext cx="1975104" cy="23774"/>
-          </a:xfrm>
-          <a:prstGeom prst="roundRect">
-            <a:avLst/>
-          </a:prstGeom>
-          <a:solidFill>
-            <a:srgbClr val="E9EBF0"/>
-          </a:solidFill>
-          <a:ln>
-            <a:noFill/>
-          </a:ln>
-        </p:spPr>
-        <p:style>
-          <a:lnRef idx="1">
-            <a:schemeClr val="accent1"/>
-          </a:lnRef>
-          <a:fillRef idx="3">
-            <a:schemeClr val="accent1"/>
-          </a:fillRef>
-          <a:effectRef idx="2">
-            <a:schemeClr val="accent1"/>
-          </a:effectRef>
-          <a:fontRef idx="minor">
-            <a:schemeClr val="lt1"/>
-          </a:fontRef>
-        </p:style>
-        <p:txBody>
-          <a:bodyPr rtlCol="0" anchor="ctr"/>
-          <a:lstStyle/>
-          <a:p>
-            <a:pPr algn="ctr"/>
-          </a:p>
-        </p:txBody>
-      </p:sp>
-      <p:sp>
-        <p:nvSpPr>
-          <p:cNvPr id="6" name="Rounded Rectangle 5"/>
-          <p:cNvSpPr/>
-          <p:nvPr/>
-        </p:nvSpPr>
-        <p:spPr>
-          <a:xfrm>
-            <a:off x="8586215" y="475488"/>
-            <a:ext cx="256032" cy="256032"/>
-          </a:xfrm>
-          <a:prstGeom prst="roundRect">
-            <a:avLst>
-              <a:gd name="adj" fmla="val 32000"/>
-            </a:avLst>
-          </a:prstGeom>
-          <a:solidFill>
-            <a:srgbClr val="0EA5E9"/>
-          </a:solidFill>
-          <a:ln>
-            <a:noFill/>
-          </a:ln>
-        </p:spPr>
-        <p:style>
-          <a:lnRef idx="1">
-            <a:schemeClr val="accent1"/>
-          </a:lnRef>
-          <a:fillRef idx="3">
-            <a:schemeClr val="accent1"/>
-          </a:fillRef>
-          <a:effectRef idx="2">
-            <a:schemeClr val="accent1"/>
-          </a:effectRef>
-          <a:fontRef idx="minor">
-            <a:schemeClr val="lt1"/>
-          </a:fontRef>
-        </p:style>
-        <p:txBody>
-          <a:bodyPr rtlCol="0" anchor="ctr"/>
-          <a:lstStyle/>
-          <a:p>
-            <a:pPr algn="ctr"/>
-          </a:p>
-        </p:txBody>
-      </p:sp>
-      <p:sp>
-        <p:nvSpPr>
-          <p:cNvPr id="7" name="TextBox 6"/>
-          <p:cNvSpPr txBox="1"/>
-          <p:nvPr/>
-        </p:nvSpPr>
-        <p:spPr>
-          <a:xfrm>
-            <a:off x="8531351" y="475488"/>
-            <a:ext cx="365760" cy="256032"/>
-          </a:xfrm>
-          <a:prstGeom prst="rect">
-            <a:avLst/>
-          </a:prstGeom>
-          <a:noFill/>
-        </p:spPr>
-        <p:txBody>
-          <a:bodyPr wrap="square" lIns="0" rIns="0" tIns="0" bIns="0">
-            <a:spAutoFit/>
-          </a:bodyPr>
-          <a:lstStyle/>
-          <a:p>
-            <a:pPr algn="ctr"/>
-            <a:r>
-              <a:rPr sz="1050" b="1" i="0">
-                <a:solidFill>
-                  <a:srgbClr val="FFFFFF"/>
-                </a:solidFill>
-                <a:latin typeface="Helvetica Neue"/>
-              </a:rPr>
-              <a:t>1</a:t>
-            </a:r>
-          </a:p>
-        </p:txBody>
-      </p:sp>
-      <p:sp>
-        <p:nvSpPr>
-          <p:cNvPr id="8" name="Rounded Rectangle 7"/>
-          <p:cNvSpPr/>
-          <p:nvPr/>
-        </p:nvSpPr>
-        <p:spPr>
-          <a:xfrm>
-            <a:off x="9244584" y="475488"/>
-            <a:ext cx="256032" cy="256032"/>
-          </a:xfrm>
-          <a:prstGeom prst="roundRect">
-            <a:avLst>
-              <a:gd name="adj" fmla="val 32000"/>
-            </a:avLst>
-          </a:prstGeom>
-          <a:solidFill>
-            <a:srgbClr val="D97706"/>
-          </a:solidFill>
-          <a:ln>
-            <a:noFill/>
-          </a:ln>
-        </p:spPr>
-        <p:style>
-          <a:lnRef idx="1">
-            <a:schemeClr val="accent1"/>
-          </a:lnRef>
-          <a:fillRef idx="3">
-            <a:schemeClr val="accent1"/>
-          </a:fillRef>
-          <a:effectRef idx="2">
-            <a:schemeClr val="accent1"/>
-          </a:effectRef>
-          <a:fontRef idx="minor">
-            <a:schemeClr val="lt1"/>
-          </a:fontRef>
-        </p:style>
-        <p:txBody>
-          <a:bodyPr rtlCol="0" anchor="ctr"/>
-          <a:lstStyle/>
-          <a:p>
-            <a:pPr algn="ctr"/>
-          </a:p>
-        </p:txBody>
-      </p:sp>
-      <p:sp>
-        <p:nvSpPr>
-          <p:cNvPr id="9" name="TextBox 8"/>
-          <p:cNvSpPr txBox="1"/>
-          <p:nvPr/>
-        </p:nvSpPr>
-        <p:spPr>
-          <a:xfrm>
-            <a:off x="9189719" y="475488"/>
-            <a:ext cx="365760" cy="256032"/>
-          </a:xfrm>
-          <a:prstGeom prst="rect">
-            <a:avLst/>
-          </a:prstGeom>
-          <a:noFill/>
-        </p:spPr>
-        <p:txBody>
-          <a:bodyPr wrap="square" lIns="0" rIns="0" tIns="0" bIns="0">
-            <a:spAutoFit/>
-          </a:bodyPr>
-          <a:lstStyle/>
-          <a:p>
-            <a:pPr algn="ctr"/>
-            <a:r>
-              <a:rPr sz="1050" b="1" i="0">
-                <a:solidFill>
-                  <a:srgbClr val="FFFFFF"/>
-                </a:solidFill>
-                <a:latin typeface="Helvetica Neue"/>
-              </a:rPr>
-              <a:t>2</a:t>
-            </a:r>
-          </a:p>
-        </p:txBody>
-      </p:sp>
-      <p:sp>
-        <p:nvSpPr>
-          <p:cNvPr id="10" name="Rounded Rectangle 9"/>
-          <p:cNvSpPr/>
-          <p:nvPr/>
-        </p:nvSpPr>
-        <p:spPr>
-          <a:xfrm>
-            <a:off x="9902951" y="475488"/>
-            <a:ext cx="256032" cy="256032"/>
-          </a:xfrm>
-          <a:prstGeom prst="roundRect">
-            <a:avLst>
-              <a:gd name="adj" fmla="val 32000"/>
-            </a:avLst>
-          </a:prstGeom>
-          <a:solidFill>
-            <a:srgbClr val="7C3AED"/>
-          </a:solidFill>
-          <a:ln>
-            <a:noFill/>
-          </a:ln>
-        </p:spPr>
-        <p:style>
-          <a:lnRef idx="1">
-            <a:schemeClr val="accent1"/>
-          </a:lnRef>
-          <a:fillRef idx="3">
-            <a:schemeClr val="accent1"/>
-          </a:fillRef>
-          <a:effectRef idx="2">
-            <a:schemeClr val="accent1"/>
-          </a:effectRef>
-          <a:fontRef idx="minor">
-            <a:schemeClr val="lt1"/>
-          </a:fontRef>
-        </p:style>
-        <p:txBody>
-          <a:bodyPr rtlCol="0" anchor="ctr"/>
-          <a:lstStyle/>
-          <a:p>
-            <a:pPr algn="ctr"/>
-          </a:p>
-        </p:txBody>
-      </p:sp>
-      <p:sp>
-        <p:nvSpPr>
-          <p:cNvPr id="11" name="TextBox 10"/>
-          <p:cNvSpPr txBox="1"/>
-          <p:nvPr/>
-        </p:nvSpPr>
-        <p:spPr>
-          <a:xfrm>
-            <a:off x="9848087" y="475488"/>
-            <a:ext cx="365760" cy="256032"/>
-          </a:xfrm>
-          <a:prstGeom prst="rect">
-            <a:avLst/>
-          </a:prstGeom>
-          <a:noFill/>
-        </p:spPr>
-        <p:txBody>
-          <a:bodyPr wrap="square" lIns="0" rIns="0" tIns="0" bIns="0">
-            <a:spAutoFit/>
-          </a:bodyPr>
-          <a:lstStyle/>
-          <a:p>
-            <a:pPr algn="ctr"/>
-            <a:r>
-              <a:rPr sz="1050" b="1" i="0">
-                <a:solidFill>
-                  <a:srgbClr val="FFFFFF"/>
-                </a:solidFill>
-                <a:latin typeface="Helvetica Neue"/>
-              </a:rPr>
-              <a:t>3</a:t>
-            </a:r>
-          </a:p>
-        </p:txBody>
-      </p:sp>
-      <p:sp>
-        <p:nvSpPr>
-          <p:cNvPr id="12" name="Rounded Rectangle 11"/>
-          <p:cNvSpPr/>
-          <p:nvPr/>
-        </p:nvSpPr>
-        <p:spPr>
-          <a:xfrm>
-            <a:off x="10524744" y="438912"/>
-            <a:ext cx="329184" cy="329184"/>
-          </a:xfrm>
-          <a:prstGeom prst="roundRect">
-            <a:avLst>
-              <a:gd name="adj" fmla="val 32000"/>
-            </a:avLst>
-          </a:prstGeom>
-          <a:solidFill>
-            <a:srgbClr val="059669"/>
-          </a:solidFill>
-          <a:ln>
-            <a:noFill/>
-          </a:ln>
-        </p:spPr>
-        <p:style>
-          <a:lnRef idx="1">
-            <a:schemeClr val="accent1"/>
-          </a:lnRef>
-          <a:fillRef idx="3">
-            <a:schemeClr val="accent1"/>
-          </a:fillRef>
-          <a:effectRef idx="2">
-            <a:schemeClr val="accent1"/>
-          </a:effectRef>
-          <a:fontRef idx="minor">
-            <a:schemeClr val="lt1"/>
-          </a:fontRef>
-        </p:style>
-        <p:txBody>
-          <a:bodyPr rtlCol="0" anchor="ctr"/>
-          <a:lstStyle/>
-          <a:p>
-            <a:pPr algn="ctr"/>
-          </a:p>
-        </p:txBody>
-      </p:sp>
-      <p:sp>
-        <p:nvSpPr>
-          <p:cNvPr id="13" name="TextBox 12"/>
-          <p:cNvSpPr txBox="1"/>
-          <p:nvPr/>
-        </p:nvSpPr>
-        <p:spPr>
-          <a:xfrm>
-            <a:off x="10469880" y="475488"/>
-            <a:ext cx="438912" cy="256032"/>
-          </a:xfrm>
-          <a:prstGeom prst="rect">
-            <a:avLst/>
-          </a:prstGeom>
-          <a:noFill/>
-        </p:spPr>
-        <p:txBody>
-          <a:bodyPr wrap="square" lIns="0" rIns="0" tIns="0" bIns="0">
-            <a:spAutoFit/>
-          </a:bodyPr>
-          <a:lstStyle/>
-          <a:p>
-            <a:pPr algn="ctr"/>
-            <a:r>
-              <a:rPr sz="1300" b="1" i="0">
-                <a:solidFill>
-                  <a:srgbClr val="FFFFFF"/>
-                </a:solidFill>
-                <a:latin typeface="Helvetica Neue"/>
-              </a:rPr>
-              <a:t>4</a:t>
-            </a:r>
-          </a:p>
-        </p:txBody>
-      </p:sp>
-      <p:sp>
-        <p:nvSpPr>
-          <p:cNvPr id="14" name="TextBox 13"/>
+              <a:t>No training data. No training run. No GPU bill. One afternoon.</a:t>
+            </a:r>
+          </a:p>
+        </p:txBody>
+      </p:sp>
+      <p:sp>
+        <p:nvSpPr>
+          <p:cNvPr id="5" name="TextBox 4"/>
           <p:cNvSpPr txBox="1"/>
           <p:nvPr/>
         </p:nvSpPr>
@@ -7862,7 +7568,7 @@
       </p:sp>
       <p:pic>
         <p:nvPicPr>
-          <p:cNvPr id="15" name="Picture 14" descr="fig_game.png"/>
+          <p:cNvPr id="6" name="Picture 5" descr="d_shipped.png"/>
           <p:cNvPicPr>
             <a:picLocks noChangeAspect="1"/>
           </p:cNvPicPr>
@@ -7876,8 +7582,8 @@
         </p:blipFill>
         <p:spPr>
           <a:xfrm>
-            <a:off x="2207847" y="2011680"/>
-            <a:ext cx="7775999" cy="3931920"/>
+            <a:off x="518007" y="2943310"/>
+            <a:ext cx="11155680" cy="1885778"/>
           </a:xfrm>
           <a:prstGeom prst="rect">
             <a:avLst/>
@@ -7886,230 +7592,35 @@
       </p:pic>
       <p:sp>
         <p:nvSpPr>
-          <p:cNvPr id="16" name="Rounded Rectangle 15"/>
-          <p:cNvSpPr/>
-          <p:nvPr/>
-        </p:nvSpPr>
-        <p:spPr>
-          <a:xfrm>
-            <a:off x="7105802" y="6345936"/>
-            <a:ext cx="4445812" cy="365760"/>
-          </a:xfrm>
-          <a:prstGeom prst="roundRect">
-            <a:avLst>
-              <a:gd name="adj" fmla="val 44000"/>
-            </a:avLst>
-          </a:prstGeom>
-          <a:solidFill>
-            <a:srgbClr val="059669"/>
-          </a:solidFill>
-          <a:ln>
-            <a:noFill/>
-          </a:ln>
-        </p:spPr>
-        <p:style>
-          <a:lnRef idx="1">
-            <a:schemeClr val="accent1"/>
-          </a:lnRef>
-          <a:fillRef idx="3">
-            <a:schemeClr val="accent1"/>
-          </a:fillRef>
-          <a:effectRef idx="2">
-            <a:schemeClr val="accent1"/>
-          </a:effectRef>
-          <a:fontRef idx="minor">
-            <a:schemeClr val="lt1"/>
-          </a:fontRef>
-        </p:style>
-        <p:txBody>
-          <a:bodyPr rtlCol="0" anchor="ctr"/>
+          <p:cNvPr id="7" name="TextBox 6"/>
+          <p:cNvSpPr txBox="1"/>
+          <p:nvPr/>
+        </p:nvSpPr>
+        <p:spPr>
+          <a:xfrm>
+            <a:off x="640080" y="5760720"/>
+            <a:ext cx="10881360" cy="457200"/>
+          </a:xfrm>
+          <a:prstGeom prst="rect">
+            <a:avLst/>
+          </a:prstGeom>
+          <a:noFill/>
+        </p:spPr>
+        <p:txBody>
+          <a:bodyPr wrap="square" lIns="0" rIns="0" tIns="0" bIns="0">
+            <a:spAutoFit/>
+          </a:bodyPr>
           <a:lstStyle/>
           <a:p>
             <a:pPr algn="ctr"/>
-          </a:p>
-        </p:txBody>
-      </p:sp>
-      <p:sp>
-        <p:nvSpPr>
-          <p:cNvPr id="17" name="Rounded Rectangle 16"/>
-          <p:cNvSpPr/>
-          <p:nvPr/>
-        </p:nvSpPr>
-        <p:spPr>
-          <a:xfrm>
-            <a:off x="8148218" y="6396228"/>
-            <a:ext cx="754380" cy="265176"/>
-          </a:xfrm>
-          <a:prstGeom prst="roundRect">
-            <a:avLst>
-              <a:gd name="adj" fmla="val 44000"/>
-            </a:avLst>
-          </a:prstGeom>
-          <a:solidFill>
-            <a:srgbClr val="064E3B"/>
-          </a:solidFill>
-          <a:ln>
-            <a:noFill/>
-          </a:ln>
-        </p:spPr>
-        <p:style>
-          <a:lnRef idx="1">
-            <a:schemeClr val="accent1"/>
-          </a:lnRef>
-          <a:fillRef idx="3">
-            <a:schemeClr val="accent1"/>
-          </a:fillRef>
-          <a:effectRef idx="2">
-            <a:schemeClr val="accent1"/>
-          </a:effectRef>
-          <a:fontRef idx="minor">
-            <a:schemeClr val="lt1"/>
-          </a:fontRef>
-        </p:style>
-        <p:txBody>
-          <a:bodyPr rtlCol="0" anchor="ctr"/>
-          <a:lstStyle/>
-          <a:p>
-            <a:pPr algn="ctr"/>
-          </a:p>
-        </p:txBody>
-      </p:sp>
-      <p:sp>
-        <p:nvSpPr>
-          <p:cNvPr id="18" name="TextBox 17"/>
-          <p:cNvSpPr txBox="1"/>
-          <p:nvPr/>
-        </p:nvSpPr>
-        <p:spPr>
-          <a:xfrm>
-            <a:off x="7261250" y="6460236"/>
-            <a:ext cx="914400" cy="219456"/>
-          </a:xfrm>
-          <a:prstGeom prst="rect">
-            <a:avLst/>
-          </a:prstGeom>
-          <a:noFill/>
-        </p:spPr>
-        <p:txBody>
-          <a:bodyPr wrap="none" lIns="0" rIns="0" tIns="0" bIns="0">
-            <a:spAutoFit/>
-          </a:bodyPr>
-          <a:lstStyle/>
-          <a:p>
-            <a:pPr algn="l"/>
-            <a:r>
-              <a:rPr sz="950" b="1" i="0">
-                <a:solidFill>
-                  <a:srgbClr val="A7F3D0"/>
-                </a:solidFill>
-                <a:latin typeface="Helvetica Neue"/>
-              </a:rPr>
-              <a:t>▶ NOTEBOOK</a:t>
-            </a:r>
-          </a:p>
-        </p:txBody>
-      </p:sp>
-      <p:sp>
-        <p:nvSpPr>
-          <p:cNvPr id="19" name="TextBox 18"/>
-          <p:cNvSpPr txBox="1"/>
-          <p:nvPr/>
-        </p:nvSpPr>
-        <p:spPr>
-          <a:xfrm>
-            <a:off x="8148218" y="6451092"/>
-            <a:ext cx="754380" cy="219456"/>
-          </a:xfrm>
-          <a:prstGeom prst="rect">
-            <a:avLst/>
-          </a:prstGeom>
-          <a:noFill/>
-        </p:spPr>
-        <p:txBody>
-          <a:bodyPr wrap="none" lIns="0" rIns="0" tIns="0" bIns="0">
-            <a:spAutoFit/>
-          </a:bodyPr>
-          <a:lstStyle/>
-          <a:p>
-            <a:pPr algn="ctr"/>
-            <a:r>
-              <a:rPr sz="1100" b="1" i="0">
-                <a:solidFill>
-                  <a:srgbClr val="FFFFFF"/>
-                </a:solidFill>
-                <a:latin typeface="Helvetica Neue"/>
-              </a:rPr>
-              <a:t>STEP 21</a:t>
-            </a:r>
-          </a:p>
-        </p:txBody>
-      </p:sp>
-      <p:sp>
-        <p:nvSpPr>
-          <p:cNvPr id="20" name="TextBox 19"/>
-          <p:cNvSpPr txBox="1"/>
-          <p:nvPr/>
-        </p:nvSpPr>
-        <p:spPr>
-          <a:xfrm>
-            <a:off x="9021470" y="6460236"/>
-            <a:ext cx="2429560" cy="219456"/>
-          </a:xfrm>
-          <a:prstGeom prst="rect">
-            <a:avLst/>
-          </a:prstGeom>
-          <a:noFill/>
-        </p:spPr>
-        <p:txBody>
-          <a:bodyPr wrap="none" lIns="0" rIns="0" tIns="0" bIns="0">
-            <a:spAutoFit/>
-          </a:bodyPr>
-          <a:lstStyle/>
-          <a:p>
-            <a:pPr algn="l"/>
-            <a:r>
-              <a:rPr sz="1000" b="1" i="0">
-                <a:solidFill>
-                  <a:srgbClr val="FFFFFF"/>
-                </a:solidFill>
-                <a:latin typeface="Helvetica Neue"/>
-              </a:rPr>
-              <a:t>YOUR KNOB: set the threshold</a:t>
-            </a:r>
-          </a:p>
-        </p:txBody>
-      </p:sp>
-      <p:sp>
-        <p:nvSpPr>
-          <p:cNvPr id="21" name="TextBox 20"/>
-          <p:cNvSpPr txBox="1"/>
-          <p:nvPr/>
-        </p:nvSpPr>
-        <p:spPr>
-          <a:xfrm>
-            <a:off x="640080" y="6016752"/>
-            <a:ext cx="10881360" cy="365760"/>
-          </a:xfrm>
-          <a:prstGeom prst="rect">
-            <a:avLst/>
-          </a:prstGeom>
-          <a:noFill/>
-        </p:spPr>
-        <p:txBody>
-          <a:bodyPr wrap="square" lIns="0" rIns="0" tIns="0" bIns="0">
-            <a:spAutoFit/>
-          </a:bodyPr>
-          <a:lstStyle/>
-          <a:p>
-            <a:pPr algn="ctr"/>
-            <a:r>
-              <a:rPr sz="1500" b="0" i="1">
-                <a:solidFill>
-                  <a:srgbClr val="475569"/>
-                </a:solidFill>
-                <a:latin typeface="Helvetica Neue"/>
-              </a:rPr>
-              <a:t>Accuracy is a property of the model. The right threshold is a property of the business.</a:t>
+            <a:r>
+              <a:rPr sz="1600" b="0" i="1">
+                <a:solidFill>
+                  <a:srgbClr val="0F172A"/>
+                </a:solidFill>
+                <a:latin typeface="Helvetica Neue"/>
+              </a:rPr>
+              <a:t>Someone else already spent millions teaching a model to read English. Your job is to point it at your problem, cheaply, and know where it breaks.</a:t>
             </a:r>
           </a:p>
         </p:txBody>
@@ -8162,7 +7673,7 @@
                 </a:solidFill>
                 <a:latin typeface="Helvetica Neue"/>
               </a:rPr>
-              <a:t>FULL CIRCLE</a:t>
+              <a:t>BEFORE WE OPEN IT UP</a:t>
             </a:r>
           </a:p>
         </p:txBody>
@@ -8197,7 +7708,7 @@
                 </a:solidFill>
                 <a:latin typeface="Helvetica Neue"/>
               </a:rPr>
-              <a:t>What we shipped today, for $0.</a:t>
+              <a:t>What you actually saw tonight.</a:t>
             </a:r>
           </a:p>
         </p:txBody>
@@ -8232,7 +7743,7 @@
                 </a:solidFill>
                 <a:latin typeface="Helvetica Neue"/>
               </a:rPr>
-              <a:t>No training data. No training run. No GPU bill. One afternoon.</a:t>
+              <a:t>Hold both columns in your head. We are about to need them.</a:t>
             </a:r>
           </a:p>
         </p:txBody>
@@ -8274,7 +7785,7 @@
       </p:sp>
       <p:pic>
         <p:nvPicPr>
-          <p:cNvPr id="6" name="Picture 5" descr="d_shipped.png"/>
+          <p:cNvPr id="6" name="Picture 5" descr="d_saw.png"/>
           <p:cNvPicPr>
             <a:picLocks noChangeAspect="1"/>
           </p:cNvPicPr>
@@ -8288,49 +7799,14 @@
         </p:blipFill>
         <p:spPr>
           <a:xfrm>
-            <a:off x="518007" y="2943310"/>
-            <a:ext cx="11155680" cy="1885778"/>
+            <a:off x="518007" y="3252244"/>
+            <a:ext cx="11155680" cy="1862271"/>
           </a:xfrm>
           <a:prstGeom prst="rect">
             <a:avLst/>
           </a:prstGeom>
         </p:spPr>
       </p:pic>
-      <p:sp>
-        <p:nvSpPr>
-          <p:cNvPr id="7" name="TextBox 6"/>
-          <p:cNvSpPr txBox="1"/>
-          <p:nvPr/>
-        </p:nvSpPr>
-        <p:spPr>
-          <a:xfrm>
-            <a:off x="640080" y="5760720"/>
-            <a:ext cx="10881360" cy="457200"/>
-          </a:xfrm>
-          <a:prstGeom prst="rect">
-            <a:avLst/>
-          </a:prstGeom>
-          <a:noFill/>
-        </p:spPr>
-        <p:txBody>
-          <a:bodyPr wrap="square" lIns="0" rIns="0" tIns="0" bIns="0">
-            <a:spAutoFit/>
-          </a:bodyPr>
-          <a:lstStyle/>
-          <a:p>
-            <a:pPr algn="ctr"/>
-            <a:r>
-              <a:rPr sz="1600" b="0" i="1">
-                <a:solidFill>
-                  <a:srgbClr val="0F172A"/>
-                </a:solidFill>
-                <a:latin typeface="Helvetica Neue"/>
-              </a:rPr>
-              <a:t>Someone else already spent millions teaching a model to read English. Your job is to point it at your problem, cheaply, and know where it breaks.</a:t>
-            </a:r>
-          </a:p>
-        </p:txBody>
-      </p:sp>
     </p:spTree>
   </p:cSld>
   <p:clrMapOvr>
@@ -8375,11 +7851,11 @@
             <a:r>
               <a:rPr sz="1250" b="1" i="0" spc="220">
                 <a:solidFill>
-                  <a:srgbClr val="4F46E5"/>
-                </a:solidFill>
-                <a:latin typeface="Helvetica Neue"/>
-              </a:rPr>
-              <a:t>BEFORE WE OPEN IT UP</a:t>
+                  <a:srgbClr val="E11D48"/>
+                </a:solidFill>
+                <a:latin typeface="Helvetica Neue"/>
+              </a:rPr>
+              <a:t>DISCUSSION</a:t>
             </a:r>
           </a:p>
         </p:txBody>
@@ -8414,7 +7890,7 @@
                 </a:solidFill>
                 <a:latin typeface="Helvetica Neue"/>
               </a:rPr>
-              <a:t>What you actually saw tonight.</a:t>
+              <a:t>Last week, a model did this on its own.</a:t>
             </a:r>
           </a:p>
         </p:txBody>
@@ -8449,7 +7925,7 @@
                 </a:solidFill>
                 <a:latin typeface="Helvetica Neue"/>
               </a:rPr>
-              <a:t>Hold both columns in your head. We are about to need them.</a:t>
+              <a:t>Not a thought experiment. This happened between the 16th and the 21st of July, six days ago.</a:t>
             </a:r>
           </a:p>
         </p:txBody>
@@ -8491,7 +7967,7 @@
       </p:sp>
       <p:pic>
         <p:nvPicPr>
-          <p:cNvPr id="6" name="Picture 5" descr="d_saw.png"/>
+          <p:cNvPr id="6" name="Picture 5" descr="d_incident.png"/>
           <p:cNvPicPr>
             <a:picLocks noChangeAspect="1"/>
           </p:cNvPicPr>
@@ -8505,14 +7981,49 @@
         </p:blipFill>
         <p:spPr>
           <a:xfrm>
-            <a:off x="518007" y="3252244"/>
-            <a:ext cx="11155680" cy="1862271"/>
+            <a:off x="518007" y="2056061"/>
+            <a:ext cx="11155680" cy="3934597"/>
           </a:xfrm>
           <a:prstGeom prst="rect">
             <a:avLst/>
           </a:prstGeom>
         </p:spPr>
       </p:pic>
+      <p:sp>
+        <p:nvSpPr>
+          <p:cNvPr id="7" name="TextBox 6"/>
+          <p:cNvSpPr txBox="1"/>
+          <p:nvPr/>
+        </p:nvSpPr>
+        <p:spPr>
+          <a:xfrm>
+            <a:off x="640080" y="6108192"/>
+            <a:ext cx="10881360" cy="365760"/>
+          </a:xfrm>
+          <a:prstGeom prst="rect">
+            <a:avLst/>
+          </a:prstGeom>
+          <a:noFill/>
+        </p:spPr>
+        <p:txBody>
+          <a:bodyPr wrap="square" lIns="0" rIns="0" tIns="0" bIns="0">
+            <a:spAutoFit/>
+          </a:bodyPr>
+          <a:lstStyle/>
+          <a:p>
+            <a:pPr algn="ctr"/>
+            <a:r>
+              <a:rPr sz="1100" b="0" i="0">
+                <a:solidFill>
+                  <a:srgbClr val="BCC1CC"/>
+                </a:solidFill>
+                <a:latin typeface="Helvetica Neue"/>
+              </a:rPr>
+              <a:t>Sources: OpenAI incident report - Hugging Face disclosure - CNBC, Axios, The Hacker News, 21-22 July 2026</a:t>
+            </a:r>
+          </a:p>
+        </p:txBody>
+      </p:sp>
     </p:spTree>
   </p:cSld>
   <p:clrMapOvr>
@@ -8522,223 +8033,6 @@
 </file>
 
 <file path=ppt/slides/slide18.xml><?xml version="1.0" encoding="utf-8"?>
-<p:sld xmlns:a="http://schemas.openxmlformats.org/drawingml/2006/main" xmlns:p="http://schemas.openxmlformats.org/presentationml/2006/main" xmlns:r="http://schemas.openxmlformats.org/officeDocument/2006/relationships">
-  <p:cSld>
-    <p:spTree>
-      <p:nvGrpSpPr>
-        <p:cNvPr id="1" name=""/>
-        <p:cNvGrpSpPr/>
-        <p:nvPr/>
-      </p:nvGrpSpPr>
-      <p:grpSpPr/>
-      <p:sp>
-        <p:nvSpPr>
-          <p:cNvPr id="2" name="TextBox 1"/>
-          <p:cNvSpPr txBox="1"/>
-          <p:nvPr/>
-        </p:nvSpPr>
-        <p:spPr>
-          <a:xfrm>
-            <a:off x="640080" y="457200"/>
-            <a:ext cx="6766560" cy="274320"/>
-          </a:xfrm>
-          <a:prstGeom prst="rect">
-            <a:avLst/>
-          </a:prstGeom>
-          <a:noFill/>
-        </p:spPr>
-        <p:txBody>
-          <a:bodyPr wrap="square" lIns="0" rIns="0" tIns="0" bIns="0">
-            <a:spAutoFit/>
-          </a:bodyPr>
-          <a:lstStyle/>
-          <a:p>
-            <a:pPr algn="l"/>
-            <a:r>
-              <a:rPr sz="1250" b="1" i="0" spc="220">
-                <a:solidFill>
-                  <a:srgbClr val="E11D48"/>
-                </a:solidFill>
-                <a:latin typeface="Helvetica Neue"/>
-              </a:rPr>
-              <a:t>DISCUSSION</a:t>
-            </a:r>
-          </a:p>
-        </p:txBody>
-      </p:sp>
-      <p:sp>
-        <p:nvSpPr>
-          <p:cNvPr id="3" name="TextBox 2"/>
-          <p:cNvSpPr txBox="1"/>
-          <p:nvPr/>
-        </p:nvSpPr>
-        <p:spPr>
-          <a:xfrm>
-            <a:off x="640080" y="758952"/>
-            <a:ext cx="10972800" cy="704088"/>
-          </a:xfrm>
-          <a:prstGeom prst="rect">
-            <a:avLst/>
-          </a:prstGeom>
-          <a:noFill/>
-        </p:spPr>
-        <p:txBody>
-          <a:bodyPr wrap="square" lIns="0" rIns="0" tIns="0" bIns="0">
-            <a:spAutoFit/>
-          </a:bodyPr>
-          <a:lstStyle/>
-          <a:p>
-            <a:pPr algn="l"/>
-            <a:r>
-              <a:rPr sz="2900" b="1" i="0">
-                <a:solidFill>
-                  <a:srgbClr val="0F172A"/>
-                </a:solidFill>
-                <a:latin typeface="Helvetica Neue"/>
-              </a:rPr>
-              <a:t>Last week, a model did this on its own.</a:t>
-            </a:r>
-          </a:p>
-        </p:txBody>
-      </p:sp>
-      <p:sp>
-        <p:nvSpPr>
-          <p:cNvPr id="4" name="TextBox 3"/>
-          <p:cNvSpPr txBox="1"/>
-          <p:nvPr/>
-        </p:nvSpPr>
-        <p:spPr>
-          <a:xfrm>
-            <a:off x="640080" y="1417320"/>
-            <a:ext cx="10424160" cy="457200"/>
-          </a:xfrm>
-          <a:prstGeom prst="rect">
-            <a:avLst/>
-          </a:prstGeom>
-          <a:noFill/>
-        </p:spPr>
-        <p:txBody>
-          <a:bodyPr wrap="square" lIns="0" rIns="0" tIns="0" bIns="0">
-            <a:spAutoFit/>
-          </a:bodyPr>
-          <a:lstStyle/>
-          <a:p>
-            <a:pPr algn="l"/>
-            <a:r>
-              <a:rPr sz="1500" b="0" i="0">
-                <a:solidFill>
-                  <a:srgbClr val="475569"/>
-                </a:solidFill>
-                <a:latin typeface="Helvetica Neue"/>
-              </a:rPr>
-              <a:t>Not a thought experiment. This happened between the 16th and the 21st of July, six days ago.</a:t>
-            </a:r>
-          </a:p>
-        </p:txBody>
-      </p:sp>
-      <p:sp>
-        <p:nvSpPr>
-          <p:cNvPr id="5" name="TextBox 4"/>
-          <p:cNvSpPr txBox="1"/>
-          <p:nvPr/>
-        </p:nvSpPr>
-        <p:spPr>
-          <a:xfrm>
-            <a:off x="640080" y="6492240"/>
-            <a:ext cx="8229600" cy="274320"/>
-          </a:xfrm>
-          <a:prstGeom prst="rect">
-            <a:avLst/>
-          </a:prstGeom>
-          <a:noFill/>
-        </p:spPr>
-        <p:txBody>
-          <a:bodyPr wrap="square" lIns="0" rIns="0" tIns="0" bIns="0">
-            <a:spAutoFit/>
-          </a:bodyPr>
-          <a:lstStyle/>
-          <a:p>
-            <a:pPr algn="l"/>
-            <a:r>
-              <a:rPr sz="900" b="0" i="0">
-                <a:solidFill>
-                  <a:srgbClr val="BCC1CC"/>
-                </a:solidFill>
-                <a:latin typeface="Helvetica Neue"/>
-              </a:rPr>
-              <a:t>ISBA 2411 · Natural Language Processing &amp; AI · Summer 2026</a:t>
-            </a:r>
-          </a:p>
-        </p:txBody>
-      </p:sp>
-      <p:pic>
-        <p:nvPicPr>
-          <p:cNvPr id="6" name="Picture 5" descr="d_incident.png"/>
-          <p:cNvPicPr>
-            <a:picLocks noChangeAspect="1"/>
-          </p:cNvPicPr>
-          <p:nvPr/>
-        </p:nvPicPr>
-        <p:blipFill>
-          <a:blip r:embed="rId2"/>
-          <a:stretch>
-            <a:fillRect/>
-          </a:stretch>
-        </p:blipFill>
-        <p:spPr>
-          <a:xfrm>
-            <a:off x="518007" y="2056061"/>
-            <a:ext cx="11155680" cy="3934597"/>
-          </a:xfrm>
-          <a:prstGeom prst="rect">
-            <a:avLst/>
-          </a:prstGeom>
-        </p:spPr>
-      </p:pic>
-      <p:sp>
-        <p:nvSpPr>
-          <p:cNvPr id="7" name="TextBox 6"/>
-          <p:cNvSpPr txBox="1"/>
-          <p:nvPr/>
-        </p:nvSpPr>
-        <p:spPr>
-          <a:xfrm>
-            <a:off x="640080" y="6108192"/>
-            <a:ext cx="10881360" cy="365760"/>
-          </a:xfrm>
-          <a:prstGeom prst="rect">
-            <a:avLst/>
-          </a:prstGeom>
-          <a:noFill/>
-        </p:spPr>
-        <p:txBody>
-          <a:bodyPr wrap="square" lIns="0" rIns="0" tIns="0" bIns="0">
-            <a:spAutoFit/>
-          </a:bodyPr>
-          <a:lstStyle/>
-          <a:p>
-            <a:pPr algn="ctr"/>
-            <a:r>
-              <a:rPr sz="1100" b="0" i="0">
-                <a:solidFill>
-                  <a:srgbClr val="BCC1CC"/>
-                </a:solidFill>
-                <a:latin typeface="Helvetica Neue"/>
-              </a:rPr>
-              <a:t>Sources: OpenAI incident report - Hugging Face disclosure - CNBC, Axios, The Hacker News, 21-22 July 2026</a:t>
-            </a:r>
-          </a:p>
-        </p:txBody>
-      </p:sp>
-    </p:spTree>
-  </p:cSld>
-  <p:clrMapOvr>
-    <a:masterClrMapping/>
-  </p:clrMapOvr>
-</p:sld>
-</file>
-
-<file path=ppt/slides/slide19.xml><?xml version="1.0" encoding="utf-8"?>
 <p:sld xmlns:a="http://schemas.openxmlformats.org/drawingml/2006/main" xmlns:p="http://schemas.openxmlformats.org/presentationml/2006/main" xmlns:r="http://schemas.openxmlformats.org/officeDocument/2006/relationships">
   <p:cSld>
     <p:spTree>
@@ -11466,13 +10760,13 @@
           <a:p>
             <a:pPr algn="l"/>
             <a:r>
-              <a:rPr sz="2900" b="1" i="0">
+              <a:rPr sz="2300" b="1" i="0">
                 <a:solidFill>
                   <a:srgbClr val="0F172A"/>
                 </a:solidFill>
                 <a:latin typeface="Helvetica Neue"/>
               </a:rPr>
-              <a:t>Structure was already in the text.</a:t>
+              <a:t>One gotcha before you promise anyone this works.</a:t>
             </a:r>
           </a:p>
         </p:txBody>
@@ -11507,7 +10801,7 @@
                 </a:solidFill>
                 <a:latin typeface="Helvetica Neue"/>
               </a:rPr>
-              <a:t>Nobody sorted these. Plot the tickets and the neighbourhoods appear on their own.</a:t>
+              <a:t>The model turns text into numbers by splitting it into chunks. Watch what that does to your product vocabulary.</a:t>
             </a:r>
           </a:p>
         </p:txBody>
@@ -11912,7 +11206,7 @@
       </p:sp>
       <p:pic>
         <p:nvPicPr>
-          <p:cNvPr id="15" name="Picture 14" descr="fig_map.png"/>
+          <p:cNvPr id="15" name="Picture 14" descr="d_jargon.png"/>
           <p:cNvPicPr>
             <a:picLocks noChangeAspect="1"/>
           </p:cNvPicPr>
@@ -11926,8 +11220,8 @@
         </p:blipFill>
         <p:spPr>
           <a:xfrm>
-            <a:off x="3290383" y="1965960"/>
-            <a:ext cx="5610928" cy="4251960"/>
+            <a:off x="518007" y="2436196"/>
+            <a:ext cx="11155680" cy="3311487"/>
           </a:xfrm>
           <a:prstGeom prst="rect">
             <a:avLst/>
@@ -11942,8 +11236,8 @@
         </p:nvSpPr>
         <p:spPr>
           <a:xfrm>
-            <a:off x="7773314" y="6345936"/>
-            <a:ext cx="3778300" cy="365760"/>
+            <a:off x="7172553" y="6345936"/>
+            <a:ext cx="4379061" cy="365760"/>
           </a:xfrm>
           <a:prstGeom prst="roundRect">
             <a:avLst>
@@ -11987,7 +11281,7 @@
         </p:nvSpPr>
         <p:spPr>
           <a:xfrm>
-            <a:off x="8815730" y="6396228"/>
+            <a:off x="8214969" y="6396228"/>
             <a:ext cx="685800" cy="265176"/>
           </a:xfrm>
           <a:prstGeom prst="roundRect">
@@ -12032,7 +11326,7 @@
         </p:nvSpPr>
         <p:spPr>
           <a:xfrm>
-            <a:off x="7928762" y="6460236"/>
+            <a:off x="7328001" y="6460236"/>
             <a:ext cx="914400" cy="219456"/>
           </a:xfrm>
           <a:prstGeom prst="rect">
@@ -12067,7 +11361,7 @@
         </p:nvSpPr>
         <p:spPr>
           <a:xfrm>
-            <a:off x="8815730" y="6451092"/>
+            <a:off x="8214969" y="6451092"/>
             <a:ext cx="685800" cy="219456"/>
           </a:xfrm>
           <a:prstGeom prst="rect">
@@ -12089,7 +11383,7 @@
                 </a:solidFill>
                 <a:latin typeface="Helvetica Neue"/>
               </a:rPr>
-              <a:t>STEP 5</a:t>
+              <a:t>STEP 7</a:t>
             </a:r>
           </a:p>
         </p:txBody>
@@ -12102,8 +11396,8 @@
         </p:nvSpPr>
         <p:spPr>
           <a:xfrm>
-            <a:off x="9620402" y="6460236"/>
-            <a:ext cx="1830628" cy="219456"/>
+            <a:off x="9019641" y="6460236"/>
+            <a:ext cx="2431389" cy="219456"/>
           </a:xfrm>
           <a:prstGeom prst="rect">
             <a:avLst/>
@@ -12124,7 +11418,7 @@
                 </a:solidFill>
                 <a:latin typeface="Helvetica Neue"/>
               </a:rPr>
-              <a:t>Map the whole inbox</a:t>
+              <a:t>Test your product vocabulary</a:t>
             </a:r>
           </a:p>
         </p:txBody>
@@ -12206,13 +11500,13 @@
           <a:p>
             <a:pPr algn="l"/>
             <a:r>
-              <a:rPr sz="2300" b="1" i="0">
+              <a:rPr sz="2900" b="1" i="0">
                 <a:solidFill>
                   <a:srgbClr val="0F172A"/>
                 </a:solidFill>
                 <a:latin typeface="Helvetica Neue"/>
               </a:rPr>
-              <a:t>One gotcha before you promise anyone this works.</a:t>
+              <a:t>How the meaning gets in there.</a:t>
             </a:r>
           </a:p>
         </p:txBody>
@@ -12247,7 +11541,7 @@
                 </a:solidFill>
                 <a:latin typeface="Helvetica Neue"/>
               </a:rPr>
-              <a:t>The model turns text into numbers by splitting it into chunks. Watch what that does to your product vocabulary.</a:t>
+              <a:t>We are going to watch the first eight minutes of this together, then come back to this picture.</a:t>
             </a:r>
           </a:p>
         </p:txBody>
@@ -12652,7 +11946,7 @@
       </p:sp>
       <p:pic>
         <p:nvPicPr>
-          <p:cNvPr id="15" name="Picture 14" descr="d_jargon.png"/>
+          <p:cNvPr id="15" name="Picture 14" descr="fig_blockflow.png"/>
           <p:cNvPicPr>
             <a:picLocks noChangeAspect="1"/>
           </p:cNvPicPr>
@@ -12666,8 +11960,8 @@
         </p:blipFill>
         <p:spPr>
           <a:xfrm>
-            <a:off x="518007" y="2436196"/>
-            <a:ext cx="11155680" cy="3311487"/>
+            <a:off x="956034" y="1906524"/>
+            <a:ext cx="10279625" cy="4041648"/>
           </a:xfrm>
           <a:prstGeom prst="rect">
             <a:avLst/>
@@ -12676,14 +11970,59 @@
       </p:pic>
       <p:sp>
         <p:nvSpPr>
-          <p:cNvPr id="16" name="Rounded Rectangle 15"/>
+          <p:cNvPr id="16" name="TextBox 15"/>
+          <p:cNvSpPr txBox="1"/>
+          <p:nvPr/>
+        </p:nvSpPr>
+        <p:spPr>
+          <a:xfrm>
+            <a:off x="640080" y="6053328"/>
+            <a:ext cx="10881360" cy="310896"/>
+          </a:xfrm>
+          <a:prstGeom prst="rect">
+            <a:avLst/>
+          </a:prstGeom>
+          <a:noFill/>
+        </p:spPr>
+        <p:txBody>
+          <a:bodyPr wrap="square">
+            <a:spAutoFit/>
+          </a:bodyPr>
+          <a:lstStyle/>
+          <a:p>
+            <a:pPr algn="ctr"/>
+            <a:r>
+              <a:rPr sz="1350" i="1">
+                <a:solidFill>
+                  <a:srgbClr val="475569"/>
+                </a:solidFill>
+                <a:latin typeface="Helvetica Neue"/>
+              </a:rPr>
+              <a:t>Watch 0:00 to 8:00, stop at the end of Queries.     </a:t>
+            </a:r>
+            <a:r>
+              <a:rPr sz="1350" b="1" u="sng">
+                <a:solidFill>
+                  <a:srgbClr val="1D4ED8"/>
+                </a:solidFill>
+                <a:latin typeface="Helvetica Neue"/>
+                <a:hlinkClick r:id="rId3"/>
+              </a:rPr>
+              <a:t>3Blue1Brown, Attention in transformers</a:t>
+            </a:r>
+          </a:p>
+        </p:txBody>
+      </p:sp>
+      <p:sp>
+        <p:nvSpPr>
+          <p:cNvPr id="17" name="Rounded Rectangle 16"/>
           <p:cNvSpPr/>
           <p:nvPr/>
         </p:nvSpPr>
         <p:spPr>
           <a:xfrm>
-            <a:off x="7172553" y="6345936"/>
-            <a:ext cx="4379061" cy="365760"/>
+            <a:off x="7105802" y="6345936"/>
+            <a:ext cx="4445812" cy="365760"/>
           </a:xfrm>
           <a:prstGeom prst="roundRect">
             <a:avLst>
@@ -12721,13 +12060,13 @@
       </p:sp>
       <p:sp>
         <p:nvSpPr>
-          <p:cNvPr id="17" name="Rounded Rectangle 16"/>
+          <p:cNvPr id="18" name="Rounded Rectangle 17"/>
           <p:cNvSpPr/>
           <p:nvPr/>
         </p:nvSpPr>
         <p:spPr>
           <a:xfrm>
-            <a:off x="8214969" y="6396228"/>
+            <a:off x="8148218" y="6396228"/>
             <a:ext cx="685800" cy="265176"/>
           </a:xfrm>
           <a:prstGeom prst="roundRect">
@@ -12766,13 +12105,13 @@
       </p:sp>
       <p:sp>
         <p:nvSpPr>
-          <p:cNvPr id="18" name="TextBox 17"/>
-          <p:cNvSpPr txBox="1"/>
-          <p:nvPr/>
-        </p:nvSpPr>
-        <p:spPr>
-          <a:xfrm>
-            <a:off x="7328001" y="6460236"/>
+          <p:cNvPr id="19" name="TextBox 18"/>
+          <p:cNvSpPr txBox="1"/>
+          <p:nvPr/>
+        </p:nvSpPr>
+        <p:spPr>
+          <a:xfrm>
+            <a:off x="7261250" y="6460236"/>
             <a:ext cx="914400" cy="219456"/>
           </a:xfrm>
           <a:prstGeom prst="rect">
@@ -12801,13 +12140,13 @@
       </p:sp>
       <p:sp>
         <p:nvSpPr>
-          <p:cNvPr id="19" name="TextBox 18"/>
-          <p:cNvSpPr txBox="1"/>
-          <p:nvPr/>
-        </p:nvSpPr>
-        <p:spPr>
-          <a:xfrm>
-            <a:off x="8214969" y="6451092"/>
+          <p:cNvPr id="20" name="TextBox 19"/>
+          <p:cNvSpPr txBox="1"/>
+          <p:nvPr/>
+        </p:nvSpPr>
+        <p:spPr>
+          <a:xfrm>
+            <a:off x="8148218" y="6451092"/>
             <a:ext cx="685800" cy="219456"/>
           </a:xfrm>
           <a:prstGeom prst="rect">
@@ -12829,21 +12168,21 @@
                 </a:solidFill>
                 <a:latin typeface="Helvetica Neue"/>
               </a:rPr>
-              <a:t>STEP 7</a:t>
-            </a:r>
-          </a:p>
-        </p:txBody>
-      </p:sp>
-      <p:sp>
-        <p:nvSpPr>
-          <p:cNvPr id="20" name="TextBox 19"/>
-          <p:cNvSpPr txBox="1"/>
-          <p:nvPr/>
-        </p:nvSpPr>
-        <p:spPr>
-          <a:xfrm>
-            <a:off x="9019641" y="6460236"/>
-            <a:ext cx="2431389" cy="219456"/>
+              <a:t>STEP 9</a:t>
+            </a:r>
+          </a:p>
+        </p:txBody>
+      </p:sp>
+      <p:sp>
+        <p:nvSpPr>
+          <p:cNvPr id="21" name="TextBox 20"/>
+          <p:cNvSpPr txBox="1"/>
+          <p:nvPr/>
+        </p:nvSpPr>
+        <p:spPr>
+          <a:xfrm>
+            <a:off x="8952890" y="6460236"/>
+            <a:ext cx="2498140" cy="219456"/>
           </a:xfrm>
           <a:prstGeom prst="rect">
             <a:avLst/>
@@ -12864,7 +12203,7 @@
                 </a:solidFill>
                 <a:latin typeface="Helvetica Neue"/>
               </a:rPr>
-              <a:t>Test your product vocabulary</a:t>
+              <a:t>Watch attention change a word</a:t>
             </a:r>
           </a:p>
         </p:txBody>
@@ -12913,11 +12252,11 @@
             <a:r>
               <a:rPr sz="1250" b="1" i="0" spc="220">
                 <a:solidFill>
-                  <a:srgbClr val="0EA5E9"/>
-                </a:solidFill>
-                <a:latin typeface="Helvetica Neue"/>
-              </a:rPr>
-              <a:t>RETRIEVE</a:t>
+                  <a:srgbClr val="7C3AED"/>
+                </a:solidFill>
+                <a:latin typeface="Helvetica Neue"/>
+              </a:rPr>
+              <a:t>ROUTE</a:t>
             </a:r>
           </a:p>
         </p:txBody>
@@ -12931,7 +12270,7 @@
         <p:spPr>
           <a:xfrm>
             <a:off x="640080" y="758952"/>
-            <a:ext cx="7680960" cy="704088"/>
+            <a:ext cx="7680960" cy="1179576"/>
           </a:xfrm>
           <a:prstGeom prst="rect">
             <a:avLst/>
@@ -12952,7 +12291,7 @@
                 </a:solidFill>
                 <a:latin typeface="Helvetica Neue"/>
               </a:rPr>
-              <a:t>How the meaning gets in there.</a:t>
+              <a:t>Sort the inbox with no training data at all.</a:t>
             </a:r>
           </a:p>
         </p:txBody>
@@ -13008,8 +12347,8 @@
         </p:nvSpPr>
         <p:spPr>
           <a:xfrm>
-            <a:off x="8549640" y="438912"/>
-            <a:ext cx="329184" cy="329184"/>
+            <a:off x="8586215" y="475488"/>
+            <a:ext cx="256032" cy="256032"/>
           </a:xfrm>
           <a:prstGeom prst="roundRect">
             <a:avLst>
@@ -13053,8 +12392,8 @@
         </p:nvSpPr>
         <p:spPr>
           <a:xfrm>
-            <a:off x="8494776" y="475488"/>
-            <a:ext cx="438912" cy="256032"/>
+            <a:off x="8531351" y="475488"/>
+            <a:ext cx="365760" cy="256032"/>
           </a:xfrm>
           <a:prstGeom prst="rect">
             <a:avLst/>
@@ -13069,7 +12408,7 @@
           <a:p>
             <a:pPr algn="ctr"/>
             <a:r>
-              <a:rPr sz="1300" b="1" i="0">
+              <a:rPr sz="1050" b="1" i="0">
                 <a:solidFill>
                   <a:srgbClr val="FFFFFF"/>
                 </a:solidFill>
@@ -13088,7 +12427,87 @@
         </p:nvSpPr>
         <p:spPr>
           <a:xfrm>
-            <a:off x="9244584" y="475488"/>
+            <a:off x="9208008" y="438912"/>
+            <a:ext cx="329184" cy="329184"/>
+          </a:xfrm>
+          <a:prstGeom prst="roundRect">
+            <a:avLst>
+              <a:gd name="adj" fmla="val 32000"/>
+            </a:avLst>
+          </a:prstGeom>
+          <a:solidFill>
+            <a:srgbClr val="D97706"/>
+          </a:solidFill>
+          <a:ln>
+            <a:noFill/>
+          </a:ln>
+        </p:spPr>
+        <p:style>
+          <a:lnRef idx="1">
+            <a:schemeClr val="accent1"/>
+          </a:lnRef>
+          <a:fillRef idx="3">
+            <a:schemeClr val="accent1"/>
+          </a:fillRef>
+          <a:effectRef idx="2">
+            <a:schemeClr val="accent1"/>
+          </a:effectRef>
+          <a:fontRef idx="minor">
+            <a:schemeClr val="lt1"/>
+          </a:fontRef>
+        </p:style>
+        <p:txBody>
+          <a:bodyPr rtlCol="0" anchor="ctr"/>
+          <a:lstStyle/>
+          <a:p>
+            <a:pPr algn="ctr"/>
+          </a:p>
+        </p:txBody>
+      </p:sp>
+      <p:sp>
+        <p:nvSpPr>
+          <p:cNvPr id="8" name="TextBox 7"/>
+          <p:cNvSpPr txBox="1"/>
+          <p:nvPr/>
+        </p:nvSpPr>
+        <p:spPr>
+          <a:xfrm>
+            <a:off x="9153144" y="475488"/>
+            <a:ext cx="438912" cy="256032"/>
+          </a:xfrm>
+          <a:prstGeom prst="rect">
+            <a:avLst/>
+          </a:prstGeom>
+          <a:noFill/>
+        </p:spPr>
+        <p:txBody>
+          <a:bodyPr wrap="square" lIns="0" rIns="0" tIns="0" bIns="0">
+            <a:spAutoFit/>
+          </a:bodyPr>
+          <a:lstStyle/>
+          <a:p>
+            <a:pPr algn="ctr"/>
+            <a:r>
+              <a:rPr sz="1300" b="1" i="0">
+                <a:solidFill>
+                  <a:srgbClr val="FFFFFF"/>
+                </a:solidFill>
+                <a:latin typeface="Helvetica Neue"/>
+              </a:rPr>
+              <a:t>2</a:t>
+            </a:r>
+          </a:p>
+        </p:txBody>
+      </p:sp>
+      <p:sp>
+        <p:nvSpPr>
+          <p:cNvPr id="9" name="Rounded Rectangle 8"/>
+          <p:cNvSpPr/>
+          <p:nvPr/>
+        </p:nvSpPr>
+        <p:spPr>
+          <a:xfrm>
+            <a:off x="9902951" y="475488"/>
             <a:ext cx="256032" cy="256032"/>
           </a:xfrm>
           <a:prstGeom prst="roundRect">
@@ -13127,13 +12546,13 @@
       </p:sp>
       <p:sp>
         <p:nvSpPr>
-          <p:cNvPr id="8" name="TextBox 7"/>
-          <p:cNvSpPr txBox="1"/>
-          <p:nvPr/>
-        </p:nvSpPr>
-        <p:spPr>
-          <a:xfrm>
-            <a:off x="9189719" y="475488"/>
+          <p:cNvPr id="10" name="TextBox 9"/>
+          <p:cNvSpPr txBox="1"/>
+          <p:nvPr/>
+        </p:nvSpPr>
+        <p:spPr>
+          <a:xfrm>
+            <a:off x="9848087" y="475488"/>
             <a:ext cx="365760" cy="256032"/>
           </a:xfrm>
           <a:prstGeom prst="rect">
@@ -13155,20 +12574,20 @@
                 </a:solidFill>
                 <a:latin typeface="Helvetica Neue"/>
               </a:rPr>
-              <a:t>2</a:t>
-            </a:r>
-          </a:p>
-        </p:txBody>
-      </p:sp>
-      <p:sp>
-        <p:nvSpPr>
-          <p:cNvPr id="9" name="Rounded Rectangle 8"/>
+              <a:t>3</a:t>
+            </a:r>
+          </a:p>
+        </p:txBody>
+      </p:sp>
+      <p:sp>
+        <p:nvSpPr>
+          <p:cNvPr id="11" name="Rounded Rectangle 10"/>
           <p:cNvSpPr/>
           <p:nvPr/>
         </p:nvSpPr>
         <p:spPr>
           <a:xfrm>
-            <a:off x="9902951" y="475488"/>
+            <a:off x="10561319" y="475488"/>
             <a:ext cx="256032" cy="256032"/>
           </a:xfrm>
           <a:prstGeom prst="roundRect">
@@ -13207,86 +12626,6 @@
       </p:sp>
       <p:sp>
         <p:nvSpPr>
-          <p:cNvPr id="10" name="TextBox 9"/>
-          <p:cNvSpPr txBox="1"/>
-          <p:nvPr/>
-        </p:nvSpPr>
-        <p:spPr>
-          <a:xfrm>
-            <a:off x="9848087" y="475488"/>
-            <a:ext cx="365760" cy="256032"/>
-          </a:xfrm>
-          <a:prstGeom prst="rect">
-            <a:avLst/>
-          </a:prstGeom>
-          <a:noFill/>
-        </p:spPr>
-        <p:txBody>
-          <a:bodyPr wrap="square" lIns="0" rIns="0" tIns="0" bIns="0">
-            <a:spAutoFit/>
-          </a:bodyPr>
-          <a:lstStyle/>
-          <a:p>
-            <a:pPr algn="ctr"/>
-            <a:r>
-              <a:rPr sz="1050" b="1" i="0">
-                <a:solidFill>
-                  <a:srgbClr val="AEB4BF"/>
-                </a:solidFill>
-                <a:latin typeface="Helvetica Neue"/>
-              </a:rPr>
-              <a:t>3</a:t>
-            </a:r>
-          </a:p>
-        </p:txBody>
-      </p:sp>
-      <p:sp>
-        <p:nvSpPr>
-          <p:cNvPr id="11" name="Rounded Rectangle 10"/>
-          <p:cNvSpPr/>
-          <p:nvPr/>
-        </p:nvSpPr>
-        <p:spPr>
-          <a:xfrm>
-            <a:off x="10561319" y="475488"/>
-            <a:ext cx="256032" cy="256032"/>
-          </a:xfrm>
-          <a:prstGeom prst="roundRect">
-            <a:avLst>
-              <a:gd name="adj" fmla="val 32000"/>
-            </a:avLst>
-          </a:prstGeom>
-          <a:solidFill>
-            <a:srgbClr val="E9EBF0"/>
-          </a:solidFill>
-          <a:ln>
-            <a:noFill/>
-          </a:ln>
-        </p:spPr>
-        <p:style>
-          <a:lnRef idx="1">
-            <a:schemeClr val="accent1"/>
-          </a:lnRef>
-          <a:fillRef idx="3">
-            <a:schemeClr val="accent1"/>
-          </a:fillRef>
-          <a:effectRef idx="2">
-            <a:schemeClr val="accent1"/>
-          </a:effectRef>
-          <a:fontRef idx="minor">
-            <a:schemeClr val="lt1"/>
-          </a:fontRef>
-        </p:style>
-        <p:txBody>
-          <a:bodyPr rtlCol="0" anchor="ctr"/>
-          <a:lstStyle/>
-          <a:p>
-            <a:pPr algn="ctr"/>
-          </a:p>
-        </p:txBody>
-      </p:sp>
-      <p:sp>
-        <p:nvSpPr>
           <p:cNvPr id="12" name="TextBox 11"/>
           <p:cNvSpPr txBox="1"/>
           <p:nvPr/>
@@ -13357,7 +12696,7 @@
       </p:sp>
       <p:pic>
         <p:nvPicPr>
-          <p:cNvPr id="14" name="Picture 13" descr="fig_blockflow.png"/>
+          <p:cNvPr id="14" name="Picture 13" descr="d_zs.png"/>
           <p:cNvPicPr>
             <a:picLocks noChangeAspect="1"/>
           </p:cNvPicPr>
@@ -13371,8 +12710,8 @@
         </p:blipFill>
         <p:spPr>
           <a:xfrm>
-            <a:off x="607178" y="1632204"/>
-            <a:ext cx="10977337" cy="4315968"/>
+            <a:off x="1473370" y="1965960"/>
+            <a:ext cx="9244954" cy="4297679"/>
           </a:xfrm>
           <a:prstGeom prst="rect">
             <a:avLst/>
@@ -13381,59 +12720,14 @@
       </p:pic>
       <p:sp>
         <p:nvSpPr>
-          <p:cNvPr id="15" name="TextBox 14"/>
-          <p:cNvSpPr txBox="1"/>
-          <p:nvPr/>
-        </p:nvSpPr>
-        <p:spPr>
-          <a:xfrm>
-            <a:off x="640080" y="6035040"/>
-            <a:ext cx="10881360" cy="310896"/>
-          </a:xfrm>
-          <a:prstGeom prst="rect">
-            <a:avLst/>
-          </a:prstGeom>
-          <a:noFill/>
-        </p:spPr>
-        <p:txBody>
-          <a:bodyPr wrap="square">
-            <a:spAutoFit/>
-          </a:bodyPr>
-          <a:lstStyle/>
-          <a:p>
-            <a:pPr algn="ctr"/>
-            <a:r>
-              <a:rPr sz="1350" i="1">
-                <a:solidFill>
-                  <a:srgbClr val="475569"/>
-                </a:solidFill>
-                <a:latin typeface="Helvetica Neue"/>
-              </a:rPr>
-              <a:t>You built this in Lecture 11.     Go deeper:  </a:t>
-            </a:r>
-            <a:r>
-              <a:rPr sz="1350" b="1" u="sng">
-                <a:solidFill>
-                  <a:srgbClr val="1D4ED8"/>
-                </a:solidFill>
-                <a:latin typeface="Helvetica Neue"/>
-                <a:hlinkClick r:id="rId3"/>
-              </a:rPr>
-              <a:t>3Blue1Brown, Attention in transformers (26 min)</a:t>
-            </a:r>
-          </a:p>
-        </p:txBody>
-      </p:sp>
-      <p:sp>
-        <p:nvSpPr>
-          <p:cNvPr id="16" name="Rounded Rectangle 15"/>
+          <p:cNvPr id="15" name="Rounded Rectangle 14"/>
           <p:cNvSpPr/>
           <p:nvPr/>
         </p:nvSpPr>
         <p:spPr>
           <a:xfrm>
-            <a:off x="7105802" y="6345936"/>
-            <a:ext cx="4445812" cy="365760"/>
+            <a:off x="6505041" y="6345936"/>
+            <a:ext cx="5046573" cy="365760"/>
           </a:xfrm>
           <a:prstGeom prst="roundRect">
             <a:avLst>
@@ -13471,14 +12765,14 @@
       </p:sp>
       <p:sp>
         <p:nvSpPr>
-          <p:cNvPr id="17" name="Rounded Rectangle 16"/>
+          <p:cNvPr id="16" name="Rounded Rectangle 15"/>
           <p:cNvSpPr/>
           <p:nvPr/>
         </p:nvSpPr>
         <p:spPr>
           <a:xfrm>
-            <a:off x="8148218" y="6396228"/>
-            <a:ext cx="685800" cy="265176"/>
+            <a:off x="7547457" y="6396228"/>
+            <a:ext cx="754380" cy="265176"/>
           </a:xfrm>
           <a:prstGeom prst="roundRect">
             <a:avLst>
@@ -13516,14 +12810,49 @@
       </p:sp>
       <p:sp>
         <p:nvSpPr>
+          <p:cNvPr id="17" name="TextBox 16"/>
+          <p:cNvSpPr txBox="1"/>
+          <p:nvPr/>
+        </p:nvSpPr>
+        <p:spPr>
+          <a:xfrm>
+            <a:off x="6660489" y="6460236"/>
+            <a:ext cx="914400" cy="219456"/>
+          </a:xfrm>
+          <a:prstGeom prst="rect">
+            <a:avLst/>
+          </a:prstGeom>
+          <a:noFill/>
+        </p:spPr>
+        <p:txBody>
+          <a:bodyPr wrap="none" lIns="0" rIns="0" tIns="0" bIns="0">
+            <a:spAutoFit/>
+          </a:bodyPr>
+          <a:lstStyle/>
+          <a:p>
+            <a:pPr algn="l"/>
+            <a:r>
+              <a:rPr sz="950" b="1" i="0">
+                <a:solidFill>
+                  <a:srgbClr val="A7F3D0"/>
+                </a:solidFill>
+                <a:latin typeface="Helvetica Neue"/>
+              </a:rPr>
+              <a:t>▶ NOTEBOOK</a:t>
+            </a:r>
+          </a:p>
+        </p:txBody>
+      </p:sp>
+      <p:sp>
+        <p:nvSpPr>
           <p:cNvPr id="18" name="TextBox 17"/>
           <p:cNvSpPr txBox="1"/>
           <p:nvPr/>
         </p:nvSpPr>
         <p:spPr>
           <a:xfrm>
-            <a:off x="7261250" y="6460236"/>
-            <a:ext cx="914400" cy="219456"/>
+            <a:off x="7547457" y="6451092"/>
+            <a:ext cx="754380" cy="219456"/>
           </a:xfrm>
           <a:prstGeom prst="rect">
             <a:avLst/>
@@ -13536,85 +12865,50 @@
           </a:bodyPr>
           <a:lstStyle/>
           <a:p>
+            <a:pPr algn="ctr"/>
+            <a:r>
+              <a:rPr sz="1100" b="1" i="0">
+                <a:solidFill>
+                  <a:srgbClr val="FFFFFF"/>
+                </a:solidFill>
+                <a:latin typeface="Helvetica Neue"/>
+              </a:rPr>
+              <a:t>STEP 13</a:t>
+            </a:r>
+          </a:p>
+        </p:txBody>
+      </p:sp>
+      <p:sp>
+        <p:nvSpPr>
+          <p:cNvPr id="19" name="TextBox 18"/>
+          <p:cNvSpPr txBox="1"/>
+          <p:nvPr/>
+        </p:nvSpPr>
+        <p:spPr>
+          <a:xfrm>
+            <a:off x="8420709" y="6460236"/>
+            <a:ext cx="3030321" cy="219456"/>
+          </a:xfrm>
+          <a:prstGeom prst="rect">
+            <a:avLst/>
+          </a:prstGeom>
+          <a:noFill/>
+        </p:spPr>
+        <p:txBody>
+          <a:bodyPr wrap="none" lIns="0" rIns="0" tIns="0" bIns="0">
+            <a:spAutoFit/>
+          </a:bodyPr>
+          <a:lstStyle/>
+          <a:p>
             <a:pPr algn="l"/>
             <a:r>
-              <a:rPr sz="950" b="1" i="0">
-                <a:solidFill>
-                  <a:srgbClr val="A7F3D0"/>
-                </a:solidFill>
-                <a:latin typeface="Helvetica Neue"/>
-              </a:rPr>
-              <a:t>▶ NOTEBOOK</a:t>
-            </a:r>
-          </a:p>
-        </p:txBody>
-      </p:sp>
-      <p:sp>
-        <p:nvSpPr>
-          <p:cNvPr id="19" name="TextBox 18"/>
-          <p:cNvSpPr txBox="1"/>
-          <p:nvPr/>
-        </p:nvSpPr>
-        <p:spPr>
-          <a:xfrm>
-            <a:off x="8148218" y="6451092"/>
-            <a:ext cx="685800" cy="219456"/>
-          </a:xfrm>
-          <a:prstGeom prst="rect">
-            <a:avLst/>
-          </a:prstGeom>
-          <a:noFill/>
-        </p:spPr>
-        <p:txBody>
-          <a:bodyPr wrap="none" lIns="0" rIns="0" tIns="0" bIns="0">
-            <a:spAutoFit/>
-          </a:bodyPr>
-          <a:lstStyle/>
-          <a:p>
-            <a:pPr algn="ctr"/>
-            <a:r>
-              <a:rPr sz="1100" b="1" i="0">
+              <a:rPr sz="1000" b="1" i="0">
                 <a:solidFill>
                   <a:srgbClr val="FFFFFF"/>
                 </a:solidFill>
                 <a:latin typeface="Helvetica Neue"/>
               </a:rPr>
-              <a:t>STEP 9</a:t>
-            </a:r>
-          </a:p>
-        </p:txBody>
-      </p:sp>
-      <p:sp>
-        <p:nvSpPr>
-          <p:cNvPr id="20" name="TextBox 19"/>
-          <p:cNvSpPr txBox="1"/>
-          <p:nvPr/>
-        </p:nvSpPr>
-        <p:spPr>
-          <a:xfrm>
-            <a:off x="8952890" y="6460236"/>
-            <a:ext cx="2498140" cy="219456"/>
-          </a:xfrm>
-          <a:prstGeom prst="rect">
-            <a:avLst/>
-          </a:prstGeom>
-          <a:noFill/>
-        </p:spPr>
-        <p:txBody>
-          <a:bodyPr wrap="none" lIns="0" rIns="0" tIns="0" bIns="0">
-            <a:spAutoFit/>
-          </a:bodyPr>
-          <a:lstStyle/>
-          <a:p>
-            <a:pPr algn="l"/>
-            <a:r>
-              <a:rPr sz="1000" b="1" i="0">
-                <a:solidFill>
-                  <a:srgbClr val="FFFFFF"/>
-                </a:solidFill>
-                <a:latin typeface="Helvetica Neue"/>
-              </a:rPr>
-              <a:t>Watch attention change a word</a:t>
+              <a:t>Route the inbox with no training data</a:t>
             </a:r>
           </a:p>
         </p:txBody>

--- a/Week 7/L13_Support_Copilot_v3_discussion.pptx
+++ b/Week 7/L13_Support_Copilot_v3_discussion.pptx
@@ -3633,7 +3633,7 @@
                 </a:solidFill>
                 <a:latin typeface="Helvetica Neue"/>
               </a:rPr>
-              <a:t>5,000 tickets a week, three agents, and nothing in the queue has ever been sorted. Let's ship anyway.</a:t>
+              <a:t>5,000 tickets a week, three support reps, and nothing in the queue has ever been sorted. Let's ship anyway.</a:t>
             </a:r>
           </a:p>
         </p:txBody>
@@ -9109,7 +9109,7 @@
                 </a:solidFill>
                 <a:latin typeface="Helvetica Neue"/>
               </a:rPr>
-              <a:t>And that reading is where the three agents lose their day.</a:t>
+              <a:t>And that reading is where the three support reps lose their day.</a:t>
             </a:r>
           </a:p>
         </p:txBody>
@@ -10480,8 +10480,8 @@
         </p:blipFill>
         <p:spPr>
           <a:xfrm>
-            <a:off x="518007" y="2013030"/>
-            <a:ext cx="11155680" cy="4157819"/>
+            <a:off x="1986177" y="1965960"/>
+            <a:ext cx="8219340" cy="4251960"/>
           </a:xfrm>
           <a:prstGeom prst="rect">
             <a:avLst/>

--- a/Week 7/L13_Support_Copilot_v3_discussion.pptx
+++ b/Week 7/L13_Support_Copilot_v3_discussion.pptx
@@ -3735,7 +3735,7 @@
         <p:spPr>
           <a:xfrm>
             <a:off x="640080" y="758952"/>
-            <a:ext cx="7680960" cy="704088"/>
+            <a:ext cx="7680960" cy="1179576"/>
           </a:xfrm>
           <a:prstGeom prst="rect">
             <a:avLst/>
@@ -3750,55 +3750,20 @@
           <a:p>
             <a:pPr algn="l"/>
             <a:r>
-              <a:rPr sz="2450" b="1" i="0">
+              <a:rPr sz="2900" b="1" i="0">
                 <a:solidFill>
                   <a:srgbClr val="0F172A"/>
                 </a:solidFill>
                 <a:latin typeface="Helvetica Neue"/>
               </a:rPr>
-              <a:t>It is not a classifier. It is a fact-checker.</a:t>
-            </a:r>
-          </a:p>
-        </p:txBody>
-      </p:sp>
-      <p:sp>
-        <p:nvSpPr>
-          <p:cNvPr id="4" name="TextBox 3"/>
-          <p:cNvSpPr txBox="1"/>
-          <p:nvPr/>
-        </p:nvSpPr>
-        <p:spPr>
-          <a:xfrm>
-            <a:off x="640080" y="1417320"/>
-            <a:ext cx="10424160" cy="457200"/>
-          </a:xfrm>
-          <a:prstGeom prst="rect">
-            <a:avLst/>
-          </a:prstGeom>
-          <a:noFill/>
-        </p:spPr>
-        <p:txBody>
-          <a:bodyPr wrap="square" lIns="0" rIns="0" tIns="0" bIns="0">
-            <a:spAutoFit/>
-          </a:bodyPr>
-          <a:lstStyle/>
-          <a:p>
-            <a:pPr algn="l"/>
-            <a:r>
-              <a:rPr sz="1500" b="0" i="0">
-                <a:solidFill>
-                  <a:srgbClr val="475569"/>
-                </a:solidFill>
-                <a:latin typeface="Helvetica Neue"/>
-              </a:rPr>
-              <a:t>The model judges whether a sentence YOU wrote is true of the ticket.</a:t>
-            </a:r>
-          </a:p>
-        </p:txBody>
-      </p:sp>
-      <p:sp>
-        <p:nvSpPr>
-          <p:cNvPr id="5" name="Rounded Rectangle 4"/>
+              <a:t>The descriptions you write ARE the program.</a:t>
+            </a:r>
+          </a:p>
+        </p:txBody>
+      </p:sp>
+      <p:sp>
+        <p:nvSpPr>
+          <p:cNvPr id="4" name="Rounded Rectangle 3"/>
           <p:cNvSpPr/>
           <p:nvPr/>
         </p:nvSpPr>
@@ -3841,7 +3806,7 @@
       </p:sp>
       <p:sp>
         <p:nvSpPr>
-          <p:cNvPr id="6" name="Rounded Rectangle 5"/>
+          <p:cNvPr id="5" name="Rounded Rectangle 4"/>
           <p:cNvSpPr/>
           <p:nvPr/>
         </p:nvSpPr>
@@ -3886,7 +3851,7 @@
       </p:sp>
       <p:sp>
         <p:nvSpPr>
-          <p:cNvPr id="7" name="TextBox 6"/>
+          <p:cNvPr id="6" name="TextBox 5"/>
           <p:cNvSpPr txBox="1"/>
           <p:nvPr/>
         </p:nvSpPr>
@@ -3921,7 +3886,7 @@
       </p:sp>
       <p:sp>
         <p:nvSpPr>
-          <p:cNvPr id="8" name="Rounded Rectangle 7"/>
+          <p:cNvPr id="7" name="Rounded Rectangle 6"/>
           <p:cNvSpPr/>
           <p:nvPr/>
         </p:nvSpPr>
@@ -3966,7 +3931,7 @@
       </p:sp>
       <p:sp>
         <p:nvSpPr>
-          <p:cNvPr id="9" name="TextBox 8"/>
+          <p:cNvPr id="8" name="TextBox 7"/>
           <p:cNvSpPr txBox="1"/>
           <p:nvPr/>
         </p:nvSpPr>
@@ -4001,7 +3966,7 @@
       </p:sp>
       <p:sp>
         <p:nvSpPr>
-          <p:cNvPr id="10" name="Rounded Rectangle 9"/>
+          <p:cNvPr id="9" name="Rounded Rectangle 8"/>
           <p:cNvSpPr/>
           <p:nvPr/>
         </p:nvSpPr>
@@ -4046,7 +4011,7 @@
       </p:sp>
       <p:sp>
         <p:nvSpPr>
-          <p:cNvPr id="11" name="TextBox 10"/>
+          <p:cNvPr id="10" name="TextBox 9"/>
           <p:cNvSpPr txBox="1"/>
           <p:nvPr/>
         </p:nvSpPr>
@@ -4081,7 +4046,7 @@
       </p:sp>
       <p:sp>
         <p:nvSpPr>
-          <p:cNvPr id="12" name="Rounded Rectangle 11"/>
+          <p:cNvPr id="11" name="Rounded Rectangle 10"/>
           <p:cNvSpPr/>
           <p:nvPr/>
         </p:nvSpPr>
@@ -4126,7 +4091,7 @@
       </p:sp>
       <p:sp>
         <p:nvSpPr>
-          <p:cNvPr id="13" name="TextBox 12"/>
+          <p:cNvPr id="12" name="TextBox 11"/>
           <p:cNvSpPr txBox="1"/>
           <p:nvPr/>
         </p:nvSpPr>
@@ -4161,7 +4126,7 @@
       </p:sp>
       <p:sp>
         <p:nvSpPr>
-          <p:cNvPr id="14" name="TextBox 13"/>
+          <p:cNvPr id="13" name="TextBox 12"/>
           <p:cNvSpPr txBox="1"/>
           <p:nvPr/>
         </p:nvSpPr>
@@ -4196,7 +4161,7 @@
       </p:sp>
       <p:pic>
         <p:nvPicPr>
-          <p:cNvPr id="15" name="Picture 14" descr="d_nli.png"/>
+          <p:cNvPr id="14" name="Picture 13" descr="d_wording.png"/>
           <p:cNvPicPr>
             <a:picLocks noChangeAspect="1"/>
           </p:cNvPicPr>
@@ -4210,8 +4175,8 @@
         </p:blipFill>
         <p:spPr>
           <a:xfrm>
-            <a:off x="518007" y="2596680"/>
-            <a:ext cx="11155680" cy="2350438"/>
+            <a:off x="518007" y="2769342"/>
+            <a:ext cx="11155680" cy="2599474"/>
           </a:xfrm>
           <a:prstGeom prst="rect">
             <a:avLst/>
@@ -4220,14 +4185,14 @@
       </p:pic>
       <p:sp>
         <p:nvSpPr>
-          <p:cNvPr id="16" name="Rounded Rectangle 15"/>
+          <p:cNvPr id="15" name="Rounded Rectangle 14"/>
           <p:cNvSpPr/>
           <p:nvPr/>
         </p:nvSpPr>
         <p:spPr>
           <a:xfrm>
-            <a:off x="7306056" y="6345936"/>
-            <a:ext cx="4245559" cy="365760"/>
+            <a:off x="6638544" y="6345936"/>
+            <a:ext cx="4913071" cy="365760"/>
           </a:xfrm>
           <a:prstGeom prst="roundRect">
             <a:avLst>
@@ -4265,13 +4230,13 @@
       </p:sp>
       <p:sp>
         <p:nvSpPr>
-          <p:cNvPr id="17" name="Rounded Rectangle 16"/>
+          <p:cNvPr id="16" name="Rounded Rectangle 15"/>
           <p:cNvSpPr/>
           <p:nvPr/>
         </p:nvSpPr>
         <p:spPr>
           <a:xfrm>
-            <a:off x="8348472" y="6396228"/>
+            <a:off x="7680960" y="6396228"/>
             <a:ext cx="754380" cy="265176"/>
           </a:xfrm>
           <a:prstGeom prst="roundRect">
@@ -4310,14 +4275,49 @@
       </p:sp>
       <p:sp>
         <p:nvSpPr>
+          <p:cNvPr id="17" name="TextBox 16"/>
+          <p:cNvSpPr txBox="1"/>
+          <p:nvPr/>
+        </p:nvSpPr>
+        <p:spPr>
+          <a:xfrm>
+            <a:off x="6793992" y="6460236"/>
+            <a:ext cx="914400" cy="219456"/>
+          </a:xfrm>
+          <a:prstGeom prst="rect">
+            <a:avLst/>
+          </a:prstGeom>
+          <a:noFill/>
+        </p:spPr>
+        <p:txBody>
+          <a:bodyPr wrap="none" lIns="0" rIns="0" tIns="0" bIns="0">
+            <a:spAutoFit/>
+          </a:bodyPr>
+          <a:lstStyle/>
+          <a:p>
+            <a:pPr algn="l"/>
+            <a:r>
+              <a:rPr sz="950" b="1" i="0">
+                <a:solidFill>
+                  <a:srgbClr val="A7F3D0"/>
+                </a:solidFill>
+                <a:latin typeface="Helvetica Neue"/>
+              </a:rPr>
+              <a:t>▶ NOTEBOOK</a:t>
+            </a:r>
+          </a:p>
+        </p:txBody>
+      </p:sp>
+      <p:sp>
+        <p:nvSpPr>
           <p:cNvPr id="18" name="TextBox 17"/>
           <p:cNvSpPr txBox="1"/>
           <p:nvPr/>
         </p:nvSpPr>
         <p:spPr>
           <a:xfrm>
-            <a:off x="7461504" y="6460236"/>
-            <a:ext cx="914400" cy="219456"/>
+            <a:off x="7680960" y="6451092"/>
+            <a:ext cx="754380" cy="219456"/>
           </a:xfrm>
           <a:prstGeom prst="rect">
             <a:avLst/>
@@ -4330,120 +4330,50 @@
           </a:bodyPr>
           <a:lstStyle/>
           <a:p>
+            <a:pPr algn="ctr"/>
+            <a:r>
+              <a:rPr sz="1100" b="1" i="0">
+                <a:solidFill>
+                  <a:srgbClr val="FFFFFF"/>
+                </a:solidFill>
+                <a:latin typeface="Helvetica Neue"/>
+              </a:rPr>
+              <a:t>STEP 16</a:t>
+            </a:r>
+          </a:p>
+        </p:txBody>
+      </p:sp>
+      <p:sp>
+        <p:nvSpPr>
+          <p:cNvPr id="19" name="TextBox 18"/>
+          <p:cNvSpPr txBox="1"/>
+          <p:nvPr/>
+        </p:nvSpPr>
+        <p:spPr>
+          <a:xfrm>
+            <a:off x="8554212" y="6460236"/>
+            <a:ext cx="2896819" cy="219456"/>
+          </a:xfrm>
+          <a:prstGeom prst="rect">
+            <a:avLst/>
+          </a:prstGeom>
+          <a:noFill/>
+        </p:spPr>
+        <p:txBody>
+          <a:bodyPr wrap="none" lIns="0" rIns="0" tIns="0" bIns="0">
+            <a:spAutoFit/>
+          </a:bodyPr>
+          <a:lstStyle/>
+          <a:p>
             <a:pPr algn="l"/>
             <a:r>
-              <a:rPr sz="950" b="1" i="0">
-                <a:solidFill>
-                  <a:srgbClr val="A7F3D0"/>
-                </a:solidFill>
-                <a:latin typeface="Helvetica Neue"/>
-              </a:rPr>
-              <a:t>▶ NOTEBOOK</a:t>
-            </a:r>
-          </a:p>
-        </p:txBody>
-      </p:sp>
-      <p:sp>
-        <p:nvSpPr>
-          <p:cNvPr id="19" name="TextBox 18"/>
-          <p:cNvSpPr txBox="1"/>
-          <p:nvPr/>
-        </p:nvSpPr>
-        <p:spPr>
-          <a:xfrm>
-            <a:off x="8348472" y="6451092"/>
-            <a:ext cx="754380" cy="219456"/>
-          </a:xfrm>
-          <a:prstGeom prst="rect">
-            <a:avLst/>
-          </a:prstGeom>
-          <a:noFill/>
-        </p:spPr>
-        <p:txBody>
-          <a:bodyPr wrap="none" lIns="0" rIns="0" tIns="0" bIns="0">
-            <a:spAutoFit/>
-          </a:bodyPr>
-          <a:lstStyle/>
-          <a:p>
-            <a:pPr algn="ctr"/>
-            <a:r>
-              <a:rPr sz="1100" b="1" i="0">
+              <a:rPr sz="1000" b="1" i="0">
                 <a:solidFill>
                   <a:srgbClr val="FFFFFF"/>
                 </a:solidFill>
                 <a:latin typeface="Helvetica Neue"/>
               </a:rPr>
-              <a:t>STEP 17</a:t>
-            </a:r>
-          </a:p>
-        </p:txBody>
-      </p:sp>
-      <p:sp>
-        <p:nvSpPr>
-          <p:cNvPr id="20" name="TextBox 19"/>
-          <p:cNvSpPr txBox="1"/>
-          <p:nvPr/>
-        </p:nvSpPr>
-        <p:spPr>
-          <a:xfrm>
-            <a:off x="9221724" y="6460236"/>
-            <a:ext cx="2229307" cy="219456"/>
-          </a:xfrm>
-          <a:prstGeom prst="rect">
-            <a:avLst/>
-          </a:prstGeom>
-          <a:noFill/>
-        </p:spPr>
-        <p:txBody>
-          <a:bodyPr wrap="none" lIns="0" rIns="0" tIns="0" bIns="0">
-            <a:spAutoFit/>
-          </a:bodyPr>
-          <a:lstStyle/>
-          <a:p>
-            <a:pPr algn="l"/>
-            <a:r>
-              <a:rPr sz="1000" b="1" i="0">
-                <a:solidFill>
-                  <a:srgbClr val="FFFFFF"/>
-                </a:solidFill>
-                <a:latin typeface="Helvetica Neue"/>
-              </a:rPr>
-              <a:t>See the entailment scores</a:t>
-            </a:r>
-          </a:p>
-        </p:txBody>
-      </p:sp>
-      <p:sp>
-        <p:nvSpPr>
-          <p:cNvPr id="21" name="TextBox 20"/>
-          <p:cNvSpPr txBox="1"/>
-          <p:nvPr/>
-        </p:nvSpPr>
-        <p:spPr>
-          <a:xfrm>
-            <a:off x="640080" y="5532120"/>
-            <a:ext cx="10881360" cy="640080"/>
-          </a:xfrm>
-          <a:prstGeom prst="rect">
-            <a:avLst/>
-          </a:prstGeom>
-          <a:noFill/>
-        </p:spPr>
-        <p:txBody>
-          <a:bodyPr wrap="square" lIns="0" rIns="0" tIns="0" bIns="0">
-            <a:spAutoFit/>
-          </a:bodyPr>
-          <a:lstStyle/>
-          <a:p>
-            <a:pPr algn="ctr"/>
-            <a:r>
-              <a:rPr sz="1500" b="0" i="1">
-                <a:solidFill>
-                  <a:srgbClr val="475569"/>
-                </a:solidFill>
-                <a:latin typeface="Helvetica Neue"/>
-              </a:rPr>
-              <a:t>Every category becomes a sentence: "This example is {your description}." The model scores all eight and picks whichever it most believes.</a:t>
+              <a:t>YOUR KNOB: rewrite the descriptions</a:t>
             </a:r>
           </a:p>
         </p:txBody>
@@ -4510,7 +4440,7 @@
         <p:spPr>
           <a:xfrm>
             <a:off x="640080" y="758952"/>
-            <a:ext cx="7680960" cy="1179576"/>
+            <a:ext cx="7680960" cy="704088"/>
           </a:xfrm>
           <a:prstGeom prst="rect">
             <a:avLst/>
@@ -4525,20 +4455,55 @@
           <a:p>
             <a:pPr algn="l"/>
             <a:r>
-              <a:rPr sz="2900" b="1" i="0">
+              <a:rPr sz="2450" b="1" i="0">
                 <a:solidFill>
                   <a:srgbClr val="0F172A"/>
                 </a:solidFill>
                 <a:latin typeface="Helvetica Neue"/>
               </a:rPr>
-              <a:t>The descriptions you write ARE the program.</a:t>
-            </a:r>
-          </a:p>
-        </p:txBody>
-      </p:sp>
-      <p:sp>
-        <p:nvSpPr>
-          <p:cNvPr id="4" name="Rounded Rectangle 3"/>
+              <a:t>It is not a classifier. It is a fact-checker.</a:t>
+            </a:r>
+          </a:p>
+        </p:txBody>
+      </p:sp>
+      <p:sp>
+        <p:nvSpPr>
+          <p:cNvPr id="4" name="TextBox 3"/>
+          <p:cNvSpPr txBox="1"/>
+          <p:nvPr/>
+        </p:nvSpPr>
+        <p:spPr>
+          <a:xfrm>
+            <a:off x="640080" y="1417320"/>
+            <a:ext cx="10424160" cy="457200"/>
+          </a:xfrm>
+          <a:prstGeom prst="rect">
+            <a:avLst/>
+          </a:prstGeom>
+          <a:noFill/>
+        </p:spPr>
+        <p:txBody>
+          <a:bodyPr wrap="square" lIns="0" rIns="0" tIns="0" bIns="0">
+            <a:spAutoFit/>
+          </a:bodyPr>
+          <a:lstStyle/>
+          <a:p>
+            <a:pPr algn="l"/>
+            <a:r>
+              <a:rPr sz="1500" b="0" i="0">
+                <a:solidFill>
+                  <a:srgbClr val="475569"/>
+                </a:solidFill>
+                <a:latin typeface="Helvetica Neue"/>
+              </a:rPr>
+              <a:t>The model judges whether a sentence YOU wrote is true of the ticket.</a:t>
+            </a:r>
+          </a:p>
+        </p:txBody>
+      </p:sp>
+      <p:sp>
+        <p:nvSpPr>
+          <p:cNvPr id="5" name="Rounded Rectangle 4"/>
           <p:cNvSpPr/>
           <p:nvPr/>
         </p:nvSpPr>
@@ -4581,7 +4546,7 @@
       </p:sp>
       <p:sp>
         <p:nvSpPr>
-          <p:cNvPr id="5" name="Rounded Rectangle 4"/>
+          <p:cNvPr id="6" name="Rounded Rectangle 5"/>
           <p:cNvSpPr/>
           <p:nvPr/>
         </p:nvSpPr>
@@ -4626,7 +4591,7 @@
       </p:sp>
       <p:sp>
         <p:nvSpPr>
-          <p:cNvPr id="6" name="TextBox 5"/>
+          <p:cNvPr id="7" name="TextBox 6"/>
           <p:cNvSpPr txBox="1"/>
           <p:nvPr/>
         </p:nvSpPr>
@@ -4661,7 +4626,7 @@
       </p:sp>
       <p:sp>
         <p:nvSpPr>
-          <p:cNvPr id="7" name="Rounded Rectangle 6"/>
+          <p:cNvPr id="8" name="Rounded Rectangle 7"/>
           <p:cNvSpPr/>
           <p:nvPr/>
         </p:nvSpPr>
@@ -4706,7 +4671,7 @@
       </p:sp>
       <p:sp>
         <p:nvSpPr>
-          <p:cNvPr id="8" name="TextBox 7"/>
+          <p:cNvPr id="9" name="TextBox 8"/>
           <p:cNvSpPr txBox="1"/>
           <p:nvPr/>
         </p:nvSpPr>
@@ -4741,7 +4706,7 @@
       </p:sp>
       <p:sp>
         <p:nvSpPr>
-          <p:cNvPr id="9" name="Rounded Rectangle 8"/>
+          <p:cNvPr id="10" name="Rounded Rectangle 9"/>
           <p:cNvSpPr/>
           <p:nvPr/>
         </p:nvSpPr>
@@ -4786,7 +4751,7 @@
       </p:sp>
       <p:sp>
         <p:nvSpPr>
-          <p:cNvPr id="10" name="TextBox 9"/>
+          <p:cNvPr id="11" name="TextBox 10"/>
           <p:cNvSpPr txBox="1"/>
           <p:nvPr/>
         </p:nvSpPr>
@@ -4821,7 +4786,7 @@
       </p:sp>
       <p:sp>
         <p:nvSpPr>
-          <p:cNvPr id="11" name="Rounded Rectangle 10"/>
+          <p:cNvPr id="12" name="Rounded Rectangle 11"/>
           <p:cNvSpPr/>
           <p:nvPr/>
         </p:nvSpPr>
@@ -4866,7 +4831,7 @@
       </p:sp>
       <p:sp>
         <p:nvSpPr>
-          <p:cNvPr id="12" name="TextBox 11"/>
+          <p:cNvPr id="13" name="TextBox 12"/>
           <p:cNvSpPr txBox="1"/>
           <p:nvPr/>
         </p:nvSpPr>
@@ -4901,7 +4866,7 @@
       </p:sp>
       <p:sp>
         <p:nvSpPr>
-          <p:cNvPr id="13" name="TextBox 12"/>
+          <p:cNvPr id="14" name="TextBox 13"/>
           <p:cNvSpPr txBox="1"/>
           <p:nvPr/>
         </p:nvSpPr>
@@ -4936,7 +4901,7 @@
       </p:sp>
       <p:pic>
         <p:nvPicPr>
-          <p:cNvPr id="14" name="Picture 13" descr="d_wording.png"/>
+          <p:cNvPr id="15" name="Picture 14" descr="d_nli.png"/>
           <p:cNvPicPr>
             <a:picLocks noChangeAspect="1"/>
           </p:cNvPicPr>
@@ -4950,8 +4915,8 @@
         </p:blipFill>
         <p:spPr>
           <a:xfrm>
-            <a:off x="518007" y="2769342"/>
-            <a:ext cx="11155680" cy="2599474"/>
+            <a:off x="518007" y="2596680"/>
+            <a:ext cx="11155680" cy="2350438"/>
           </a:xfrm>
           <a:prstGeom prst="rect">
             <a:avLst/>
@@ -4960,14 +4925,14 @@
       </p:pic>
       <p:sp>
         <p:nvSpPr>
-          <p:cNvPr id="15" name="Rounded Rectangle 14"/>
+          <p:cNvPr id="16" name="Rounded Rectangle 15"/>
           <p:cNvSpPr/>
           <p:nvPr/>
         </p:nvSpPr>
         <p:spPr>
           <a:xfrm>
-            <a:off x="6638544" y="6345936"/>
-            <a:ext cx="4913071" cy="365760"/>
+            <a:off x="7306056" y="6345936"/>
+            <a:ext cx="4245559" cy="365760"/>
           </a:xfrm>
           <a:prstGeom prst="roundRect">
             <a:avLst>
@@ -5005,13 +4970,13 @@
       </p:sp>
       <p:sp>
         <p:nvSpPr>
-          <p:cNvPr id="16" name="Rounded Rectangle 15"/>
+          <p:cNvPr id="17" name="Rounded Rectangle 16"/>
           <p:cNvSpPr/>
           <p:nvPr/>
         </p:nvSpPr>
         <p:spPr>
           <a:xfrm>
-            <a:off x="7680960" y="6396228"/>
+            <a:off x="8348472" y="6396228"/>
             <a:ext cx="754380" cy="265176"/>
           </a:xfrm>
           <a:prstGeom prst="roundRect">
@@ -5050,13 +5015,13 @@
       </p:sp>
       <p:sp>
         <p:nvSpPr>
-          <p:cNvPr id="17" name="TextBox 16"/>
-          <p:cNvSpPr txBox="1"/>
-          <p:nvPr/>
-        </p:nvSpPr>
-        <p:spPr>
-          <a:xfrm>
-            <a:off x="6793992" y="6460236"/>
+          <p:cNvPr id="18" name="TextBox 17"/>
+          <p:cNvSpPr txBox="1"/>
+          <p:nvPr/>
+        </p:nvSpPr>
+        <p:spPr>
+          <a:xfrm>
+            <a:off x="7461504" y="6460236"/>
             <a:ext cx="914400" cy="219456"/>
           </a:xfrm>
           <a:prstGeom prst="rect">
@@ -5085,13 +5050,13 @@
       </p:sp>
       <p:sp>
         <p:nvSpPr>
-          <p:cNvPr id="18" name="TextBox 17"/>
-          <p:cNvSpPr txBox="1"/>
-          <p:nvPr/>
-        </p:nvSpPr>
-        <p:spPr>
-          <a:xfrm>
-            <a:off x="7680960" y="6451092"/>
+          <p:cNvPr id="19" name="TextBox 18"/>
+          <p:cNvSpPr txBox="1"/>
+          <p:nvPr/>
+        </p:nvSpPr>
+        <p:spPr>
+          <a:xfrm>
+            <a:off x="8348472" y="6451092"/>
             <a:ext cx="754380" cy="219456"/>
           </a:xfrm>
           <a:prstGeom prst="rect">
@@ -5113,21 +5078,21 @@
                 </a:solidFill>
                 <a:latin typeface="Helvetica Neue"/>
               </a:rPr>
-              <a:t>STEP 16</a:t>
-            </a:r>
-          </a:p>
-        </p:txBody>
-      </p:sp>
-      <p:sp>
-        <p:nvSpPr>
-          <p:cNvPr id="19" name="TextBox 18"/>
-          <p:cNvSpPr txBox="1"/>
-          <p:nvPr/>
-        </p:nvSpPr>
-        <p:spPr>
-          <a:xfrm>
-            <a:off x="8554212" y="6460236"/>
-            <a:ext cx="2896819" cy="219456"/>
+              <a:t>STEP 17</a:t>
+            </a:r>
+          </a:p>
+        </p:txBody>
+      </p:sp>
+      <p:sp>
+        <p:nvSpPr>
+          <p:cNvPr id="20" name="TextBox 19"/>
+          <p:cNvSpPr txBox="1"/>
+          <p:nvPr/>
+        </p:nvSpPr>
+        <p:spPr>
+          <a:xfrm>
+            <a:off x="9221724" y="6460236"/>
+            <a:ext cx="2229307" cy="219456"/>
           </a:xfrm>
           <a:prstGeom prst="rect">
             <a:avLst/>
@@ -5148,7 +5113,42 @@
                 </a:solidFill>
                 <a:latin typeface="Helvetica Neue"/>
               </a:rPr>
-              <a:t>YOUR KNOB: rewrite the descriptions</a:t>
+              <a:t>See the entailment scores</a:t>
+            </a:r>
+          </a:p>
+        </p:txBody>
+      </p:sp>
+      <p:sp>
+        <p:nvSpPr>
+          <p:cNvPr id="21" name="TextBox 20"/>
+          <p:cNvSpPr txBox="1"/>
+          <p:nvPr/>
+        </p:nvSpPr>
+        <p:spPr>
+          <a:xfrm>
+            <a:off x="640080" y="5532120"/>
+            <a:ext cx="10881360" cy="640080"/>
+          </a:xfrm>
+          <a:prstGeom prst="rect">
+            <a:avLst/>
+          </a:prstGeom>
+          <a:noFill/>
+        </p:spPr>
+        <p:txBody>
+          <a:bodyPr wrap="square" lIns="0" rIns="0" tIns="0" bIns="0">
+            <a:spAutoFit/>
+          </a:bodyPr>
+          <a:lstStyle/>
+          <a:p>
+            <a:pPr algn="ctr"/>
+            <a:r>
+              <a:rPr sz="1500" b="0" i="1">
+                <a:solidFill>
+                  <a:srgbClr val="475569"/>
+                </a:solidFill>
+                <a:latin typeface="Helvetica Neue"/>
+              </a:rPr>
+              <a:t>Every category becomes a sentence: "This example is {your description}." The model scores all eight and picks whichever it most believes.</a:t>
             </a:r>
           </a:p>
         </p:txBody>
@@ -12726,8 +12726,8 @@
         </p:nvSpPr>
         <p:spPr>
           <a:xfrm>
-            <a:off x="6505041" y="6345936"/>
-            <a:ext cx="5046573" cy="365760"/>
+            <a:off x="6772046" y="6345936"/>
+            <a:ext cx="4779568" cy="365760"/>
           </a:xfrm>
           <a:prstGeom prst="roundRect">
             <a:avLst>
@@ -12771,8 +12771,8 @@
         </p:nvSpPr>
         <p:spPr>
           <a:xfrm>
-            <a:off x="7547457" y="6396228"/>
-            <a:ext cx="754380" cy="265176"/>
+            <a:off x="7814462" y="6396228"/>
+            <a:ext cx="960120" cy="265176"/>
           </a:xfrm>
           <a:prstGeom prst="roundRect">
             <a:avLst>
@@ -12816,7 +12816,7 @@
         </p:nvSpPr>
         <p:spPr>
           <a:xfrm>
-            <a:off x="6660489" y="6460236"/>
+            <a:off x="6927494" y="6460236"/>
             <a:ext cx="914400" cy="219456"/>
           </a:xfrm>
           <a:prstGeom prst="rect">
@@ -12851,8 +12851,8 @@
         </p:nvSpPr>
         <p:spPr>
           <a:xfrm>
-            <a:off x="7547457" y="6451092"/>
-            <a:ext cx="754380" cy="219456"/>
+            <a:off x="7814462" y="6451092"/>
+            <a:ext cx="960120" cy="219456"/>
           </a:xfrm>
           <a:prstGeom prst="rect">
             <a:avLst/>
@@ -12873,7 +12873,7 @@
                 </a:solidFill>
                 <a:latin typeface="Helvetica Neue"/>
               </a:rPr>
-              <a:t>STEP 13</a:t>
+              <a:t>STEP 13-15</a:t>
             </a:r>
           </a:p>
         </p:txBody>
@@ -12886,8 +12886,8 @@
         </p:nvSpPr>
         <p:spPr>
           <a:xfrm>
-            <a:off x="8420709" y="6460236"/>
-            <a:ext cx="3030321" cy="219456"/>
+            <a:off x="8893454" y="6460236"/>
+            <a:ext cx="2557576" cy="219456"/>
           </a:xfrm>
           <a:prstGeom prst="rect">
             <a:avLst/>
@@ -12908,7 +12908,7 @@
                 </a:solidFill>
                 <a:latin typeface="Helvetica Neue"/>
               </a:rPr>
-              <a:t>Route the inbox with no training data</a:t>
+              <a:t>Route the inbox, then grade it</a:t>
             </a:r>
           </a:p>
         </p:txBody>
